--- a/fitly/발표.pptx
+++ b/fitly/발표.pptx
@@ -779,7 +779,7 @@
           <a:p>
             <a:r>
               <a:rPr lang="en-US" dirty="0"/>
-              <a:t>GTM 은 두 축입니다. 단기 — 임용 유튜버 5~10명에게 무료 Pass 와 콘텐츠 합작. 장기 — 24년치 데이터를 SEO 블로그로 풀어 검색 유입. 12개월 로드맵은 7월 베타, 9월 정식, 12월 시즌 1 종료, 2027년 3월 시즌 2 v2 출시. 첫 시즌 데이터로 PMF 검증 후 v2 로 본격 운영합니다.</a:t>
+              <a:t>GTM 은 두 축입니다. 단기 — 임용 유튜버 5~10명에게 무료 Pass 와 콘텐츠 합작. 그리고 교대생이 극도로 밀집한 에브리타임·초임공 커뮤니티에 시드 후기와 무료 체험을 풀어 타겟층 바이럴을 일으킵니다. 장기 — 24년치 데이터를 SEO 블로그로 풀어 검색 유입. 12개월 로드맵은 7월 베타, 9월 정식, 12월 시즌 1 종료, 2027년 3월 시즌 2 v2 출시. 첫 시즌 데이터로 PMF 검증 후 v2 로 본격 운영합니다.</a:t>
             </a:r>
             <a:endParaRPr lang="en-US" dirty="0"/>
           </a:p>
@@ -867,7 +867,7 @@
           <a:p>
             <a:r>
               <a:rPr lang="en-US" dirty="0"/>
-              <a:t>마지막으로, 14일 AI 협업 회고를 짧게. 225 commits, 56 PR — 프로젝트 원칙 문서까지 4 계층으로 진화시켰습니다. 가장 인상 깊은 극복점은 — AI 분석 결과가 빈 화면으로 표시되는 회귀였습니다. LLM JSON 파싱이 실패하면 코드가 조용히 빈 배열로 fallback 하고 있었습니다. 사용자는 ‘내 답안이 부족하구나’ 오해하지만, 실제로는 LLM 응답이 토큰 한도에 잘렸던 것입니다. 여기서 배운 원칙 — AI 출력 처리에서 fallback 은 명시 에러로 surface 해야 한다, silent 는 사용자에게 정직하지 않다. 우리 정직성 원칙과 정합하는 약속으로 코드에 박았습니다. 감사합니다.</a:t>
+              <a:t>마지막으로, 14일 AI 협업 회고를 짧게. 225 commits, 56 PR — 프로젝트 원칙 문서까지 4 계층으로 진화시켰습니다. 회고는 두 축으로 묶었습니다. 첫째, 규율 — 처음에는 단일 CLAUDE.md 지침서로 AI 에게 명령했지만, AI 가 자주 말을 안 들었고 스코프가 폭주했습니다. 그래서 한국 법체계처럼 4 계층 위계 — 헌법, 법률, 시행령, 시행규칙 — 으로 분리하고, 모든 결정에 헌법 조항 근거를 명시하도록 의무화했습니다. 이후 AI 가 임의로 신규 기능을 추가하는 일이 사라졌습니다. 둘째, 정직 — AI 분석 결과가 빈 화면으로 표시되는 회귀였습니다. LLM JSON 파싱 실패 시 코드가 조용히 빈 배열로 fallback 하고 있었습니다. 여기서 배운 원칙은, fallback 은 명시 에러로 surface 해야 한다, silent 는 사용자에게 정직하지 않다. 감사합니다.</a:t>
             </a:r>
             <a:endParaRPr lang="en-US" dirty="0"/>
           </a:p>
@@ -1731,6 +1731,4878 @@
 </p:sldLayout>
 </file>
 
+<file path=ppt/slideLayouts/slideLayout2.xml><?xml version="1.0" encoding="utf-8"?>
+<p:sldLayout xmlns:a="http://schemas.openxmlformats.org/drawingml/2006/main" xmlns:r="http://schemas.openxmlformats.org/officeDocument/2006/relationships" xmlns:p="http://schemas.openxmlformats.org/presentationml/2006/main" preserve="1">
+  <p:cSld name="FITLY_PAPER">
+    <p:bg>
+      <p:bgPr>
+        <a:solidFill>
+          <a:srgbClr val="FAF6EE"/>
+        </a:solidFill>
+      </p:bgPr>
+    </p:bg>
+    <p:spTree>
+      <p:nvGrpSpPr>
+        <p:cNvPr id="1" name=""/>
+        <p:cNvGrpSpPr/>
+        <p:nvPr/>
+      </p:nvGrpSpPr>
+      <p:grpSpPr>
+        <a:xfrm>
+          <a:off x="0" y="0"/>
+          <a:ext cx="0" cy="0"/>
+          <a:chOff x="0" y="0"/>
+          <a:chExt cx="0" cy="0"/>
+        </a:xfrm>
+      </p:grpSpPr>
+      <p:sp>
+        <p:nvSpPr>
+          <p:cNvPr id="2" name="Shape 0"/>
+          <p:cNvSpPr/>
+          <p:nvPr/>
+        </p:nvSpPr>
+        <p:spPr>
+          <a:xfrm>
+            <a:off x="2258568" y="1855318"/>
+            <a:ext cx="19202" cy="19202"/>
+          </a:xfrm>
+          <a:prstGeom prst="rect">
+            <a:avLst/>
+          </a:prstGeom>
+          <a:solidFill>
+            <a:srgbClr val="1A2027">
+              <a:alpha val="10000"/>
+            </a:srgbClr>
+          </a:solidFill>
+          <a:ln/>
+        </p:spPr>
+      </p:sp>
+      <p:sp>
+        <p:nvSpPr>
+          <p:cNvPr id="3" name="Shape 1"/>
+          <p:cNvSpPr/>
+          <p:nvPr/>
+        </p:nvSpPr>
+        <p:spPr>
+          <a:xfrm>
+            <a:off x="6032297" y="3097987"/>
+            <a:ext cx="10973" cy="10973"/>
+          </a:xfrm>
+          <a:prstGeom prst="rect">
+            <a:avLst/>
+          </a:prstGeom>
+          <a:solidFill>
+            <a:srgbClr val="1A2027">
+              <a:alpha val="9000"/>
+            </a:srgbClr>
+          </a:solidFill>
+          <a:ln/>
+        </p:spPr>
+      </p:sp>
+      <p:sp>
+        <p:nvSpPr>
+          <p:cNvPr id="4" name="Shape 2"/>
+          <p:cNvSpPr/>
+          <p:nvPr/>
+        </p:nvSpPr>
+        <p:spPr>
+          <a:xfrm>
+            <a:off x="5529377" y="3591763"/>
+            <a:ext cx="17374" cy="17374"/>
+          </a:xfrm>
+          <a:prstGeom prst="rect">
+            <a:avLst/>
+          </a:prstGeom>
+          <a:solidFill>
+            <a:srgbClr val="1A2027">
+              <a:alpha val="7000"/>
+            </a:srgbClr>
+          </a:solidFill>
+          <a:ln/>
+        </p:spPr>
+      </p:sp>
+      <p:sp>
+        <p:nvSpPr>
+          <p:cNvPr id="5" name="Shape 3"/>
+          <p:cNvSpPr/>
+          <p:nvPr/>
+        </p:nvSpPr>
+        <p:spPr>
+          <a:xfrm>
+            <a:off x="3199486" y="294437"/>
+            <a:ext cx="14630" cy="14630"/>
+          </a:xfrm>
+          <a:prstGeom prst="rect">
+            <a:avLst/>
+          </a:prstGeom>
+          <a:solidFill>
+            <a:srgbClr val="1A2027">
+              <a:alpha val="10000"/>
+            </a:srgbClr>
+          </a:solidFill>
+          <a:ln/>
+        </p:spPr>
+      </p:sp>
+      <p:sp>
+        <p:nvSpPr>
+          <p:cNvPr id="6" name="Shape 4"/>
+          <p:cNvSpPr/>
+          <p:nvPr/>
+        </p:nvSpPr>
+        <p:spPr>
+          <a:xfrm>
+            <a:off x="693115" y="2381098"/>
+            <a:ext cx="17374" cy="17374"/>
+          </a:xfrm>
+          <a:prstGeom prst="rect">
+            <a:avLst/>
+          </a:prstGeom>
+          <a:solidFill>
+            <a:srgbClr val="1A2027">
+              <a:alpha val="6000"/>
+            </a:srgbClr>
+          </a:solidFill>
+          <a:ln/>
+        </p:spPr>
+      </p:sp>
+      <p:sp>
+        <p:nvSpPr>
+          <p:cNvPr id="7" name="Shape 5"/>
+          <p:cNvSpPr/>
+          <p:nvPr/>
+        </p:nvSpPr>
+        <p:spPr>
+          <a:xfrm>
+            <a:off x="3922776" y="1035101"/>
+            <a:ext cx="17374" cy="17374"/>
+          </a:xfrm>
+          <a:prstGeom prst="rect">
+            <a:avLst/>
+          </a:prstGeom>
+          <a:solidFill>
+            <a:srgbClr val="1A2027">
+              <a:alpha val="12000"/>
+            </a:srgbClr>
+          </a:solidFill>
+          <a:ln/>
+        </p:spPr>
+      </p:sp>
+      <p:sp>
+        <p:nvSpPr>
+          <p:cNvPr id="8" name="Shape 6"/>
+          <p:cNvSpPr/>
+          <p:nvPr/>
+        </p:nvSpPr>
+        <p:spPr>
+          <a:xfrm>
+            <a:off x="3824021" y="4380890"/>
+            <a:ext cx="12802" cy="12802"/>
+          </a:xfrm>
+          <a:prstGeom prst="rect">
+            <a:avLst/>
+          </a:prstGeom>
+          <a:solidFill>
+            <a:srgbClr val="1A2027">
+              <a:alpha val="8000"/>
+            </a:srgbClr>
+          </a:solidFill>
+          <a:ln/>
+        </p:spPr>
+      </p:sp>
+      <p:sp>
+        <p:nvSpPr>
+          <p:cNvPr id="9" name="Shape 7"/>
+          <p:cNvSpPr/>
+          <p:nvPr/>
+        </p:nvSpPr>
+        <p:spPr>
+          <a:xfrm>
+            <a:off x="6879031" y="4144975"/>
+            <a:ext cx="20117" cy="20117"/>
+          </a:xfrm>
+          <a:prstGeom prst="rect">
+            <a:avLst/>
+          </a:prstGeom>
+          <a:solidFill>
+            <a:srgbClr val="1A2027">
+              <a:alpha val="12000"/>
+            </a:srgbClr>
+          </a:solidFill>
+          <a:ln/>
+        </p:spPr>
+      </p:sp>
+      <p:sp>
+        <p:nvSpPr>
+          <p:cNvPr id="10" name="Shape 8"/>
+          <p:cNvSpPr/>
+          <p:nvPr/>
+        </p:nvSpPr>
+        <p:spPr>
+          <a:xfrm>
+            <a:off x="684886" y="1873606"/>
+            <a:ext cx="20117" cy="20117"/>
+          </a:xfrm>
+          <a:prstGeom prst="rect">
+            <a:avLst/>
+          </a:prstGeom>
+          <a:solidFill>
+            <a:srgbClr val="1A2027">
+              <a:alpha val="9000"/>
+            </a:srgbClr>
+          </a:solidFill>
+          <a:ln/>
+        </p:spPr>
+      </p:sp>
+      <p:sp>
+        <p:nvSpPr>
+          <p:cNvPr id="11" name="Shape 9"/>
+          <p:cNvSpPr/>
+          <p:nvPr/>
+        </p:nvSpPr>
+        <p:spPr>
+          <a:xfrm>
+            <a:off x="5958230" y="4636922"/>
+            <a:ext cx="17374" cy="17374"/>
+          </a:xfrm>
+          <a:prstGeom prst="rect">
+            <a:avLst/>
+          </a:prstGeom>
+          <a:solidFill>
+            <a:srgbClr val="1A2027">
+              <a:alpha val="5000"/>
+            </a:srgbClr>
+          </a:solidFill>
+          <a:ln/>
+        </p:spPr>
+      </p:sp>
+      <p:sp>
+        <p:nvSpPr>
+          <p:cNvPr id="12" name="Shape 10"/>
+          <p:cNvSpPr/>
+          <p:nvPr/>
+        </p:nvSpPr>
+        <p:spPr>
+          <a:xfrm>
+            <a:off x="4739335" y="3344875"/>
+            <a:ext cx="14630" cy="14630"/>
+          </a:xfrm>
+          <a:prstGeom prst="rect">
+            <a:avLst/>
+          </a:prstGeom>
+          <a:solidFill>
+            <a:srgbClr val="1A2027">
+              <a:alpha val="5000"/>
+            </a:srgbClr>
+          </a:solidFill>
+          <a:ln/>
+        </p:spPr>
+      </p:sp>
+      <p:sp>
+        <p:nvSpPr>
+          <p:cNvPr id="13" name="Shape 11"/>
+          <p:cNvSpPr/>
+          <p:nvPr/>
+        </p:nvSpPr>
+        <p:spPr>
+          <a:xfrm>
+            <a:off x="798271" y="4189781"/>
+            <a:ext cx="19202" cy="19202"/>
+          </a:xfrm>
+          <a:prstGeom prst="rect">
+            <a:avLst/>
+          </a:prstGeom>
+          <a:solidFill>
+            <a:srgbClr val="1A2027">
+              <a:alpha val="12000"/>
+            </a:srgbClr>
+          </a:solidFill>
+          <a:ln/>
+        </p:spPr>
+      </p:sp>
+      <p:sp>
+        <p:nvSpPr>
+          <p:cNvPr id="14" name="Shape 12"/>
+          <p:cNvSpPr/>
+          <p:nvPr/>
+        </p:nvSpPr>
+        <p:spPr>
+          <a:xfrm>
+            <a:off x="6567221" y="1433779"/>
+            <a:ext cx="17374" cy="17374"/>
+          </a:xfrm>
+          <a:prstGeom prst="rect">
+            <a:avLst/>
+          </a:prstGeom>
+          <a:solidFill>
+            <a:srgbClr val="1A2027">
+              <a:alpha val="6000"/>
+            </a:srgbClr>
+          </a:solidFill>
+          <a:ln/>
+        </p:spPr>
+      </p:sp>
+      <p:sp>
+        <p:nvSpPr>
+          <p:cNvPr id="15" name="Shape 13"/>
+          <p:cNvSpPr/>
+          <p:nvPr/>
+        </p:nvSpPr>
+        <p:spPr>
+          <a:xfrm>
+            <a:off x="7893101" y="294437"/>
+            <a:ext cx="16459" cy="16459"/>
+          </a:xfrm>
+          <a:prstGeom prst="rect">
+            <a:avLst/>
+          </a:prstGeom>
+          <a:solidFill>
+            <a:srgbClr val="1A2027">
+              <a:alpha val="8000"/>
+            </a:srgbClr>
+          </a:solidFill>
+          <a:ln/>
+        </p:spPr>
+      </p:sp>
+      <p:sp>
+        <p:nvSpPr>
+          <p:cNvPr id="16" name="Shape 14"/>
+          <p:cNvSpPr/>
+          <p:nvPr/>
+        </p:nvSpPr>
+        <p:spPr>
+          <a:xfrm>
+            <a:off x="5719572" y="1099109"/>
+            <a:ext cx="18288" cy="18288"/>
+          </a:xfrm>
+          <a:prstGeom prst="rect">
+            <a:avLst/>
+          </a:prstGeom>
+          <a:solidFill>
+            <a:srgbClr val="1A2027">
+              <a:alpha val="7000"/>
+            </a:srgbClr>
+          </a:solidFill>
+          <a:ln/>
+        </p:spPr>
+      </p:sp>
+      <p:sp>
+        <p:nvSpPr>
+          <p:cNvPr id="17" name="Shape 15"/>
+          <p:cNvSpPr/>
+          <p:nvPr/>
+        </p:nvSpPr>
+        <p:spPr>
+          <a:xfrm>
+            <a:off x="8577986" y="5012741"/>
+            <a:ext cx="18288" cy="18288"/>
+          </a:xfrm>
+          <a:prstGeom prst="rect">
+            <a:avLst/>
+          </a:prstGeom>
+          <a:solidFill>
+            <a:srgbClr val="1A2027">
+              <a:alpha val="9000"/>
+            </a:srgbClr>
+          </a:solidFill>
+          <a:ln/>
+        </p:spPr>
+      </p:sp>
+      <p:sp>
+        <p:nvSpPr>
+          <p:cNvPr id="18" name="Shape 16"/>
+          <p:cNvSpPr/>
+          <p:nvPr/>
+        </p:nvSpPr>
+        <p:spPr>
+          <a:xfrm>
+            <a:off x="6761074" y="950976"/>
+            <a:ext cx="14630" cy="14630"/>
+          </a:xfrm>
+          <a:prstGeom prst="rect">
+            <a:avLst/>
+          </a:prstGeom>
+          <a:solidFill>
+            <a:srgbClr val="1A2027">
+              <a:alpha val="5000"/>
+            </a:srgbClr>
+          </a:solidFill>
+          <a:ln/>
+        </p:spPr>
+      </p:sp>
+      <p:sp>
+        <p:nvSpPr>
+          <p:cNvPr id="19" name="Shape 17"/>
+          <p:cNvSpPr/>
+          <p:nvPr/>
+        </p:nvSpPr>
+        <p:spPr>
+          <a:xfrm>
+            <a:off x="6768389" y="1624889"/>
+            <a:ext cx="19202" cy="19202"/>
+          </a:xfrm>
+          <a:prstGeom prst="rect">
+            <a:avLst/>
+          </a:prstGeom>
+          <a:solidFill>
+            <a:srgbClr val="1A2027">
+              <a:alpha val="12000"/>
+            </a:srgbClr>
+          </a:solidFill>
+          <a:ln/>
+        </p:spPr>
+      </p:sp>
+      <p:sp>
+        <p:nvSpPr>
+          <p:cNvPr id="20" name="Shape 18"/>
+          <p:cNvSpPr/>
+          <p:nvPr/>
+        </p:nvSpPr>
+        <p:spPr>
+          <a:xfrm>
+            <a:off x="6774790" y="4215384"/>
+            <a:ext cx="17374" cy="17374"/>
+          </a:xfrm>
+          <a:prstGeom prst="rect">
+            <a:avLst/>
+          </a:prstGeom>
+          <a:solidFill>
+            <a:srgbClr val="1A2027">
+              <a:alpha val="11000"/>
+            </a:srgbClr>
+          </a:solidFill>
+          <a:ln/>
+        </p:spPr>
+      </p:sp>
+      <p:sp>
+        <p:nvSpPr>
+          <p:cNvPr id="21" name="Shape 19"/>
+          <p:cNvSpPr/>
+          <p:nvPr/>
+        </p:nvSpPr>
+        <p:spPr>
+          <a:xfrm>
+            <a:off x="5372100" y="2261311"/>
+            <a:ext cx="11887" cy="11887"/>
+          </a:xfrm>
+          <a:prstGeom prst="rect">
+            <a:avLst/>
+          </a:prstGeom>
+          <a:solidFill>
+            <a:srgbClr val="1A2027">
+              <a:alpha val="12000"/>
+            </a:srgbClr>
+          </a:solidFill>
+          <a:ln/>
+        </p:spPr>
+      </p:sp>
+      <p:sp>
+        <p:nvSpPr>
+          <p:cNvPr id="22" name="Shape 20"/>
+          <p:cNvSpPr/>
+          <p:nvPr/>
+        </p:nvSpPr>
+        <p:spPr>
+          <a:xfrm>
+            <a:off x="1637690" y="3248863"/>
+            <a:ext cx="17374" cy="17374"/>
+          </a:xfrm>
+          <a:prstGeom prst="rect">
+            <a:avLst/>
+          </a:prstGeom>
+          <a:solidFill>
+            <a:srgbClr val="1A2027">
+              <a:alpha val="8000"/>
+            </a:srgbClr>
+          </a:solidFill>
+          <a:ln/>
+        </p:spPr>
+      </p:sp>
+      <p:sp>
+        <p:nvSpPr>
+          <p:cNvPr id="23" name="Shape 21"/>
+          <p:cNvSpPr/>
+          <p:nvPr/>
+        </p:nvSpPr>
+        <p:spPr>
+          <a:xfrm>
+            <a:off x="1481328" y="2634386"/>
+            <a:ext cx="13716" cy="13716"/>
+          </a:xfrm>
+          <a:prstGeom prst="rect">
+            <a:avLst/>
+          </a:prstGeom>
+          <a:solidFill>
+            <a:srgbClr val="1A2027">
+              <a:alpha val="9000"/>
+            </a:srgbClr>
+          </a:solidFill>
+          <a:ln/>
+        </p:spPr>
+      </p:sp>
+      <p:sp>
+        <p:nvSpPr>
+          <p:cNvPr id="24" name="Shape 22"/>
+          <p:cNvSpPr/>
+          <p:nvPr/>
+        </p:nvSpPr>
+        <p:spPr>
+          <a:xfrm>
+            <a:off x="1955902" y="3881628"/>
+            <a:ext cx="16459" cy="16459"/>
+          </a:xfrm>
+          <a:prstGeom prst="rect">
+            <a:avLst/>
+          </a:prstGeom>
+          <a:solidFill>
+            <a:srgbClr val="1A2027">
+              <a:alpha val="7000"/>
+            </a:srgbClr>
+          </a:solidFill>
+          <a:ln/>
+        </p:spPr>
+      </p:sp>
+      <p:sp>
+        <p:nvSpPr>
+          <p:cNvPr id="25" name="Shape 23"/>
+          <p:cNvSpPr/>
+          <p:nvPr/>
+        </p:nvSpPr>
+        <p:spPr>
+          <a:xfrm>
+            <a:off x="317297" y="2081174"/>
+            <a:ext cx="15545" cy="15545"/>
+          </a:xfrm>
+          <a:prstGeom prst="rect">
+            <a:avLst/>
+          </a:prstGeom>
+          <a:solidFill>
+            <a:srgbClr val="1A2027">
+              <a:alpha val="5000"/>
+            </a:srgbClr>
+          </a:solidFill>
+          <a:ln/>
+        </p:spPr>
+      </p:sp>
+      <p:sp>
+        <p:nvSpPr>
+          <p:cNvPr id="26" name="Shape 24"/>
+          <p:cNvSpPr/>
+          <p:nvPr/>
+        </p:nvSpPr>
+        <p:spPr>
+          <a:xfrm>
+            <a:off x="4087368" y="2928823"/>
+            <a:ext cx="15545" cy="15545"/>
+          </a:xfrm>
+          <a:prstGeom prst="rect">
+            <a:avLst/>
+          </a:prstGeom>
+          <a:solidFill>
+            <a:srgbClr val="1A2027">
+              <a:alpha val="7000"/>
+            </a:srgbClr>
+          </a:solidFill>
+          <a:ln/>
+        </p:spPr>
+      </p:sp>
+      <p:sp>
+        <p:nvSpPr>
+          <p:cNvPr id="27" name="Shape 25"/>
+          <p:cNvSpPr/>
+          <p:nvPr/>
+        </p:nvSpPr>
+        <p:spPr>
+          <a:xfrm>
+            <a:off x="2455164" y="2254910"/>
+            <a:ext cx="21031" cy="21031"/>
+          </a:xfrm>
+          <a:prstGeom prst="rect">
+            <a:avLst/>
+          </a:prstGeom>
+          <a:solidFill>
+            <a:srgbClr val="1A2027">
+              <a:alpha val="6000"/>
+            </a:srgbClr>
+          </a:solidFill>
+          <a:ln/>
+        </p:spPr>
+      </p:sp>
+      <p:sp>
+        <p:nvSpPr>
+          <p:cNvPr id="28" name="Shape 26"/>
+          <p:cNvSpPr/>
+          <p:nvPr/>
+        </p:nvSpPr>
+        <p:spPr>
+          <a:xfrm>
+            <a:off x="7212787" y="426110"/>
+            <a:ext cx="21946" cy="21946"/>
+          </a:xfrm>
+          <a:prstGeom prst="rect">
+            <a:avLst/>
+          </a:prstGeom>
+          <a:solidFill>
+            <a:srgbClr val="1A2027">
+              <a:alpha val="9000"/>
+            </a:srgbClr>
+          </a:solidFill>
+          <a:ln/>
+        </p:spPr>
+      </p:sp>
+      <p:sp>
+        <p:nvSpPr>
+          <p:cNvPr id="29" name="Shape 27"/>
+          <p:cNvSpPr/>
+          <p:nvPr/>
+        </p:nvSpPr>
+        <p:spPr>
+          <a:xfrm>
+            <a:off x="714146" y="4869180"/>
+            <a:ext cx="13716" cy="13716"/>
+          </a:xfrm>
+          <a:prstGeom prst="rect">
+            <a:avLst/>
+          </a:prstGeom>
+          <a:solidFill>
+            <a:srgbClr val="1A2027">
+              <a:alpha val="11000"/>
+            </a:srgbClr>
+          </a:solidFill>
+          <a:ln/>
+        </p:spPr>
+      </p:sp>
+      <p:sp>
+        <p:nvSpPr>
+          <p:cNvPr id="30" name="Shape 28"/>
+          <p:cNvSpPr/>
+          <p:nvPr/>
+        </p:nvSpPr>
+        <p:spPr>
+          <a:xfrm>
+            <a:off x="3694176" y="714146"/>
+            <a:ext cx="21031" cy="21031"/>
+          </a:xfrm>
+          <a:prstGeom prst="rect">
+            <a:avLst/>
+          </a:prstGeom>
+          <a:solidFill>
+            <a:srgbClr val="1A2027">
+              <a:alpha val="5000"/>
+            </a:srgbClr>
+          </a:solidFill>
+          <a:ln/>
+        </p:spPr>
+      </p:sp>
+      <p:sp>
+        <p:nvSpPr>
+          <p:cNvPr id="31" name="Shape 29"/>
+          <p:cNvSpPr/>
+          <p:nvPr/>
+        </p:nvSpPr>
+        <p:spPr>
+          <a:xfrm>
+            <a:off x="4910328" y="3383280"/>
+            <a:ext cx="14630" cy="14630"/>
+          </a:xfrm>
+          <a:prstGeom prst="rect">
+            <a:avLst/>
+          </a:prstGeom>
+          <a:solidFill>
+            <a:srgbClr val="1A2027">
+              <a:alpha val="12000"/>
+            </a:srgbClr>
+          </a:solidFill>
+          <a:ln/>
+        </p:spPr>
+      </p:sp>
+      <p:sp>
+        <p:nvSpPr>
+          <p:cNvPr id="32" name="Shape 30"/>
+          <p:cNvSpPr/>
+          <p:nvPr/>
+        </p:nvSpPr>
+        <p:spPr>
+          <a:xfrm>
+            <a:off x="6377940" y="2371039"/>
+            <a:ext cx="18288" cy="18288"/>
+          </a:xfrm>
+          <a:prstGeom prst="rect">
+            <a:avLst/>
+          </a:prstGeom>
+          <a:solidFill>
+            <a:srgbClr val="1A2027">
+              <a:alpha val="10000"/>
+            </a:srgbClr>
+          </a:solidFill>
+          <a:ln/>
+        </p:spPr>
+      </p:sp>
+      <p:sp>
+        <p:nvSpPr>
+          <p:cNvPr id="33" name="Shape 31"/>
+          <p:cNvSpPr/>
+          <p:nvPr/>
+        </p:nvSpPr>
+        <p:spPr>
+          <a:xfrm>
+            <a:off x="3493008" y="4317797"/>
+            <a:ext cx="15545" cy="15545"/>
+          </a:xfrm>
+          <a:prstGeom prst="rect">
+            <a:avLst/>
+          </a:prstGeom>
+          <a:solidFill>
+            <a:srgbClr val="1A2027">
+              <a:alpha val="12000"/>
+            </a:srgbClr>
+          </a:solidFill>
+          <a:ln/>
+        </p:spPr>
+      </p:sp>
+      <p:sp>
+        <p:nvSpPr>
+          <p:cNvPr id="34" name="Shape 32"/>
+          <p:cNvSpPr/>
+          <p:nvPr/>
+        </p:nvSpPr>
+        <p:spPr>
+          <a:xfrm>
+            <a:off x="3698748" y="2488082"/>
+            <a:ext cx="21031" cy="21031"/>
+          </a:xfrm>
+          <a:prstGeom prst="rect">
+            <a:avLst/>
+          </a:prstGeom>
+          <a:solidFill>
+            <a:srgbClr val="1A2027">
+              <a:alpha val="8000"/>
+            </a:srgbClr>
+          </a:solidFill>
+          <a:ln/>
+        </p:spPr>
+      </p:sp>
+      <p:sp>
+        <p:nvSpPr>
+          <p:cNvPr id="35" name="Shape 33"/>
+          <p:cNvSpPr/>
+          <p:nvPr/>
+        </p:nvSpPr>
+        <p:spPr>
+          <a:xfrm>
+            <a:off x="7629754" y="1736446"/>
+            <a:ext cx="13716" cy="13716"/>
+          </a:xfrm>
+          <a:prstGeom prst="rect">
+            <a:avLst/>
+          </a:prstGeom>
+          <a:solidFill>
+            <a:srgbClr val="1A2027">
+              <a:alpha val="7000"/>
+            </a:srgbClr>
+          </a:solidFill>
+          <a:ln/>
+        </p:spPr>
+      </p:sp>
+      <p:sp>
+        <p:nvSpPr>
+          <p:cNvPr id="36" name="Shape 34"/>
+          <p:cNvSpPr/>
+          <p:nvPr/>
+        </p:nvSpPr>
+        <p:spPr>
+          <a:xfrm>
+            <a:off x="6321247" y="5077663"/>
+            <a:ext cx="15545" cy="15545"/>
+          </a:xfrm>
+          <a:prstGeom prst="rect">
+            <a:avLst/>
+          </a:prstGeom>
+          <a:solidFill>
+            <a:srgbClr val="1A2027">
+              <a:alpha val="12000"/>
+            </a:srgbClr>
+          </a:solidFill>
+          <a:ln/>
+        </p:spPr>
+      </p:sp>
+      <p:sp>
+        <p:nvSpPr>
+          <p:cNvPr id="37" name="Shape 35"/>
+          <p:cNvSpPr/>
+          <p:nvPr/>
+        </p:nvSpPr>
+        <p:spPr>
+          <a:xfrm>
+            <a:off x="4881982" y="1749247"/>
+            <a:ext cx="17374" cy="17374"/>
+          </a:xfrm>
+          <a:prstGeom prst="rect">
+            <a:avLst/>
+          </a:prstGeom>
+          <a:solidFill>
+            <a:srgbClr val="1A2027">
+              <a:alpha val="9000"/>
+            </a:srgbClr>
+          </a:solidFill>
+          <a:ln/>
+        </p:spPr>
+      </p:sp>
+      <p:sp>
+        <p:nvSpPr>
+          <p:cNvPr id="38" name="Shape 36"/>
+          <p:cNvSpPr/>
+          <p:nvPr/>
+        </p:nvSpPr>
+        <p:spPr>
+          <a:xfrm>
+            <a:off x="3372307" y="3047695"/>
+            <a:ext cx="15545" cy="15545"/>
+          </a:xfrm>
+          <a:prstGeom prst="rect">
+            <a:avLst/>
+          </a:prstGeom>
+          <a:solidFill>
+            <a:srgbClr val="1A2027">
+              <a:alpha val="6000"/>
+            </a:srgbClr>
+          </a:solidFill>
+          <a:ln/>
+        </p:spPr>
+      </p:sp>
+      <p:sp>
+        <p:nvSpPr>
+          <p:cNvPr id="39" name="Shape 37"/>
+          <p:cNvSpPr/>
+          <p:nvPr/>
+        </p:nvSpPr>
+        <p:spPr>
+          <a:xfrm>
+            <a:off x="4428439" y="180137"/>
+            <a:ext cx="12802" cy="12802"/>
+          </a:xfrm>
+          <a:prstGeom prst="rect">
+            <a:avLst/>
+          </a:prstGeom>
+          <a:solidFill>
+            <a:srgbClr val="1A2027">
+              <a:alpha val="9000"/>
+            </a:srgbClr>
+          </a:solidFill>
+          <a:ln/>
+        </p:spPr>
+      </p:sp>
+      <p:sp>
+        <p:nvSpPr>
+          <p:cNvPr id="40" name="Shape 38"/>
+          <p:cNvSpPr/>
+          <p:nvPr/>
+        </p:nvSpPr>
+        <p:spPr>
+          <a:xfrm>
+            <a:off x="1127455" y="5089550"/>
+            <a:ext cx="14630" cy="14630"/>
+          </a:xfrm>
+          <a:prstGeom prst="rect">
+            <a:avLst/>
+          </a:prstGeom>
+          <a:solidFill>
+            <a:srgbClr val="1A2027">
+              <a:alpha val="8000"/>
+            </a:srgbClr>
+          </a:solidFill>
+          <a:ln/>
+        </p:spPr>
+      </p:sp>
+      <p:sp>
+        <p:nvSpPr>
+          <p:cNvPr id="41" name="Shape 39"/>
+          <p:cNvSpPr/>
+          <p:nvPr/>
+        </p:nvSpPr>
+        <p:spPr>
+          <a:xfrm>
+            <a:off x="975665" y="63094"/>
+            <a:ext cx="13716" cy="13716"/>
+          </a:xfrm>
+          <a:prstGeom prst="rect">
+            <a:avLst/>
+          </a:prstGeom>
+          <a:solidFill>
+            <a:srgbClr val="1A2027">
+              <a:alpha val="7000"/>
+            </a:srgbClr>
+          </a:solidFill>
+          <a:ln/>
+        </p:spPr>
+      </p:sp>
+      <p:sp>
+        <p:nvSpPr>
+          <p:cNvPr id="42" name="Shape 40"/>
+          <p:cNvSpPr/>
+          <p:nvPr/>
+        </p:nvSpPr>
+        <p:spPr>
+          <a:xfrm>
+            <a:off x="7677302" y="442570"/>
+            <a:ext cx="14630" cy="14630"/>
+          </a:xfrm>
+          <a:prstGeom prst="rect">
+            <a:avLst/>
+          </a:prstGeom>
+          <a:solidFill>
+            <a:srgbClr val="1A2027">
+              <a:alpha val="12000"/>
+            </a:srgbClr>
+          </a:solidFill>
+          <a:ln/>
+        </p:spPr>
+      </p:sp>
+      <p:sp>
+        <p:nvSpPr>
+          <p:cNvPr id="43" name="Shape 41"/>
+          <p:cNvSpPr/>
+          <p:nvPr/>
+        </p:nvSpPr>
+        <p:spPr>
+          <a:xfrm>
+            <a:off x="2921508" y="2685593"/>
+            <a:ext cx="20117" cy="20117"/>
+          </a:xfrm>
+          <a:prstGeom prst="rect">
+            <a:avLst/>
+          </a:prstGeom>
+          <a:solidFill>
+            <a:srgbClr val="1A2027">
+              <a:alpha val="7000"/>
+            </a:srgbClr>
+          </a:solidFill>
+          <a:ln/>
+        </p:spPr>
+      </p:sp>
+      <p:sp>
+        <p:nvSpPr>
+          <p:cNvPr id="44" name="Shape 42"/>
+          <p:cNvSpPr/>
+          <p:nvPr/>
+        </p:nvSpPr>
+        <p:spPr>
+          <a:xfrm>
+            <a:off x="9058046" y="4269334"/>
+            <a:ext cx="19202" cy="19202"/>
+          </a:xfrm>
+          <a:prstGeom prst="rect">
+            <a:avLst/>
+          </a:prstGeom>
+          <a:solidFill>
+            <a:srgbClr val="1A2027">
+              <a:alpha val="5000"/>
+            </a:srgbClr>
+          </a:solidFill>
+          <a:ln/>
+        </p:spPr>
+      </p:sp>
+      <p:sp>
+        <p:nvSpPr>
+          <p:cNvPr id="45" name="Shape 43"/>
+          <p:cNvSpPr/>
+          <p:nvPr/>
+        </p:nvSpPr>
+        <p:spPr>
+          <a:xfrm>
+            <a:off x="6501384" y="2784348"/>
+            <a:ext cx="18288" cy="18288"/>
+          </a:xfrm>
+          <a:prstGeom prst="rect">
+            <a:avLst/>
+          </a:prstGeom>
+          <a:solidFill>
+            <a:srgbClr val="1A2027">
+              <a:alpha val="7000"/>
+            </a:srgbClr>
+          </a:solidFill>
+          <a:ln/>
+        </p:spPr>
+      </p:sp>
+      <p:sp>
+        <p:nvSpPr>
+          <p:cNvPr id="46" name="Shape 44"/>
+          <p:cNvSpPr/>
+          <p:nvPr/>
+        </p:nvSpPr>
+        <p:spPr>
+          <a:xfrm>
+            <a:off x="548640" y="112471"/>
+            <a:ext cx="20117" cy="20117"/>
+          </a:xfrm>
+          <a:prstGeom prst="rect">
+            <a:avLst/>
+          </a:prstGeom>
+          <a:solidFill>
+            <a:srgbClr val="1A2027">
+              <a:alpha val="9000"/>
+            </a:srgbClr>
+          </a:solidFill>
+          <a:ln/>
+        </p:spPr>
+      </p:sp>
+      <p:sp>
+        <p:nvSpPr>
+          <p:cNvPr id="47" name="Shape 45"/>
+          <p:cNvSpPr/>
+          <p:nvPr/>
+        </p:nvSpPr>
+        <p:spPr>
+          <a:xfrm>
+            <a:off x="6894576" y="3168396"/>
+            <a:ext cx="11887" cy="11887"/>
+          </a:xfrm>
+          <a:prstGeom prst="rect">
+            <a:avLst/>
+          </a:prstGeom>
+          <a:solidFill>
+            <a:srgbClr val="1A2027">
+              <a:alpha val="10000"/>
+            </a:srgbClr>
+          </a:solidFill>
+          <a:ln/>
+        </p:spPr>
+      </p:sp>
+      <p:sp>
+        <p:nvSpPr>
+          <p:cNvPr id="48" name="Shape 46"/>
+          <p:cNvSpPr/>
+          <p:nvPr/>
+        </p:nvSpPr>
+        <p:spPr>
+          <a:xfrm>
+            <a:off x="332842" y="3749954"/>
+            <a:ext cx="19202" cy="19202"/>
+          </a:xfrm>
+          <a:prstGeom prst="rect">
+            <a:avLst/>
+          </a:prstGeom>
+          <a:solidFill>
+            <a:srgbClr val="1A2027">
+              <a:alpha val="12000"/>
+            </a:srgbClr>
+          </a:solidFill>
+          <a:ln/>
+        </p:spPr>
+      </p:sp>
+      <p:sp>
+        <p:nvSpPr>
+          <p:cNvPr id="49" name="Shape 47"/>
+          <p:cNvSpPr/>
+          <p:nvPr/>
+        </p:nvSpPr>
+        <p:spPr>
+          <a:xfrm>
+            <a:off x="798271" y="2905049"/>
+            <a:ext cx="10973" cy="10973"/>
+          </a:xfrm>
+          <a:prstGeom prst="rect">
+            <a:avLst/>
+          </a:prstGeom>
+          <a:solidFill>
+            <a:srgbClr val="1A2027">
+              <a:alpha val="8000"/>
+            </a:srgbClr>
+          </a:solidFill>
+          <a:ln/>
+        </p:spPr>
+      </p:sp>
+      <p:sp>
+        <p:nvSpPr>
+          <p:cNvPr id="50" name="Shape 48"/>
+          <p:cNvSpPr/>
+          <p:nvPr/>
+        </p:nvSpPr>
+        <p:spPr>
+          <a:xfrm>
+            <a:off x="47549" y="3740810"/>
+            <a:ext cx="21031" cy="21031"/>
+          </a:xfrm>
+          <a:prstGeom prst="rect">
+            <a:avLst/>
+          </a:prstGeom>
+          <a:solidFill>
+            <a:srgbClr val="1A2027">
+              <a:alpha val="6000"/>
+            </a:srgbClr>
+          </a:solidFill>
+          <a:ln/>
+        </p:spPr>
+      </p:sp>
+      <p:sp>
+        <p:nvSpPr>
+          <p:cNvPr id="51" name="Shape 49"/>
+          <p:cNvSpPr/>
+          <p:nvPr/>
+        </p:nvSpPr>
+        <p:spPr>
+          <a:xfrm>
+            <a:off x="7773314" y="4931359"/>
+            <a:ext cx="19202" cy="19202"/>
+          </a:xfrm>
+          <a:prstGeom prst="rect">
+            <a:avLst/>
+          </a:prstGeom>
+          <a:solidFill>
+            <a:srgbClr val="1A2027">
+              <a:alpha val="7000"/>
+            </a:srgbClr>
+          </a:solidFill>
+          <a:ln/>
+        </p:spPr>
+      </p:sp>
+      <p:sp>
+        <p:nvSpPr>
+          <p:cNvPr id="52" name="Shape 50"/>
+          <p:cNvSpPr/>
+          <p:nvPr/>
+        </p:nvSpPr>
+        <p:spPr>
+          <a:xfrm>
+            <a:off x="6878117" y="2977286"/>
+            <a:ext cx="14630" cy="14630"/>
+          </a:xfrm>
+          <a:prstGeom prst="rect">
+            <a:avLst/>
+          </a:prstGeom>
+          <a:solidFill>
+            <a:srgbClr val="1A2027">
+              <a:alpha val="11000"/>
+            </a:srgbClr>
+          </a:solidFill>
+          <a:ln/>
+        </p:spPr>
+      </p:sp>
+      <p:sp>
+        <p:nvSpPr>
+          <p:cNvPr id="53" name="Shape 51"/>
+          <p:cNvSpPr/>
+          <p:nvPr/>
+        </p:nvSpPr>
+        <p:spPr>
+          <a:xfrm>
+            <a:off x="1168603" y="2328062"/>
+            <a:ext cx="17374" cy="17374"/>
+          </a:xfrm>
+          <a:prstGeom prst="rect">
+            <a:avLst/>
+          </a:prstGeom>
+          <a:solidFill>
+            <a:srgbClr val="1A2027">
+              <a:alpha val="9000"/>
+            </a:srgbClr>
+          </a:solidFill>
+          <a:ln/>
+        </p:spPr>
+      </p:sp>
+      <p:sp>
+        <p:nvSpPr>
+          <p:cNvPr id="54" name="Shape 52"/>
+          <p:cNvSpPr/>
+          <p:nvPr/>
+        </p:nvSpPr>
+        <p:spPr>
+          <a:xfrm>
+            <a:off x="4341571" y="3197657"/>
+            <a:ext cx="14630" cy="14630"/>
+          </a:xfrm>
+          <a:prstGeom prst="rect">
+            <a:avLst/>
+          </a:prstGeom>
+          <a:solidFill>
+            <a:srgbClr val="1A2027">
+              <a:alpha val="9000"/>
+            </a:srgbClr>
+          </a:solidFill>
+          <a:ln/>
+        </p:spPr>
+      </p:sp>
+      <p:sp>
+        <p:nvSpPr>
+          <p:cNvPr id="55" name="Shape 53"/>
+          <p:cNvSpPr/>
+          <p:nvPr/>
+        </p:nvSpPr>
+        <p:spPr>
+          <a:xfrm>
+            <a:off x="3389681" y="4411066"/>
+            <a:ext cx="12802" cy="12802"/>
+          </a:xfrm>
+          <a:prstGeom prst="rect">
+            <a:avLst/>
+          </a:prstGeom>
+          <a:solidFill>
+            <a:srgbClr val="1A2027">
+              <a:alpha val="12000"/>
+            </a:srgbClr>
+          </a:solidFill>
+          <a:ln/>
+        </p:spPr>
+      </p:sp>
+      <p:sp>
+        <p:nvSpPr>
+          <p:cNvPr id="56" name="Shape 54"/>
+          <p:cNvSpPr/>
+          <p:nvPr/>
+        </p:nvSpPr>
+        <p:spPr>
+          <a:xfrm>
+            <a:off x="4617720" y="3847795"/>
+            <a:ext cx="15545" cy="15545"/>
+          </a:xfrm>
+          <a:prstGeom prst="rect">
+            <a:avLst/>
+          </a:prstGeom>
+          <a:solidFill>
+            <a:srgbClr val="1A2027">
+              <a:alpha val="9000"/>
+            </a:srgbClr>
+          </a:solidFill>
+          <a:ln/>
+        </p:spPr>
+      </p:sp>
+      <p:sp>
+        <p:nvSpPr>
+          <p:cNvPr id="57" name="Shape 55"/>
+          <p:cNvSpPr/>
+          <p:nvPr/>
+        </p:nvSpPr>
+        <p:spPr>
+          <a:xfrm>
+            <a:off x="8861450" y="705917"/>
+            <a:ext cx="14630" cy="14630"/>
+          </a:xfrm>
+          <a:prstGeom prst="rect">
+            <a:avLst/>
+          </a:prstGeom>
+          <a:solidFill>
+            <a:srgbClr val="1A2027">
+              <a:alpha val="5000"/>
+            </a:srgbClr>
+          </a:solidFill>
+          <a:ln/>
+        </p:spPr>
+      </p:sp>
+      <p:sp>
+        <p:nvSpPr>
+          <p:cNvPr id="58" name="Shape 56"/>
+          <p:cNvSpPr/>
+          <p:nvPr/>
+        </p:nvSpPr>
+        <p:spPr>
+          <a:xfrm>
+            <a:off x="1370686" y="5073091"/>
+            <a:ext cx="16459" cy="16459"/>
+          </a:xfrm>
+          <a:prstGeom prst="rect">
+            <a:avLst/>
+          </a:prstGeom>
+          <a:solidFill>
+            <a:srgbClr val="1A2027">
+              <a:alpha val="5000"/>
+            </a:srgbClr>
+          </a:solidFill>
+          <a:ln/>
+        </p:spPr>
+      </p:sp>
+      <p:sp>
+        <p:nvSpPr>
+          <p:cNvPr id="59" name="Shape 57"/>
+          <p:cNvSpPr/>
+          <p:nvPr/>
+        </p:nvSpPr>
+        <p:spPr>
+          <a:xfrm>
+            <a:off x="7649870" y="417881"/>
+            <a:ext cx="21031" cy="21031"/>
+          </a:xfrm>
+          <a:prstGeom prst="rect">
+            <a:avLst/>
+          </a:prstGeom>
+          <a:solidFill>
+            <a:srgbClr val="1A2027">
+              <a:alpha val="6000"/>
+            </a:srgbClr>
+          </a:solidFill>
+          <a:ln/>
+        </p:spPr>
+      </p:sp>
+      <p:sp>
+        <p:nvSpPr>
+          <p:cNvPr id="60" name="Shape 58"/>
+          <p:cNvSpPr/>
+          <p:nvPr/>
+        </p:nvSpPr>
+        <p:spPr>
+          <a:xfrm>
+            <a:off x="5023714" y="4663440"/>
+            <a:ext cx="12802" cy="12802"/>
+          </a:xfrm>
+          <a:prstGeom prst="rect">
+            <a:avLst/>
+          </a:prstGeom>
+          <a:solidFill>
+            <a:srgbClr val="1A2027">
+              <a:alpha val="12000"/>
+            </a:srgbClr>
+          </a:solidFill>
+          <a:ln/>
+        </p:spPr>
+      </p:sp>
+      <p:sp>
+        <p:nvSpPr>
+          <p:cNvPr id="61" name="Shape 59"/>
+          <p:cNvSpPr/>
+          <p:nvPr/>
+        </p:nvSpPr>
+        <p:spPr>
+          <a:xfrm>
+            <a:off x="541325" y="4689043"/>
+            <a:ext cx="18288" cy="18288"/>
+          </a:xfrm>
+          <a:prstGeom prst="rect">
+            <a:avLst/>
+          </a:prstGeom>
+          <a:solidFill>
+            <a:srgbClr val="1A2027">
+              <a:alpha val="7000"/>
+            </a:srgbClr>
+          </a:solidFill>
+          <a:ln/>
+        </p:spPr>
+      </p:sp>
+      <p:sp>
+        <p:nvSpPr>
+          <p:cNvPr id="62" name="Shape 60"/>
+          <p:cNvSpPr/>
+          <p:nvPr/>
+        </p:nvSpPr>
+        <p:spPr>
+          <a:xfrm>
+            <a:off x="5811926" y="4235501"/>
+            <a:ext cx="18288" cy="18288"/>
+          </a:xfrm>
+          <a:prstGeom prst="rect">
+            <a:avLst/>
+          </a:prstGeom>
+          <a:solidFill>
+            <a:srgbClr val="1A2027">
+              <a:alpha val="6000"/>
+            </a:srgbClr>
+          </a:solidFill>
+          <a:ln/>
+        </p:spPr>
+      </p:sp>
+      <p:sp>
+        <p:nvSpPr>
+          <p:cNvPr id="63" name="Shape 61"/>
+          <p:cNvSpPr/>
+          <p:nvPr/>
+        </p:nvSpPr>
+        <p:spPr>
+          <a:xfrm>
+            <a:off x="5608015" y="3377794"/>
+            <a:ext cx="18288" cy="18288"/>
+          </a:xfrm>
+          <a:prstGeom prst="rect">
+            <a:avLst/>
+          </a:prstGeom>
+          <a:solidFill>
+            <a:srgbClr val="1A2027">
+              <a:alpha val="10000"/>
+            </a:srgbClr>
+          </a:solidFill>
+          <a:ln/>
+        </p:spPr>
+      </p:sp>
+      <p:sp>
+        <p:nvSpPr>
+          <p:cNvPr id="64" name="Shape 62"/>
+          <p:cNvSpPr/>
+          <p:nvPr/>
+        </p:nvSpPr>
+        <p:spPr>
+          <a:xfrm>
+            <a:off x="1098194" y="4265676"/>
+            <a:ext cx="20117" cy="20117"/>
+          </a:xfrm>
+          <a:prstGeom prst="rect">
+            <a:avLst/>
+          </a:prstGeom>
+          <a:solidFill>
+            <a:srgbClr val="1A2027">
+              <a:alpha val="5000"/>
+            </a:srgbClr>
+          </a:solidFill>
+          <a:ln/>
+        </p:spPr>
+      </p:sp>
+      <p:sp>
+        <p:nvSpPr>
+          <p:cNvPr id="65" name="Shape 63"/>
+          <p:cNvSpPr/>
+          <p:nvPr/>
+        </p:nvSpPr>
+        <p:spPr>
+          <a:xfrm>
+            <a:off x="1640434" y="1477670"/>
+            <a:ext cx="21031" cy="21031"/>
+          </a:xfrm>
+          <a:prstGeom prst="rect">
+            <a:avLst/>
+          </a:prstGeom>
+          <a:solidFill>
+            <a:srgbClr val="1A2027">
+              <a:alpha val="8000"/>
+            </a:srgbClr>
+          </a:solidFill>
+          <a:ln/>
+        </p:spPr>
+      </p:sp>
+      <p:sp>
+        <p:nvSpPr>
+          <p:cNvPr id="66" name="Shape 64"/>
+          <p:cNvSpPr/>
+          <p:nvPr/>
+        </p:nvSpPr>
+        <p:spPr>
+          <a:xfrm>
+            <a:off x="5055718" y="3262579"/>
+            <a:ext cx="14630" cy="14630"/>
+          </a:xfrm>
+          <a:prstGeom prst="rect">
+            <a:avLst/>
+          </a:prstGeom>
+          <a:solidFill>
+            <a:srgbClr val="1A2027">
+              <a:alpha val="7000"/>
+            </a:srgbClr>
+          </a:solidFill>
+          <a:ln/>
+        </p:spPr>
+      </p:sp>
+      <p:sp>
+        <p:nvSpPr>
+          <p:cNvPr id="67" name="Shape 65"/>
+          <p:cNvSpPr/>
+          <p:nvPr/>
+        </p:nvSpPr>
+        <p:spPr>
+          <a:xfrm>
+            <a:off x="8629193" y="3788359"/>
+            <a:ext cx="21946" cy="21946"/>
+          </a:xfrm>
+          <a:prstGeom prst="rect">
+            <a:avLst/>
+          </a:prstGeom>
+          <a:solidFill>
+            <a:srgbClr val="1A2027">
+              <a:alpha val="12000"/>
+            </a:srgbClr>
+          </a:solidFill>
+          <a:ln/>
+        </p:spPr>
+      </p:sp>
+      <p:sp>
+        <p:nvSpPr>
+          <p:cNvPr id="68" name="Shape 66"/>
+          <p:cNvSpPr/>
+          <p:nvPr/>
+        </p:nvSpPr>
+        <p:spPr>
+          <a:xfrm>
+            <a:off x="4331513" y="1083564"/>
+            <a:ext cx="21031" cy="21031"/>
+          </a:xfrm>
+          <a:prstGeom prst="rect">
+            <a:avLst/>
+          </a:prstGeom>
+          <a:solidFill>
+            <a:srgbClr val="1A2027">
+              <a:alpha val="8000"/>
+            </a:srgbClr>
+          </a:solidFill>
+          <a:ln/>
+        </p:spPr>
+      </p:sp>
+      <p:sp>
+        <p:nvSpPr>
+          <p:cNvPr id="69" name="Shape 67"/>
+          <p:cNvSpPr/>
+          <p:nvPr/>
+        </p:nvSpPr>
+        <p:spPr>
+          <a:xfrm>
+            <a:off x="5046574" y="3743554"/>
+            <a:ext cx="19202" cy="19202"/>
+          </a:xfrm>
+          <a:prstGeom prst="rect">
+            <a:avLst/>
+          </a:prstGeom>
+          <a:solidFill>
+            <a:srgbClr val="1A2027">
+              <a:alpha val="6000"/>
+            </a:srgbClr>
+          </a:solidFill>
+          <a:ln/>
+        </p:spPr>
+      </p:sp>
+      <p:sp>
+        <p:nvSpPr>
+          <p:cNvPr id="70" name="Shape 68"/>
+          <p:cNvSpPr/>
+          <p:nvPr/>
+        </p:nvSpPr>
+        <p:spPr>
+          <a:xfrm>
+            <a:off x="5265115" y="1293876"/>
+            <a:ext cx="16459" cy="16459"/>
+          </a:xfrm>
+          <a:prstGeom prst="rect">
+            <a:avLst/>
+          </a:prstGeom>
+          <a:solidFill>
+            <a:srgbClr val="1A2027">
+              <a:alpha val="6000"/>
+            </a:srgbClr>
+          </a:solidFill>
+          <a:ln/>
+        </p:spPr>
+      </p:sp>
+      <p:sp>
+        <p:nvSpPr>
+          <p:cNvPr id="71" name="Shape 69"/>
+          <p:cNvSpPr/>
+          <p:nvPr/>
+        </p:nvSpPr>
+        <p:spPr>
+          <a:xfrm>
+            <a:off x="364846" y="1849831"/>
+            <a:ext cx="16459" cy="16459"/>
+          </a:xfrm>
+          <a:prstGeom prst="rect">
+            <a:avLst/>
+          </a:prstGeom>
+          <a:solidFill>
+            <a:srgbClr val="1A2027">
+              <a:alpha val="9000"/>
+            </a:srgbClr>
+          </a:solidFill>
+          <a:ln/>
+        </p:spPr>
+      </p:sp>
+      <p:sp>
+        <p:nvSpPr>
+          <p:cNvPr id="72" name="Shape 70"/>
+          <p:cNvSpPr/>
+          <p:nvPr/>
+        </p:nvSpPr>
+        <p:spPr>
+          <a:xfrm>
+            <a:off x="8879738" y="2372868"/>
+            <a:ext cx="21031" cy="21031"/>
+          </a:xfrm>
+          <a:prstGeom prst="rect">
+            <a:avLst/>
+          </a:prstGeom>
+          <a:solidFill>
+            <a:srgbClr val="1A2027">
+              <a:alpha val="6000"/>
+            </a:srgbClr>
+          </a:solidFill>
+          <a:ln/>
+        </p:spPr>
+      </p:sp>
+      <p:sp>
+        <p:nvSpPr>
+          <p:cNvPr id="73" name="Shape 71"/>
+          <p:cNvSpPr/>
+          <p:nvPr/>
+        </p:nvSpPr>
+        <p:spPr>
+          <a:xfrm>
+            <a:off x="8064094" y="2798978"/>
+            <a:ext cx="11887" cy="11887"/>
+          </a:xfrm>
+          <a:prstGeom prst="rect">
+            <a:avLst/>
+          </a:prstGeom>
+          <a:solidFill>
+            <a:srgbClr val="1A2027">
+              <a:alpha val="7000"/>
+            </a:srgbClr>
+          </a:solidFill>
+          <a:ln/>
+        </p:spPr>
+      </p:sp>
+      <p:sp>
+        <p:nvSpPr>
+          <p:cNvPr id="74" name="Shape 72"/>
+          <p:cNvSpPr/>
+          <p:nvPr/>
+        </p:nvSpPr>
+        <p:spPr>
+          <a:xfrm>
+            <a:off x="4652467" y="3266237"/>
+            <a:ext cx="18288" cy="18288"/>
+          </a:xfrm>
+          <a:prstGeom prst="rect">
+            <a:avLst/>
+          </a:prstGeom>
+          <a:solidFill>
+            <a:srgbClr val="1A2027">
+              <a:alpha val="6000"/>
+            </a:srgbClr>
+          </a:solidFill>
+          <a:ln/>
+        </p:spPr>
+      </p:sp>
+      <p:sp>
+        <p:nvSpPr>
+          <p:cNvPr id="75" name="Shape 73"/>
+          <p:cNvSpPr/>
+          <p:nvPr/>
+        </p:nvSpPr>
+        <p:spPr>
+          <a:xfrm>
+            <a:off x="1010412" y="1411834"/>
+            <a:ext cx="18288" cy="18288"/>
+          </a:xfrm>
+          <a:prstGeom prst="rect">
+            <a:avLst/>
+          </a:prstGeom>
+          <a:solidFill>
+            <a:srgbClr val="1A2027">
+              <a:alpha val="6000"/>
+            </a:srgbClr>
+          </a:solidFill>
+          <a:ln/>
+        </p:spPr>
+      </p:sp>
+      <p:sp>
+        <p:nvSpPr>
+          <p:cNvPr id="76" name="Shape 74"/>
+          <p:cNvSpPr/>
+          <p:nvPr/>
+        </p:nvSpPr>
+        <p:spPr>
+          <a:xfrm>
+            <a:off x="1231697" y="2869387"/>
+            <a:ext cx="21946" cy="21946"/>
+          </a:xfrm>
+          <a:prstGeom prst="rect">
+            <a:avLst/>
+          </a:prstGeom>
+          <a:solidFill>
+            <a:srgbClr val="1A2027">
+              <a:alpha val="8000"/>
+            </a:srgbClr>
+          </a:solidFill>
+          <a:ln/>
+        </p:spPr>
+      </p:sp>
+      <p:sp>
+        <p:nvSpPr>
+          <p:cNvPr id="77" name="Shape 75"/>
+          <p:cNvSpPr/>
+          <p:nvPr/>
+        </p:nvSpPr>
+        <p:spPr>
+          <a:xfrm>
+            <a:off x="3881628" y="3322015"/>
+            <a:ext cx="12802" cy="12802"/>
+          </a:xfrm>
+          <a:prstGeom prst="rect">
+            <a:avLst/>
+          </a:prstGeom>
+          <a:solidFill>
+            <a:srgbClr val="1A2027">
+              <a:alpha val="11000"/>
+            </a:srgbClr>
+          </a:solidFill>
+          <a:ln/>
+        </p:spPr>
+      </p:sp>
+      <p:sp>
+        <p:nvSpPr>
+          <p:cNvPr id="78" name="Shape 76"/>
+          <p:cNvSpPr/>
+          <p:nvPr/>
+        </p:nvSpPr>
+        <p:spPr>
+          <a:xfrm>
+            <a:off x="3144622" y="3668573"/>
+            <a:ext cx="21031" cy="21031"/>
+          </a:xfrm>
+          <a:prstGeom prst="rect">
+            <a:avLst/>
+          </a:prstGeom>
+          <a:solidFill>
+            <a:srgbClr val="1A2027">
+              <a:alpha val="12000"/>
+            </a:srgbClr>
+          </a:solidFill>
+          <a:ln/>
+        </p:spPr>
+      </p:sp>
+      <p:sp>
+        <p:nvSpPr>
+          <p:cNvPr id="79" name="Shape 77"/>
+          <p:cNvSpPr/>
+          <p:nvPr/>
+        </p:nvSpPr>
+        <p:spPr>
+          <a:xfrm>
+            <a:off x="4187952" y="3917290"/>
+            <a:ext cx="16459" cy="16459"/>
+          </a:xfrm>
+          <a:prstGeom prst="rect">
+            <a:avLst/>
+          </a:prstGeom>
+          <a:solidFill>
+            <a:srgbClr val="1A2027">
+              <a:alpha val="8000"/>
+            </a:srgbClr>
+          </a:solidFill>
+          <a:ln/>
+        </p:spPr>
+      </p:sp>
+      <p:sp>
+        <p:nvSpPr>
+          <p:cNvPr id="80" name="Shape 78"/>
+          <p:cNvSpPr/>
+          <p:nvPr/>
+        </p:nvSpPr>
+        <p:spPr>
+          <a:xfrm>
+            <a:off x="6266383" y="4221785"/>
+            <a:ext cx="14630" cy="14630"/>
+          </a:xfrm>
+          <a:prstGeom prst="rect">
+            <a:avLst/>
+          </a:prstGeom>
+          <a:solidFill>
+            <a:srgbClr val="1A2027">
+              <a:alpha val="5000"/>
+            </a:srgbClr>
+          </a:solidFill>
+          <a:ln/>
+        </p:spPr>
+      </p:sp>
+      <p:sp>
+        <p:nvSpPr>
+          <p:cNvPr id="81" name="Shape 79"/>
+          <p:cNvSpPr/>
+          <p:nvPr/>
+        </p:nvSpPr>
+        <p:spPr>
+          <a:xfrm>
+            <a:off x="341071" y="2009851"/>
+            <a:ext cx="16459" cy="16459"/>
+          </a:xfrm>
+          <a:prstGeom prst="rect">
+            <a:avLst/>
+          </a:prstGeom>
+          <a:solidFill>
+            <a:srgbClr val="1A2027">
+              <a:alpha val="10000"/>
+            </a:srgbClr>
+          </a:solidFill>
+          <a:ln/>
+        </p:spPr>
+      </p:sp>
+      <p:sp>
+        <p:nvSpPr>
+          <p:cNvPr id="82" name="Shape 80"/>
+          <p:cNvSpPr/>
+          <p:nvPr/>
+        </p:nvSpPr>
+        <p:spPr>
+          <a:xfrm>
+            <a:off x="2952598" y="878738"/>
+            <a:ext cx="11887" cy="11887"/>
+          </a:xfrm>
+          <a:prstGeom prst="rect">
+            <a:avLst/>
+          </a:prstGeom>
+          <a:solidFill>
+            <a:srgbClr val="1A2027">
+              <a:alpha val="9000"/>
+            </a:srgbClr>
+          </a:solidFill>
+          <a:ln/>
+        </p:spPr>
+      </p:sp>
+      <p:sp>
+        <p:nvSpPr>
+          <p:cNvPr id="83" name="Shape 81"/>
+          <p:cNvSpPr/>
+          <p:nvPr/>
+        </p:nvSpPr>
+        <p:spPr>
+          <a:xfrm>
+            <a:off x="4804258" y="2354580"/>
+            <a:ext cx="17374" cy="17374"/>
+          </a:xfrm>
+          <a:prstGeom prst="rect">
+            <a:avLst/>
+          </a:prstGeom>
+          <a:solidFill>
+            <a:srgbClr val="1A2027">
+              <a:alpha val="12000"/>
+            </a:srgbClr>
+          </a:solidFill>
+          <a:ln/>
+        </p:spPr>
+      </p:sp>
+      <p:sp>
+        <p:nvSpPr>
+          <p:cNvPr id="84" name="Shape 82"/>
+          <p:cNvSpPr/>
+          <p:nvPr/>
+        </p:nvSpPr>
+        <p:spPr>
+          <a:xfrm>
+            <a:off x="5941771" y="3845052"/>
+            <a:ext cx="11887" cy="11887"/>
+          </a:xfrm>
+          <a:prstGeom prst="rect">
+            <a:avLst/>
+          </a:prstGeom>
+          <a:solidFill>
+            <a:srgbClr val="1A2027">
+              <a:alpha val="7000"/>
+            </a:srgbClr>
+          </a:solidFill>
+          <a:ln/>
+        </p:spPr>
+      </p:sp>
+      <p:sp>
+        <p:nvSpPr>
+          <p:cNvPr id="85" name="Shape 83"/>
+          <p:cNvSpPr/>
+          <p:nvPr/>
+        </p:nvSpPr>
+        <p:spPr>
+          <a:xfrm>
+            <a:off x="2307946" y="1918411"/>
+            <a:ext cx="15545" cy="15545"/>
+          </a:xfrm>
+          <a:prstGeom prst="rect">
+            <a:avLst/>
+          </a:prstGeom>
+          <a:solidFill>
+            <a:srgbClr val="1A2027">
+              <a:alpha val="9000"/>
+            </a:srgbClr>
+          </a:solidFill>
+          <a:ln/>
+        </p:spPr>
+      </p:sp>
+      <p:sp>
+        <p:nvSpPr>
+          <p:cNvPr id="86" name="Shape 84"/>
+          <p:cNvSpPr/>
+          <p:nvPr/>
+        </p:nvSpPr>
+        <p:spPr>
+          <a:xfrm>
+            <a:off x="39319" y="1303020"/>
+            <a:ext cx="19202" cy="19202"/>
+          </a:xfrm>
+          <a:prstGeom prst="rect">
+            <a:avLst/>
+          </a:prstGeom>
+          <a:solidFill>
+            <a:srgbClr val="1A2027">
+              <a:alpha val="9000"/>
+            </a:srgbClr>
+          </a:solidFill>
+          <a:ln/>
+        </p:spPr>
+      </p:sp>
+      <p:sp>
+        <p:nvSpPr>
+          <p:cNvPr id="87" name="Shape 85"/>
+          <p:cNvSpPr/>
+          <p:nvPr/>
+        </p:nvSpPr>
+        <p:spPr>
+          <a:xfrm>
+            <a:off x="8725205" y="686714"/>
+            <a:ext cx="15545" cy="15545"/>
+          </a:xfrm>
+          <a:prstGeom prst="rect">
+            <a:avLst/>
+          </a:prstGeom>
+          <a:solidFill>
+            <a:srgbClr val="1A2027">
+              <a:alpha val="11000"/>
+            </a:srgbClr>
+          </a:solidFill>
+          <a:ln/>
+        </p:spPr>
+      </p:sp>
+      <p:sp>
+        <p:nvSpPr>
+          <p:cNvPr id="88" name="Shape 86"/>
+          <p:cNvSpPr/>
+          <p:nvPr/>
+        </p:nvSpPr>
+        <p:spPr>
+          <a:xfrm>
+            <a:off x="3546958" y="4155034"/>
+            <a:ext cx="13716" cy="13716"/>
+          </a:xfrm>
+          <a:prstGeom prst="rect">
+            <a:avLst/>
+          </a:prstGeom>
+          <a:solidFill>
+            <a:srgbClr val="1A2027">
+              <a:alpha val="11000"/>
+            </a:srgbClr>
+          </a:solidFill>
+          <a:ln/>
+        </p:spPr>
+      </p:sp>
+      <p:sp>
+        <p:nvSpPr>
+          <p:cNvPr id="89" name="Shape 87"/>
+          <p:cNvSpPr/>
+          <p:nvPr/>
+        </p:nvSpPr>
+        <p:spPr>
+          <a:xfrm>
+            <a:off x="3139135" y="1309421"/>
+            <a:ext cx="13716" cy="13716"/>
+          </a:xfrm>
+          <a:prstGeom prst="rect">
+            <a:avLst/>
+          </a:prstGeom>
+          <a:solidFill>
+            <a:srgbClr val="1A2027">
+              <a:alpha val="5000"/>
+            </a:srgbClr>
+          </a:solidFill>
+          <a:ln/>
+        </p:spPr>
+      </p:sp>
+      <p:sp>
+        <p:nvSpPr>
+          <p:cNvPr id="90" name="Shape 88"/>
+          <p:cNvSpPr/>
+          <p:nvPr/>
+        </p:nvSpPr>
+        <p:spPr>
+          <a:xfrm>
+            <a:off x="2888590" y="3129991"/>
+            <a:ext cx="11887" cy="11887"/>
+          </a:xfrm>
+          <a:prstGeom prst="rect">
+            <a:avLst/>
+          </a:prstGeom>
+          <a:solidFill>
+            <a:srgbClr val="1A2027">
+              <a:alpha val="6000"/>
+            </a:srgbClr>
+          </a:solidFill>
+          <a:ln/>
+        </p:spPr>
+      </p:sp>
+      <p:sp>
+        <p:nvSpPr>
+          <p:cNvPr id="91" name="Shape 89"/>
+          <p:cNvSpPr/>
+          <p:nvPr/>
+        </p:nvSpPr>
+        <p:spPr>
+          <a:xfrm>
+            <a:off x="6044184" y="2702966"/>
+            <a:ext cx="12802" cy="12802"/>
+          </a:xfrm>
+          <a:prstGeom prst="rect">
+            <a:avLst/>
+          </a:prstGeom>
+          <a:solidFill>
+            <a:srgbClr val="1A2027">
+              <a:alpha val="10000"/>
+            </a:srgbClr>
+          </a:solidFill>
+          <a:ln/>
+        </p:spPr>
+      </p:sp>
+      <p:sp>
+        <p:nvSpPr>
+          <p:cNvPr id="92" name="Shape 90"/>
+          <p:cNvSpPr/>
+          <p:nvPr/>
+        </p:nvSpPr>
+        <p:spPr>
+          <a:xfrm>
+            <a:off x="6078017" y="1420063"/>
+            <a:ext cx="10973" cy="10973"/>
+          </a:xfrm>
+          <a:prstGeom prst="rect">
+            <a:avLst/>
+          </a:prstGeom>
+          <a:solidFill>
+            <a:srgbClr val="1A2027">
+              <a:alpha val="10000"/>
+            </a:srgbClr>
+          </a:solidFill>
+          <a:ln/>
+        </p:spPr>
+      </p:sp>
+      <p:sp>
+        <p:nvSpPr>
+          <p:cNvPr id="93" name="Shape 91"/>
+          <p:cNvSpPr/>
+          <p:nvPr/>
+        </p:nvSpPr>
+        <p:spPr>
+          <a:xfrm>
+            <a:off x="3453689" y="2888590"/>
+            <a:ext cx="15545" cy="15545"/>
+          </a:xfrm>
+          <a:prstGeom prst="rect">
+            <a:avLst/>
+          </a:prstGeom>
+          <a:solidFill>
+            <a:srgbClr val="1A2027">
+              <a:alpha val="5000"/>
+            </a:srgbClr>
+          </a:solidFill>
+          <a:ln/>
+        </p:spPr>
+      </p:sp>
+      <p:sp>
+        <p:nvSpPr>
+          <p:cNvPr id="94" name="Shape 92"/>
+          <p:cNvSpPr/>
+          <p:nvPr/>
+        </p:nvSpPr>
+        <p:spPr>
+          <a:xfrm>
+            <a:off x="5776265" y="468173"/>
+            <a:ext cx="14630" cy="14630"/>
+          </a:xfrm>
+          <a:prstGeom prst="rect">
+            <a:avLst/>
+          </a:prstGeom>
+          <a:solidFill>
+            <a:srgbClr val="1A2027">
+              <a:alpha val="11000"/>
+            </a:srgbClr>
+          </a:solidFill>
+          <a:ln/>
+        </p:spPr>
+      </p:sp>
+      <p:sp>
+        <p:nvSpPr>
+          <p:cNvPr id="95" name="Shape 93"/>
+          <p:cNvSpPr/>
+          <p:nvPr/>
+        </p:nvSpPr>
+        <p:spPr>
+          <a:xfrm>
+            <a:off x="8044891" y="868680"/>
+            <a:ext cx="21031" cy="21031"/>
+          </a:xfrm>
+          <a:prstGeom prst="rect">
+            <a:avLst/>
+          </a:prstGeom>
+          <a:solidFill>
+            <a:srgbClr val="1A2027">
+              <a:alpha val="9000"/>
+            </a:srgbClr>
+          </a:solidFill>
+          <a:ln/>
+        </p:spPr>
+      </p:sp>
+      <p:sp>
+        <p:nvSpPr>
+          <p:cNvPr id="96" name="Shape 94"/>
+          <p:cNvSpPr/>
+          <p:nvPr/>
+        </p:nvSpPr>
+        <p:spPr>
+          <a:xfrm>
+            <a:off x="6605626" y="98755"/>
+            <a:ext cx="19202" cy="19202"/>
+          </a:xfrm>
+          <a:prstGeom prst="rect">
+            <a:avLst/>
+          </a:prstGeom>
+          <a:solidFill>
+            <a:srgbClr val="1A2027">
+              <a:alpha val="10000"/>
+            </a:srgbClr>
+          </a:solidFill>
+          <a:ln/>
+        </p:spPr>
+      </p:sp>
+      <p:sp>
+        <p:nvSpPr>
+          <p:cNvPr id="97" name="Shape 95"/>
+          <p:cNvSpPr/>
+          <p:nvPr/>
+        </p:nvSpPr>
+        <p:spPr>
+          <a:xfrm>
+            <a:off x="2597810" y="2656332"/>
+            <a:ext cx="18288" cy="18288"/>
+          </a:xfrm>
+          <a:prstGeom prst="rect">
+            <a:avLst/>
+          </a:prstGeom>
+          <a:solidFill>
+            <a:srgbClr val="1A2027">
+              <a:alpha val="6000"/>
+            </a:srgbClr>
+          </a:solidFill>
+          <a:ln/>
+        </p:spPr>
+      </p:sp>
+      <p:sp>
+        <p:nvSpPr>
+          <p:cNvPr id="98" name="Shape 96"/>
+          <p:cNvSpPr/>
+          <p:nvPr/>
+        </p:nvSpPr>
+        <p:spPr>
+          <a:xfrm>
+            <a:off x="7536485" y="2787091"/>
+            <a:ext cx="16459" cy="16459"/>
+          </a:xfrm>
+          <a:prstGeom prst="rect">
+            <a:avLst/>
+          </a:prstGeom>
+          <a:solidFill>
+            <a:srgbClr val="1A2027">
+              <a:alpha val="8000"/>
+            </a:srgbClr>
+          </a:solidFill>
+          <a:ln/>
+        </p:spPr>
+      </p:sp>
+      <p:sp>
+        <p:nvSpPr>
+          <p:cNvPr id="99" name="Shape 97"/>
+          <p:cNvSpPr/>
+          <p:nvPr/>
+        </p:nvSpPr>
+        <p:spPr>
+          <a:xfrm>
+            <a:off x="2278685" y="853135"/>
+            <a:ext cx="19202" cy="19202"/>
+          </a:xfrm>
+          <a:prstGeom prst="rect">
+            <a:avLst/>
+          </a:prstGeom>
+          <a:solidFill>
+            <a:srgbClr val="1A2027">
+              <a:alpha val="5000"/>
+            </a:srgbClr>
+          </a:solidFill>
+          <a:ln/>
+        </p:spPr>
+      </p:sp>
+      <p:sp>
+        <p:nvSpPr>
+          <p:cNvPr id="100" name="Shape 98"/>
+          <p:cNvSpPr/>
+          <p:nvPr/>
+        </p:nvSpPr>
+        <p:spPr>
+          <a:xfrm>
+            <a:off x="3044038" y="1686154"/>
+            <a:ext cx="20117" cy="20117"/>
+          </a:xfrm>
+          <a:prstGeom prst="rect">
+            <a:avLst/>
+          </a:prstGeom>
+          <a:solidFill>
+            <a:srgbClr val="1A2027">
+              <a:alpha val="12000"/>
+            </a:srgbClr>
+          </a:solidFill>
+          <a:ln/>
+        </p:spPr>
+      </p:sp>
+      <p:sp>
+        <p:nvSpPr>
+          <p:cNvPr id="101" name="Shape 99"/>
+          <p:cNvSpPr/>
+          <p:nvPr/>
+        </p:nvSpPr>
+        <p:spPr>
+          <a:xfrm>
+            <a:off x="8314639" y="4246474"/>
+            <a:ext cx="18288" cy="18288"/>
+          </a:xfrm>
+          <a:prstGeom prst="rect">
+            <a:avLst/>
+          </a:prstGeom>
+          <a:solidFill>
+            <a:srgbClr val="1A2027">
+              <a:alpha val="10000"/>
+            </a:srgbClr>
+          </a:solidFill>
+          <a:ln/>
+        </p:spPr>
+      </p:sp>
+      <p:sp>
+        <p:nvSpPr>
+          <p:cNvPr id="102" name="Shape 100"/>
+          <p:cNvSpPr/>
+          <p:nvPr/>
+        </p:nvSpPr>
+        <p:spPr>
+          <a:xfrm>
+            <a:off x="3031236" y="3371393"/>
+            <a:ext cx="20117" cy="20117"/>
+          </a:xfrm>
+          <a:prstGeom prst="rect">
+            <a:avLst/>
+          </a:prstGeom>
+          <a:solidFill>
+            <a:srgbClr val="1A2027">
+              <a:alpha val="5000"/>
+            </a:srgbClr>
+          </a:solidFill>
+          <a:ln/>
+        </p:spPr>
+      </p:sp>
+      <p:sp>
+        <p:nvSpPr>
+          <p:cNvPr id="103" name="Shape 101"/>
+          <p:cNvSpPr/>
+          <p:nvPr/>
+        </p:nvSpPr>
+        <p:spPr>
+          <a:xfrm>
+            <a:off x="7725766" y="189281"/>
+            <a:ext cx="17374" cy="17374"/>
+          </a:xfrm>
+          <a:prstGeom prst="rect">
+            <a:avLst/>
+          </a:prstGeom>
+          <a:solidFill>
+            <a:srgbClr val="1A2027">
+              <a:alpha val="5000"/>
+            </a:srgbClr>
+          </a:solidFill>
+          <a:ln/>
+        </p:spPr>
+      </p:sp>
+      <p:sp>
+        <p:nvSpPr>
+          <p:cNvPr id="104" name="Shape 102"/>
+          <p:cNvSpPr/>
+          <p:nvPr/>
+        </p:nvSpPr>
+        <p:spPr>
+          <a:xfrm>
+            <a:off x="7819034" y="3760927"/>
+            <a:ext cx="12802" cy="12802"/>
+          </a:xfrm>
+          <a:prstGeom prst="rect">
+            <a:avLst/>
+          </a:prstGeom>
+          <a:solidFill>
+            <a:srgbClr val="1A2027">
+              <a:alpha val="7000"/>
+            </a:srgbClr>
+          </a:solidFill>
+          <a:ln/>
+        </p:spPr>
+      </p:sp>
+      <p:sp>
+        <p:nvSpPr>
+          <p:cNvPr id="105" name="Shape 103"/>
+          <p:cNvSpPr/>
+          <p:nvPr/>
+        </p:nvSpPr>
+        <p:spPr>
+          <a:xfrm>
+            <a:off x="920801" y="2674620"/>
+            <a:ext cx="18288" cy="18288"/>
+          </a:xfrm>
+          <a:prstGeom prst="rect">
+            <a:avLst/>
+          </a:prstGeom>
+          <a:solidFill>
+            <a:srgbClr val="1A2027">
+              <a:alpha val="11000"/>
+            </a:srgbClr>
+          </a:solidFill>
+          <a:ln/>
+        </p:spPr>
+      </p:sp>
+      <p:sp>
+        <p:nvSpPr>
+          <p:cNvPr id="106" name="Shape 104"/>
+          <p:cNvSpPr/>
+          <p:nvPr/>
+        </p:nvSpPr>
+        <p:spPr>
+          <a:xfrm>
+            <a:off x="1916582" y="3853282"/>
+            <a:ext cx="12802" cy="12802"/>
+          </a:xfrm>
+          <a:prstGeom prst="rect">
+            <a:avLst/>
+          </a:prstGeom>
+          <a:solidFill>
+            <a:srgbClr val="1A2027">
+              <a:alpha val="7000"/>
+            </a:srgbClr>
+          </a:solidFill>
+          <a:ln/>
+        </p:spPr>
+      </p:sp>
+      <p:sp>
+        <p:nvSpPr>
+          <p:cNvPr id="107" name="Shape 105"/>
+          <p:cNvSpPr/>
+          <p:nvPr/>
+        </p:nvSpPr>
+        <p:spPr>
+          <a:xfrm>
+            <a:off x="2572207" y="2606040"/>
+            <a:ext cx="17374" cy="17374"/>
+          </a:xfrm>
+          <a:prstGeom prst="rect">
+            <a:avLst/>
+          </a:prstGeom>
+          <a:solidFill>
+            <a:srgbClr val="1A2027">
+              <a:alpha val="8000"/>
+            </a:srgbClr>
+          </a:solidFill>
+          <a:ln/>
+        </p:spPr>
+      </p:sp>
+      <p:sp>
+        <p:nvSpPr>
+          <p:cNvPr id="108" name="Shape 106"/>
+          <p:cNvSpPr/>
+          <p:nvPr/>
+        </p:nvSpPr>
+        <p:spPr>
+          <a:xfrm>
+            <a:off x="2937967" y="4123944"/>
+            <a:ext cx="17374" cy="17374"/>
+          </a:xfrm>
+          <a:prstGeom prst="rect">
+            <a:avLst/>
+          </a:prstGeom>
+          <a:solidFill>
+            <a:srgbClr val="1A2027">
+              <a:alpha val="6000"/>
+            </a:srgbClr>
+          </a:solidFill>
+          <a:ln/>
+        </p:spPr>
+      </p:sp>
+      <p:sp>
+        <p:nvSpPr>
+          <p:cNvPr id="109" name="Shape 107"/>
+          <p:cNvSpPr/>
+          <p:nvPr/>
+        </p:nvSpPr>
+        <p:spPr>
+          <a:xfrm>
+            <a:off x="6657746" y="3771900"/>
+            <a:ext cx="21946" cy="21946"/>
+          </a:xfrm>
+          <a:prstGeom prst="rect">
+            <a:avLst/>
+          </a:prstGeom>
+          <a:solidFill>
+            <a:srgbClr val="1A2027">
+              <a:alpha val="10000"/>
+            </a:srgbClr>
+          </a:solidFill>
+          <a:ln/>
+        </p:spPr>
+      </p:sp>
+      <p:sp>
+        <p:nvSpPr>
+          <p:cNvPr id="110" name="Shape 108"/>
+          <p:cNvSpPr/>
+          <p:nvPr/>
+        </p:nvSpPr>
+        <p:spPr>
+          <a:xfrm>
+            <a:off x="1915668" y="3061411"/>
+            <a:ext cx="20117" cy="20117"/>
+          </a:xfrm>
+          <a:prstGeom prst="rect">
+            <a:avLst/>
+          </a:prstGeom>
+          <a:solidFill>
+            <a:srgbClr val="1A2027">
+              <a:alpha val="7000"/>
+            </a:srgbClr>
+          </a:solidFill>
+          <a:ln/>
+        </p:spPr>
+      </p:sp>
+      <p:sp>
+        <p:nvSpPr>
+          <p:cNvPr id="111" name="Shape 109"/>
+          <p:cNvSpPr/>
+          <p:nvPr/>
+        </p:nvSpPr>
+        <p:spPr>
+          <a:xfrm>
+            <a:off x="6667805" y="1783080"/>
+            <a:ext cx="20117" cy="20117"/>
+          </a:xfrm>
+          <a:prstGeom prst="rect">
+            <a:avLst/>
+          </a:prstGeom>
+          <a:solidFill>
+            <a:srgbClr val="1A2027">
+              <a:alpha val="12000"/>
+            </a:srgbClr>
+          </a:solidFill>
+          <a:ln/>
+        </p:spPr>
+      </p:sp>
+      <p:sp>
+        <p:nvSpPr>
+          <p:cNvPr id="112" name="Shape 110"/>
+          <p:cNvSpPr/>
+          <p:nvPr/>
+        </p:nvSpPr>
+        <p:spPr>
+          <a:xfrm>
+            <a:off x="4256532" y="4943246"/>
+            <a:ext cx="20117" cy="20117"/>
+          </a:xfrm>
+          <a:prstGeom prst="rect">
+            <a:avLst/>
+          </a:prstGeom>
+          <a:solidFill>
+            <a:srgbClr val="1A2027">
+              <a:alpha val="7000"/>
+            </a:srgbClr>
+          </a:solidFill>
+          <a:ln/>
+        </p:spPr>
+      </p:sp>
+      <p:sp>
+        <p:nvSpPr>
+          <p:cNvPr id="113" name="Shape 111"/>
+          <p:cNvSpPr/>
+          <p:nvPr/>
+        </p:nvSpPr>
+        <p:spPr>
+          <a:xfrm>
+            <a:off x="7279538" y="2844698"/>
+            <a:ext cx="16459" cy="16459"/>
+          </a:xfrm>
+          <a:prstGeom prst="rect">
+            <a:avLst/>
+          </a:prstGeom>
+          <a:solidFill>
+            <a:srgbClr val="1A2027">
+              <a:alpha val="6000"/>
+            </a:srgbClr>
+          </a:solidFill>
+          <a:ln/>
+        </p:spPr>
+      </p:sp>
+      <p:sp>
+        <p:nvSpPr>
+          <p:cNvPr id="114" name="Shape 112"/>
+          <p:cNvSpPr/>
+          <p:nvPr/>
+        </p:nvSpPr>
+        <p:spPr>
+          <a:xfrm>
+            <a:off x="7584948" y="1166774"/>
+            <a:ext cx="12802" cy="12802"/>
+          </a:xfrm>
+          <a:prstGeom prst="rect">
+            <a:avLst/>
+          </a:prstGeom>
+          <a:solidFill>
+            <a:srgbClr val="1A2027">
+              <a:alpha val="7000"/>
+            </a:srgbClr>
+          </a:solidFill>
+          <a:ln/>
+        </p:spPr>
+      </p:sp>
+      <p:sp>
+        <p:nvSpPr>
+          <p:cNvPr id="115" name="Shape 113"/>
+          <p:cNvSpPr/>
+          <p:nvPr/>
+        </p:nvSpPr>
+        <p:spPr>
+          <a:xfrm>
+            <a:off x="207569" y="782726"/>
+            <a:ext cx="19202" cy="19202"/>
+          </a:xfrm>
+          <a:prstGeom prst="rect">
+            <a:avLst/>
+          </a:prstGeom>
+          <a:solidFill>
+            <a:srgbClr val="1A2027">
+              <a:alpha val="8000"/>
+            </a:srgbClr>
+          </a:solidFill>
+          <a:ln/>
+        </p:spPr>
+      </p:sp>
+      <p:sp>
+        <p:nvSpPr>
+          <p:cNvPr id="116" name="Shape 114"/>
+          <p:cNvSpPr/>
+          <p:nvPr/>
+        </p:nvSpPr>
+        <p:spPr>
+          <a:xfrm>
+            <a:off x="7448702" y="1602029"/>
+            <a:ext cx="17374" cy="17374"/>
+          </a:xfrm>
+          <a:prstGeom prst="rect">
+            <a:avLst/>
+          </a:prstGeom>
+          <a:solidFill>
+            <a:srgbClr val="1A2027">
+              <a:alpha val="7000"/>
+            </a:srgbClr>
+          </a:solidFill>
+          <a:ln/>
+        </p:spPr>
+      </p:sp>
+      <p:sp>
+        <p:nvSpPr>
+          <p:cNvPr id="117" name="Shape 115"/>
+          <p:cNvSpPr/>
+          <p:nvPr/>
+        </p:nvSpPr>
+        <p:spPr>
+          <a:xfrm>
+            <a:off x="4311396" y="4101084"/>
+            <a:ext cx="14630" cy="14630"/>
+          </a:xfrm>
+          <a:prstGeom prst="rect">
+            <a:avLst/>
+          </a:prstGeom>
+          <a:solidFill>
+            <a:srgbClr val="1A2027">
+              <a:alpha val="7000"/>
+            </a:srgbClr>
+          </a:solidFill>
+          <a:ln/>
+        </p:spPr>
+      </p:sp>
+      <p:sp>
+        <p:nvSpPr>
+          <p:cNvPr id="118" name="Shape 116"/>
+          <p:cNvSpPr/>
+          <p:nvPr/>
+        </p:nvSpPr>
+        <p:spPr>
+          <a:xfrm>
+            <a:off x="3587191" y="3818534"/>
+            <a:ext cx="20117" cy="20117"/>
+          </a:xfrm>
+          <a:prstGeom prst="rect">
+            <a:avLst/>
+          </a:prstGeom>
+          <a:solidFill>
+            <a:srgbClr val="1A2027">
+              <a:alpha val="7000"/>
+            </a:srgbClr>
+          </a:solidFill>
+          <a:ln/>
+        </p:spPr>
+      </p:sp>
+      <p:sp>
+        <p:nvSpPr>
+          <p:cNvPr id="119" name="Shape 117"/>
+          <p:cNvSpPr/>
+          <p:nvPr/>
+        </p:nvSpPr>
+        <p:spPr>
+          <a:xfrm>
+            <a:off x="6186830" y="899770"/>
+            <a:ext cx="21031" cy="21031"/>
+          </a:xfrm>
+          <a:prstGeom prst="rect">
+            <a:avLst/>
+          </a:prstGeom>
+          <a:solidFill>
+            <a:srgbClr val="1A2027">
+              <a:alpha val="6000"/>
+            </a:srgbClr>
+          </a:solidFill>
+          <a:ln/>
+        </p:spPr>
+      </p:sp>
+      <p:sp>
+        <p:nvSpPr>
+          <p:cNvPr id="120" name="Shape 118"/>
+          <p:cNvSpPr/>
+          <p:nvPr/>
+        </p:nvSpPr>
+        <p:spPr>
+          <a:xfrm>
+            <a:off x="6777533" y="2132381"/>
+            <a:ext cx="15545" cy="15545"/>
+          </a:xfrm>
+          <a:prstGeom prst="rect">
+            <a:avLst/>
+          </a:prstGeom>
+          <a:solidFill>
+            <a:srgbClr val="1A2027">
+              <a:alpha val="9000"/>
+            </a:srgbClr>
+          </a:solidFill>
+          <a:ln/>
+        </p:spPr>
+      </p:sp>
+      <p:sp>
+        <p:nvSpPr>
+          <p:cNvPr id="121" name="Shape 119"/>
+          <p:cNvSpPr/>
+          <p:nvPr/>
+        </p:nvSpPr>
+        <p:spPr>
+          <a:xfrm>
+            <a:off x="1417320" y="4409237"/>
+            <a:ext cx="17374" cy="17374"/>
+          </a:xfrm>
+          <a:prstGeom prst="rect">
+            <a:avLst/>
+          </a:prstGeom>
+          <a:solidFill>
+            <a:srgbClr val="1A2027">
+              <a:alpha val="11000"/>
+            </a:srgbClr>
+          </a:solidFill>
+          <a:ln/>
+        </p:spPr>
+      </p:sp>
+      <p:sp>
+        <p:nvSpPr>
+          <p:cNvPr id="122" name="Shape 120"/>
+          <p:cNvSpPr/>
+          <p:nvPr/>
+        </p:nvSpPr>
+        <p:spPr>
+          <a:xfrm>
+            <a:off x="749808" y="801014"/>
+            <a:ext cx="17374" cy="17374"/>
+          </a:xfrm>
+          <a:prstGeom prst="rect">
+            <a:avLst/>
+          </a:prstGeom>
+          <a:solidFill>
+            <a:srgbClr val="1A2027">
+              <a:alpha val="12000"/>
+            </a:srgbClr>
+          </a:solidFill>
+          <a:ln/>
+        </p:spPr>
+      </p:sp>
+      <p:sp>
+        <p:nvSpPr>
+          <p:cNvPr id="123" name="Shape 121"/>
+          <p:cNvSpPr/>
+          <p:nvPr/>
+        </p:nvSpPr>
+        <p:spPr>
+          <a:xfrm>
+            <a:off x="9083650" y="706831"/>
+            <a:ext cx="14630" cy="14630"/>
+          </a:xfrm>
+          <a:prstGeom prst="rect">
+            <a:avLst/>
+          </a:prstGeom>
+          <a:solidFill>
+            <a:srgbClr val="1A2027">
+              <a:alpha val="6000"/>
+            </a:srgbClr>
+          </a:solidFill>
+          <a:ln/>
+        </p:spPr>
+      </p:sp>
+      <p:sp>
+        <p:nvSpPr>
+          <p:cNvPr id="124" name="Shape 122"/>
+          <p:cNvSpPr/>
+          <p:nvPr/>
+        </p:nvSpPr>
+        <p:spPr>
+          <a:xfrm>
+            <a:off x="4759452" y="770839"/>
+            <a:ext cx="12802" cy="12802"/>
+          </a:xfrm>
+          <a:prstGeom prst="rect">
+            <a:avLst/>
+          </a:prstGeom>
+          <a:solidFill>
+            <a:srgbClr val="1A2027">
+              <a:alpha val="9000"/>
+            </a:srgbClr>
+          </a:solidFill>
+          <a:ln/>
+        </p:spPr>
+      </p:sp>
+      <p:sp>
+        <p:nvSpPr>
+          <p:cNvPr id="125" name="Shape 123"/>
+          <p:cNvSpPr/>
+          <p:nvPr/>
+        </p:nvSpPr>
+        <p:spPr>
+          <a:xfrm>
+            <a:off x="4973422" y="2532888"/>
+            <a:ext cx="16459" cy="16459"/>
+          </a:xfrm>
+          <a:prstGeom prst="rect">
+            <a:avLst/>
+          </a:prstGeom>
+          <a:solidFill>
+            <a:srgbClr val="1A2027">
+              <a:alpha val="9000"/>
+            </a:srgbClr>
+          </a:solidFill>
+          <a:ln/>
+        </p:spPr>
+      </p:sp>
+      <p:sp>
+        <p:nvSpPr>
+          <p:cNvPr id="126" name="Shape 124"/>
+          <p:cNvSpPr/>
+          <p:nvPr/>
+        </p:nvSpPr>
+        <p:spPr>
+          <a:xfrm>
+            <a:off x="245059" y="761695"/>
+            <a:ext cx="19202" cy="19202"/>
+          </a:xfrm>
+          <a:prstGeom prst="rect">
+            <a:avLst/>
+          </a:prstGeom>
+          <a:solidFill>
+            <a:srgbClr val="1A2027">
+              <a:alpha val="10000"/>
+            </a:srgbClr>
+          </a:solidFill>
+          <a:ln/>
+        </p:spPr>
+      </p:sp>
+      <p:sp>
+        <p:nvSpPr>
+          <p:cNvPr id="127" name="Shape 125"/>
+          <p:cNvSpPr/>
+          <p:nvPr/>
+        </p:nvSpPr>
+        <p:spPr>
+          <a:xfrm>
+            <a:off x="918972" y="195682"/>
+            <a:ext cx="12802" cy="12802"/>
+          </a:xfrm>
+          <a:prstGeom prst="rect">
+            <a:avLst/>
+          </a:prstGeom>
+          <a:solidFill>
+            <a:srgbClr val="1A2027">
+              <a:alpha val="10000"/>
+            </a:srgbClr>
+          </a:solidFill>
+          <a:ln/>
+        </p:spPr>
+      </p:sp>
+      <p:sp>
+        <p:nvSpPr>
+          <p:cNvPr id="128" name="Shape 126"/>
+          <p:cNvSpPr/>
+          <p:nvPr/>
+        </p:nvSpPr>
+        <p:spPr>
+          <a:xfrm>
+            <a:off x="3635654" y="2493569"/>
+            <a:ext cx="17374" cy="17374"/>
+          </a:xfrm>
+          <a:prstGeom prst="rect">
+            <a:avLst/>
+          </a:prstGeom>
+          <a:solidFill>
+            <a:srgbClr val="1A2027">
+              <a:alpha val="5000"/>
+            </a:srgbClr>
+          </a:solidFill>
+          <a:ln/>
+        </p:spPr>
+      </p:sp>
+      <p:sp>
+        <p:nvSpPr>
+          <p:cNvPr id="129" name="Shape 127"/>
+          <p:cNvSpPr/>
+          <p:nvPr/>
+        </p:nvSpPr>
+        <p:spPr>
+          <a:xfrm>
+            <a:off x="6435547" y="3275381"/>
+            <a:ext cx="11887" cy="11887"/>
+          </a:xfrm>
+          <a:prstGeom prst="rect">
+            <a:avLst/>
+          </a:prstGeom>
+          <a:solidFill>
+            <a:srgbClr val="1A2027">
+              <a:alpha val="6000"/>
+            </a:srgbClr>
+          </a:solidFill>
+          <a:ln/>
+        </p:spPr>
+      </p:sp>
+      <p:sp>
+        <p:nvSpPr>
+          <p:cNvPr id="130" name="Shape 128"/>
+          <p:cNvSpPr/>
+          <p:nvPr/>
+        </p:nvSpPr>
+        <p:spPr>
+          <a:xfrm>
+            <a:off x="3250692" y="4764938"/>
+            <a:ext cx="21031" cy="21031"/>
+          </a:xfrm>
+          <a:prstGeom prst="rect">
+            <a:avLst/>
+          </a:prstGeom>
+          <a:solidFill>
+            <a:srgbClr val="1A2027">
+              <a:alpha val="6000"/>
+            </a:srgbClr>
+          </a:solidFill>
+          <a:ln/>
+        </p:spPr>
+      </p:sp>
+      <p:sp>
+        <p:nvSpPr>
+          <p:cNvPr id="131" name="Shape 129"/>
+          <p:cNvSpPr/>
+          <p:nvPr/>
+        </p:nvSpPr>
+        <p:spPr>
+          <a:xfrm>
+            <a:off x="21946" y="4916729"/>
+            <a:ext cx="13716" cy="13716"/>
+          </a:xfrm>
+          <a:prstGeom prst="rect">
+            <a:avLst/>
+          </a:prstGeom>
+          <a:solidFill>
+            <a:srgbClr val="1A2027">
+              <a:alpha val="6000"/>
+            </a:srgbClr>
+          </a:solidFill>
+          <a:ln/>
+        </p:spPr>
+      </p:sp>
+      <p:sp>
+        <p:nvSpPr>
+          <p:cNvPr id="132" name="Shape 130"/>
+          <p:cNvSpPr/>
+          <p:nvPr/>
+        </p:nvSpPr>
+        <p:spPr>
+          <a:xfrm>
+            <a:off x="5941771" y="1666951"/>
+            <a:ext cx="20117" cy="20117"/>
+          </a:xfrm>
+          <a:prstGeom prst="rect">
+            <a:avLst/>
+          </a:prstGeom>
+          <a:solidFill>
+            <a:srgbClr val="1A2027">
+              <a:alpha val="8000"/>
+            </a:srgbClr>
+          </a:solidFill>
+          <a:ln/>
+        </p:spPr>
+      </p:sp>
+      <p:sp>
+        <p:nvSpPr>
+          <p:cNvPr id="133" name="Shape 131"/>
+          <p:cNvSpPr/>
+          <p:nvPr/>
+        </p:nvSpPr>
+        <p:spPr>
+          <a:xfrm>
+            <a:off x="1110082" y="1228039"/>
+            <a:ext cx="13716" cy="13716"/>
+          </a:xfrm>
+          <a:prstGeom prst="rect">
+            <a:avLst/>
+          </a:prstGeom>
+          <a:solidFill>
+            <a:srgbClr val="1A2027">
+              <a:alpha val="10000"/>
+            </a:srgbClr>
+          </a:solidFill>
+          <a:ln/>
+        </p:spPr>
+      </p:sp>
+      <p:sp>
+        <p:nvSpPr>
+          <p:cNvPr id="134" name="Shape 132"/>
+          <p:cNvSpPr/>
+          <p:nvPr/>
+        </p:nvSpPr>
+        <p:spPr>
+          <a:xfrm>
+            <a:off x="2427732" y="240487"/>
+            <a:ext cx="13716" cy="13716"/>
+          </a:xfrm>
+          <a:prstGeom prst="rect">
+            <a:avLst/>
+          </a:prstGeom>
+          <a:solidFill>
+            <a:srgbClr val="1A2027">
+              <a:alpha val="7000"/>
+            </a:srgbClr>
+          </a:solidFill>
+          <a:ln/>
+        </p:spPr>
+      </p:sp>
+      <p:sp>
+        <p:nvSpPr>
+          <p:cNvPr id="135" name="Shape 133"/>
+          <p:cNvSpPr/>
+          <p:nvPr/>
+        </p:nvSpPr>
+        <p:spPr>
+          <a:xfrm>
+            <a:off x="6110021" y="4636008"/>
+            <a:ext cx="17374" cy="17374"/>
+          </a:xfrm>
+          <a:prstGeom prst="rect">
+            <a:avLst/>
+          </a:prstGeom>
+          <a:solidFill>
+            <a:srgbClr val="1A2027">
+              <a:alpha val="6000"/>
+            </a:srgbClr>
+          </a:solidFill>
+          <a:ln/>
+        </p:spPr>
+      </p:sp>
+      <p:sp>
+        <p:nvSpPr>
+          <p:cNvPr id="136" name="Shape 134"/>
+          <p:cNvSpPr/>
+          <p:nvPr/>
+        </p:nvSpPr>
+        <p:spPr>
+          <a:xfrm>
+            <a:off x="5975604" y="1484986"/>
+            <a:ext cx="13716" cy="13716"/>
+          </a:xfrm>
+          <a:prstGeom prst="rect">
+            <a:avLst/>
+          </a:prstGeom>
+          <a:solidFill>
+            <a:srgbClr val="1A2027">
+              <a:alpha val="6000"/>
+            </a:srgbClr>
+          </a:solidFill>
+          <a:ln/>
+        </p:spPr>
+      </p:sp>
+      <p:sp>
+        <p:nvSpPr>
+          <p:cNvPr id="137" name="Shape 135"/>
+          <p:cNvSpPr/>
+          <p:nvPr/>
+        </p:nvSpPr>
+        <p:spPr>
+          <a:xfrm>
+            <a:off x="6911950" y="206654"/>
+            <a:ext cx="15545" cy="15545"/>
+          </a:xfrm>
+          <a:prstGeom prst="rect">
+            <a:avLst/>
+          </a:prstGeom>
+          <a:solidFill>
+            <a:srgbClr val="1A2027">
+              <a:alpha val="8000"/>
+            </a:srgbClr>
+          </a:solidFill>
+          <a:ln/>
+        </p:spPr>
+      </p:sp>
+      <p:sp>
+        <p:nvSpPr>
+          <p:cNvPr id="138" name="Shape 136"/>
+          <p:cNvSpPr/>
+          <p:nvPr/>
+        </p:nvSpPr>
+        <p:spPr>
+          <a:xfrm>
+            <a:off x="677570" y="809244"/>
+            <a:ext cx="14630" cy="14630"/>
+          </a:xfrm>
+          <a:prstGeom prst="rect">
+            <a:avLst/>
+          </a:prstGeom>
+          <a:solidFill>
+            <a:srgbClr val="1A2027">
+              <a:alpha val="10000"/>
+            </a:srgbClr>
+          </a:solidFill>
+          <a:ln/>
+        </p:spPr>
+      </p:sp>
+      <p:sp>
+        <p:nvSpPr>
+          <p:cNvPr id="139" name="Shape 137"/>
+          <p:cNvSpPr/>
+          <p:nvPr/>
+        </p:nvSpPr>
+        <p:spPr>
+          <a:xfrm>
+            <a:off x="852221" y="2964485"/>
+            <a:ext cx="12802" cy="12802"/>
+          </a:xfrm>
+          <a:prstGeom prst="rect">
+            <a:avLst/>
+          </a:prstGeom>
+          <a:solidFill>
+            <a:srgbClr val="1A2027">
+              <a:alpha val="7000"/>
+            </a:srgbClr>
+          </a:solidFill>
+          <a:ln/>
+        </p:spPr>
+      </p:sp>
+      <p:sp>
+        <p:nvSpPr>
+          <p:cNvPr id="140" name="Shape 138"/>
+          <p:cNvSpPr/>
+          <p:nvPr/>
+        </p:nvSpPr>
+        <p:spPr>
+          <a:xfrm>
+            <a:off x="8563356" y="2815438"/>
+            <a:ext cx="15545" cy="15545"/>
+          </a:xfrm>
+          <a:prstGeom prst="rect">
+            <a:avLst/>
+          </a:prstGeom>
+          <a:solidFill>
+            <a:srgbClr val="1A2027">
+              <a:alpha val="6000"/>
+            </a:srgbClr>
+          </a:solidFill>
+          <a:ln/>
+        </p:spPr>
+      </p:sp>
+      <p:sp>
+        <p:nvSpPr>
+          <p:cNvPr id="141" name="Shape 139"/>
+          <p:cNvSpPr/>
+          <p:nvPr/>
+        </p:nvSpPr>
+        <p:spPr>
+          <a:xfrm>
+            <a:off x="1251814" y="2104034"/>
+            <a:ext cx="21031" cy="21031"/>
+          </a:xfrm>
+          <a:prstGeom prst="rect">
+            <a:avLst/>
+          </a:prstGeom>
+          <a:solidFill>
+            <a:srgbClr val="1A2027">
+              <a:alpha val="9000"/>
+            </a:srgbClr>
+          </a:solidFill>
+          <a:ln/>
+        </p:spPr>
+      </p:sp>
+      <p:sp>
+        <p:nvSpPr>
+          <p:cNvPr id="142" name="Shape 140"/>
+          <p:cNvSpPr/>
+          <p:nvPr/>
+        </p:nvSpPr>
+        <p:spPr>
+          <a:xfrm>
+            <a:off x="2619756" y="4543654"/>
+            <a:ext cx="17374" cy="17374"/>
+          </a:xfrm>
+          <a:prstGeom prst="rect">
+            <a:avLst/>
+          </a:prstGeom>
+          <a:solidFill>
+            <a:srgbClr val="1A2027">
+              <a:alpha val="5000"/>
+            </a:srgbClr>
+          </a:solidFill>
+          <a:ln/>
+        </p:spPr>
+      </p:sp>
+      <p:sp>
+        <p:nvSpPr>
+          <p:cNvPr id="143" name="Shape 141"/>
+          <p:cNvSpPr/>
+          <p:nvPr/>
+        </p:nvSpPr>
+        <p:spPr>
+          <a:xfrm>
+            <a:off x="3032150" y="1107338"/>
+            <a:ext cx="13716" cy="13716"/>
+          </a:xfrm>
+          <a:prstGeom prst="rect">
+            <a:avLst/>
+          </a:prstGeom>
+          <a:solidFill>
+            <a:srgbClr val="1A2027">
+              <a:alpha val="5000"/>
+            </a:srgbClr>
+          </a:solidFill>
+          <a:ln/>
+        </p:spPr>
+      </p:sp>
+      <p:sp>
+        <p:nvSpPr>
+          <p:cNvPr id="144" name="Shape 142"/>
+          <p:cNvSpPr/>
+          <p:nvPr/>
+        </p:nvSpPr>
+        <p:spPr>
+          <a:xfrm>
+            <a:off x="2335378" y="3247034"/>
+            <a:ext cx="14630" cy="14630"/>
+          </a:xfrm>
+          <a:prstGeom prst="rect">
+            <a:avLst/>
+          </a:prstGeom>
+          <a:solidFill>
+            <a:srgbClr val="1A2027">
+              <a:alpha val="5000"/>
+            </a:srgbClr>
+          </a:solidFill>
+          <a:ln/>
+        </p:spPr>
+      </p:sp>
+      <p:sp>
+        <p:nvSpPr>
+          <p:cNvPr id="145" name="Shape 143"/>
+          <p:cNvSpPr/>
+          <p:nvPr/>
+        </p:nvSpPr>
+        <p:spPr>
+          <a:xfrm>
+            <a:off x="3486607" y="828446"/>
+            <a:ext cx="12802" cy="12802"/>
+          </a:xfrm>
+          <a:prstGeom prst="rect">
+            <a:avLst/>
+          </a:prstGeom>
+          <a:solidFill>
+            <a:srgbClr val="1A2027">
+              <a:alpha val="10000"/>
+            </a:srgbClr>
+          </a:solidFill>
+          <a:ln/>
+        </p:spPr>
+      </p:sp>
+      <p:sp>
+        <p:nvSpPr>
+          <p:cNvPr id="146" name="Shape 144"/>
+          <p:cNvSpPr/>
+          <p:nvPr/>
+        </p:nvSpPr>
+        <p:spPr>
+          <a:xfrm>
+            <a:off x="6056986" y="3210458"/>
+            <a:ext cx="19202" cy="19202"/>
+          </a:xfrm>
+          <a:prstGeom prst="rect">
+            <a:avLst/>
+          </a:prstGeom>
+          <a:solidFill>
+            <a:srgbClr val="1A2027">
+              <a:alpha val="11000"/>
+            </a:srgbClr>
+          </a:solidFill>
+          <a:ln/>
+        </p:spPr>
+      </p:sp>
+      <p:sp>
+        <p:nvSpPr>
+          <p:cNvPr id="147" name="Shape 145"/>
+          <p:cNvSpPr/>
+          <p:nvPr/>
+        </p:nvSpPr>
+        <p:spPr>
+          <a:xfrm>
+            <a:off x="5426964" y="2008022"/>
+            <a:ext cx="21031" cy="21031"/>
+          </a:xfrm>
+          <a:prstGeom prst="rect">
+            <a:avLst/>
+          </a:prstGeom>
+          <a:solidFill>
+            <a:srgbClr val="1A2027">
+              <a:alpha val="5000"/>
+            </a:srgbClr>
+          </a:solidFill>
+          <a:ln/>
+        </p:spPr>
+      </p:sp>
+      <p:sp>
+        <p:nvSpPr>
+          <p:cNvPr id="148" name="Shape 146"/>
+          <p:cNvSpPr/>
+          <p:nvPr/>
+        </p:nvSpPr>
+        <p:spPr>
+          <a:xfrm>
+            <a:off x="5783580" y="1228039"/>
+            <a:ext cx="16459" cy="16459"/>
+          </a:xfrm>
+          <a:prstGeom prst="rect">
+            <a:avLst/>
+          </a:prstGeom>
+          <a:solidFill>
+            <a:srgbClr val="1A2027">
+              <a:alpha val="10000"/>
+            </a:srgbClr>
+          </a:solidFill>
+          <a:ln/>
+        </p:spPr>
+      </p:sp>
+      <p:sp>
+        <p:nvSpPr>
+          <p:cNvPr id="149" name="Shape 147"/>
+          <p:cNvSpPr/>
+          <p:nvPr/>
+        </p:nvSpPr>
+        <p:spPr>
+          <a:xfrm>
+            <a:off x="2700223" y="1745590"/>
+            <a:ext cx="14630" cy="14630"/>
+          </a:xfrm>
+          <a:prstGeom prst="rect">
+            <a:avLst/>
+          </a:prstGeom>
+          <a:solidFill>
+            <a:srgbClr val="1A2027">
+              <a:alpha val="5000"/>
+            </a:srgbClr>
+          </a:solidFill>
+          <a:ln/>
+        </p:spPr>
+      </p:sp>
+      <p:sp>
+        <p:nvSpPr>
+          <p:cNvPr id="150" name="Shape 148"/>
+          <p:cNvSpPr/>
+          <p:nvPr/>
+        </p:nvSpPr>
+        <p:spPr>
+          <a:xfrm>
+            <a:off x="2545690" y="1702613"/>
+            <a:ext cx="17374" cy="17374"/>
+          </a:xfrm>
+          <a:prstGeom prst="rect">
+            <a:avLst/>
+          </a:prstGeom>
+          <a:solidFill>
+            <a:srgbClr val="1A2027">
+              <a:alpha val="8000"/>
+            </a:srgbClr>
+          </a:solidFill>
+          <a:ln/>
+        </p:spPr>
+      </p:sp>
+      <p:sp>
+        <p:nvSpPr>
+          <p:cNvPr id="151" name="Shape 149"/>
+          <p:cNvSpPr/>
+          <p:nvPr/>
+        </p:nvSpPr>
+        <p:spPr>
+          <a:xfrm>
+            <a:off x="2669134" y="4294022"/>
+            <a:ext cx="21031" cy="21031"/>
+          </a:xfrm>
+          <a:prstGeom prst="rect">
+            <a:avLst/>
+          </a:prstGeom>
+          <a:solidFill>
+            <a:srgbClr val="1A2027">
+              <a:alpha val="7000"/>
+            </a:srgbClr>
+          </a:solidFill>
+          <a:ln/>
+        </p:spPr>
+      </p:sp>
+      <p:sp>
+        <p:nvSpPr>
+          <p:cNvPr id="152" name="Shape 150"/>
+          <p:cNvSpPr/>
+          <p:nvPr/>
+        </p:nvSpPr>
+        <p:spPr>
+          <a:xfrm>
+            <a:off x="4143146" y="210312"/>
+            <a:ext cx="21946" cy="21946"/>
+          </a:xfrm>
+          <a:prstGeom prst="rect">
+            <a:avLst/>
+          </a:prstGeom>
+          <a:solidFill>
+            <a:srgbClr val="1A2027">
+              <a:alpha val="7000"/>
+            </a:srgbClr>
+          </a:solidFill>
+          <a:ln/>
+        </p:spPr>
+      </p:sp>
+      <p:sp>
+        <p:nvSpPr>
+          <p:cNvPr id="153" name="Shape 151"/>
+          <p:cNvSpPr/>
+          <p:nvPr/>
+        </p:nvSpPr>
+        <p:spPr>
+          <a:xfrm>
+            <a:off x="3766414" y="328270"/>
+            <a:ext cx="19202" cy="19202"/>
+          </a:xfrm>
+          <a:prstGeom prst="rect">
+            <a:avLst/>
+          </a:prstGeom>
+          <a:solidFill>
+            <a:srgbClr val="1A2027">
+              <a:alpha val="7000"/>
+            </a:srgbClr>
+          </a:solidFill>
+          <a:ln/>
+        </p:spPr>
+      </p:sp>
+      <p:sp>
+        <p:nvSpPr>
+          <p:cNvPr id="154" name="Shape 152"/>
+          <p:cNvSpPr/>
+          <p:nvPr/>
+        </p:nvSpPr>
+        <p:spPr>
+          <a:xfrm>
+            <a:off x="5262372" y="1791310"/>
+            <a:ext cx="16459" cy="16459"/>
+          </a:xfrm>
+          <a:prstGeom prst="rect">
+            <a:avLst/>
+          </a:prstGeom>
+          <a:solidFill>
+            <a:srgbClr val="1A2027">
+              <a:alpha val="9000"/>
+            </a:srgbClr>
+          </a:solidFill>
+          <a:ln/>
+        </p:spPr>
+      </p:sp>
+      <p:sp>
+        <p:nvSpPr>
+          <p:cNvPr id="155" name="Shape 153"/>
+          <p:cNvSpPr/>
+          <p:nvPr/>
+        </p:nvSpPr>
+        <p:spPr>
+          <a:xfrm>
+            <a:off x="917143" y="1319479"/>
+            <a:ext cx="21946" cy="21946"/>
+          </a:xfrm>
+          <a:prstGeom prst="rect">
+            <a:avLst/>
+          </a:prstGeom>
+          <a:solidFill>
+            <a:srgbClr val="1A2027">
+              <a:alpha val="6000"/>
+            </a:srgbClr>
+          </a:solidFill>
+          <a:ln/>
+        </p:spPr>
+      </p:sp>
+      <p:sp>
+        <p:nvSpPr>
+          <p:cNvPr id="156" name="Shape 154"/>
+          <p:cNvSpPr/>
+          <p:nvPr/>
+        </p:nvSpPr>
+        <p:spPr>
+          <a:xfrm>
+            <a:off x="4551883" y="2596896"/>
+            <a:ext cx="13716" cy="13716"/>
+          </a:xfrm>
+          <a:prstGeom prst="rect">
+            <a:avLst/>
+          </a:prstGeom>
+          <a:solidFill>
+            <a:srgbClr val="1A2027">
+              <a:alpha val="12000"/>
+            </a:srgbClr>
+          </a:solidFill>
+          <a:ln/>
+        </p:spPr>
+      </p:sp>
+      <p:sp>
+        <p:nvSpPr>
+          <p:cNvPr id="157" name="Shape 155"/>
+          <p:cNvSpPr/>
+          <p:nvPr/>
+        </p:nvSpPr>
+        <p:spPr>
+          <a:xfrm>
+            <a:off x="621792" y="1592885"/>
+            <a:ext cx="17374" cy="17374"/>
+          </a:xfrm>
+          <a:prstGeom prst="rect">
+            <a:avLst/>
+          </a:prstGeom>
+          <a:solidFill>
+            <a:srgbClr val="1A2027">
+              <a:alpha val="5000"/>
+            </a:srgbClr>
+          </a:solidFill>
+          <a:ln/>
+        </p:spPr>
+      </p:sp>
+      <p:sp>
+        <p:nvSpPr>
+          <p:cNvPr id="158" name="Shape 156"/>
+          <p:cNvSpPr/>
+          <p:nvPr/>
+        </p:nvSpPr>
+        <p:spPr>
+          <a:xfrm>
+            <a:off x="4073652" y="1172261"/>
+            <a:ext cx="21031" cy="21031"/>
+          </a:xfrm>
+          <a:prstGeom prst="rect">
+            <a:avLst/>
+          </a:prstGeom>
+          <a:solidFill>
+            <a:srgbClr val="1A2027">
+              <a:alpha val="8000"/>
+            </a:srgbClr>
+          </a:solidFill>
+          <a:ln/>
+        </p:spPr>
+      </p:sp>
+      <p:sp>
+        <p:nvSpPr>
+          <p:cNvPr id="159" name="Shape 157"/>
+          <p:cNvSpPr/>
+          <p:nvPr/>
+        </p:nvSpPr>
+        <p:spPr>
+          <a:xfrm>
+            <a:off x="223114" y="602590"/>
+            <a:ext cx="16459" cy="16459"/>
+          </a:xfrm>
+          <a:prstGeom prst="rect">
+            <a:avLst/>
+          </a:prstGeom>
+          <a:solidFill>
+            <a:srgbClr val="1A2027">
+              <a:alpha val="12000"/>
+            </a:srgbClr>
+          </a:solidFill>
+          <a:ln/>
+        </p:spPr>
+      </p:sp>
+      <p:sp>
+        <p:nvSpPr>
+          <p:cNvPr id="160" name="Shape 158"/>
+          <p:cNvSpPr/>
+          <p:nvPr/>
+        </p:nvSpPr>
+        <p:spPr>
+          <a:xfrm>
+            <a:off x="222199" y="3684118"/>
+            <a:ext cx="16459" cy="16459"/>
+          </a:xfrm>
+          <a:prstGeom prst="rect">
+            <a:avLst/>
+          </a:prstGeom>
+          <a:solidFill>
+            <a:srgbClr val="1A2027">
+              <a:alpha val="11000"/>
+            </a:srgbClr>
+          </a:solidFill>
+          <a:ln/>
+        </p:spPr>
+      </p:sp>
+      <p:sp>
+        <p:nvSpPr>
+          <p:cNvPr id="161" name="Shape 159"/>
+          <p:cNvSpPr/>
+          <p:nvPr/>
+        </p:nvSpPr>
+        <p:spPr>
+          <a:xfrm>
+            <a:off x="4127602" y="3851453"/>
+            <a:ext cx="16459" cy="16459"/>
+          </a:xfrm>
+          <a:prstGeom prst="rect">
+            <a:avLst/>
+          </a:prstGeom>
+          <a:solidFill>
+            <a:srgbClr val="1A2027">
+              <a:alpha val="5000"/>
+            </a:srgbClr>
+          </a:solidFill>
+          <a:ln/>
+        </p:spPr>
+      </p:sp>
+      <p:sp>
+        <p:nvSpPr>
+          <p:cNvPr id="162" name="Shape 160"/>
+          <p:cNvSpPr/>
+          <p:nvPr/>
+        </p:nvSpPr>
+        <p:spPr>
+          <a:xfrm>
+            <a:off x="2506370" y="2702966"/>
+            <a:ext cx="21031" cy="21031"/>
+          </a:xfrm>
+          <a:prstGeom prst="rect">
+            <a:avLst/>
+          </a:prstGeom>
+          <a:solidFill>
+            <a:srgbClr val="1A2027">
+              <a:alpha val="9000"/>
+            </a:srgbClr>
+          </a:solidFill>
+          <a:ln/>
+        </p:spPr>
+      </p:sp>
+      <p:sp>
+        <p:nvSpPr>
+          <p:cNvPr id="163" name="Shape 161"/>
+          <p:cNvSpPr/>
+          <p:nvPr/>
+        </p:nvSpPr>
+        <p:spPr>
+          <a:xfrm>
+            <a:off x="4205326" y="2478024"/>
+            <a:ext cx="21031" cy="21031"/>
+          </a:xfrm>
+          <a:prstGeom prst="rect">
+            <a:avLst/>
+          </a:prstGeom>
+          <a:solidFill>
+            <a:srgbClr val="1A2027">
+              <a:alpha val="11000"/>
+            </a:srgbClr>
+          </a:solidFill>
+          <a:ln/>
+        </p:spPr>
+      </p:sp>
+      <p:sp>
+        <p:nvSpPr>
+          <p:cNvPr id="164" name="Shape 162"/>
+          <p:cNvSpPr/>
+          <p:nvPr/>
+        </p:nvSpPr>
+        <p:spPr>
+          <a:xfrm>
+            <a:off x="7409383" y="907085"/>
+            <a:ext cx="18288" cy="18288"/>
+          </a:xfrm>
+          <a:prstGeom prst="rect">
+            <a:avLst/>
+          </a:prstGeom>
+          <a:solidFill>
+            <a:srgbClr val="1A2027">
+              <a:alpha val="10000"/>
+            </a:srgbClr>
+          </a:solidFill>
+          <a:ln/>
+        </p:spPr>
+      </p:sp>
+      <p:sp>
+        <p:nvSpPr>
+          <p:cNvPr id="165" name="Shape 163"/>
+          <p:cNvSpPr/>
+          <p:nvPr/>
+        </p:nvSpPr>
+        <p:spPr>
+          <a:xfrm>
+            <a:off x="6249010" y="2850185"/>
+            <a:ext cx="11887" cy="11887"/>
+          </a:xfrm>
+          <a:prstGeom prst="rect">
+            <a:avLst/>
+          </a:prstGeom>
+          <a:solidFill>
+            <a:srgbClr val="1A2027">
+              <a:alpha val="7000"/>
+            </a:srgbClr>
+          </a:solidFill>
+          <a:ln/>
+        </p:spPr>
+      </p:sp>
+      <p:sp>
+        <p:nvSpPr>
+          <p:cNvPr id="166" name="Shape 164"/>
+          <p:cNvSpPr/>
+          <p:nvPr/>
+        </p:nvSpPr>
+        <p:spPr>
+          <a:xfrm>
+            <a:off x="113386" y="3250692"/>
+            <a:ext cx="19202" cy="19202"/>
+          </a:xfrm>
+          <a:prstGeom prst="rect">
+            <a:avLst/>
+          </a:prstGeom>
+          <a:solidFill>
+            <a:srgbClr val="1A2027">
+              <a:alpha val="12000"/>
+            </a:srgbClr>
+          </a:solidFill>
+          <a:ln/>
+        </p:spPr>
+      </p:sp>
+      <p:sp>
+        <p:nvSpPr>
+          <p:cNvPr id="167" name="Shape 165"/>
+          <p:cNvSpPr/>
+          <p:nvPr/>
+        </p:nvSpPr>
+        <p:spPr>
+          <a:xfrm>
+            <a:off x="2413102" y="4239158"/>
+            <a:ext cx="17374" cy="17374"/>
+          </a:xfrm>
+          <a:prstGeom prst="rect">
+            <a:avLst/>
+          </a:prstGeom>
+          <a:solidFill>
+            <a:srgbClr val="1A2027">
+              <a:alpha val="12000"/>
+            </a:srgbClr>
+          </a:solidFill>
+          <a:ln/>
+        </p:spPr>
+      </p:sp>
+      <p:sp>
+        <p:nvSpPr>
+          <p:cNvPr id="168" name="Shape 166"/>
+          <p:cNvSpPr/>
+          <p:nvPr/>
+        </p:nvSpPr>
+        <p:spPr>
+          <a:xfrm>
+            <a:off x="2285086" y="3073298"/>
+            <a:ext cx="14630" cy="14630"/>
+          </a:xfrm>
+          <a:prstGeom prst="rect">
+            <a:avLst/>
+          </a:prstGeom>
+          <a:solidFill>
+            <a:srgbClr val="1A2027">
+              <a:alpha val="6000"/>
+            </a:srgbClr>
+          </a:solidFill>
+          <a:ln/>
+        </p:spPr>
+      </p:sp>
+      <p:sp>
+        <p:nvSpPr>
+          <p:cNvPr id="169" name="Shape 167"/>
+          <p:cNvSpPr/>
+          <p:nvPr/>
+        </p:nvSpPr>
+        <p:spPr>
+          <a:xfrm>
+            <a:off x="7912303" y="1013155"/>
+            <a:ext cx="16459" cy="16459"/>
+          </a:xfrm>
+          <a:prstGeom prst="rect">
+            <a:avLst/>
+          </a:prstGeom>
+          <a:solidFill>
+            <a:srgbClr val="1A2027">
+              <a:alpha val="5000"/>
+            </a:srgbClr>
+          </a:solidFill>
+          <a:ln/>
+        </p:spPr>
+      </p:sp>
+      <p:sp>
+        <p:nvSpPr>
+          <p:cNvPr id="170" name="Shape 168"/>
+          <p:cNvSpPr/>
+          <p:nvPr/>
+        </p:nvSpPr>
+        <p:spPr>
+          <a:xfrm>
+            <a:off x="2144268" y="2936138"/>
+            <a:ext cx="18288" cy="18288"/>
+          </a:xfrm>
+          <a:prstGeom prst="rect">
+            <a:avLst/>
+          </a:prstGeom>
+          <a:solidFill>
+            <a:srgbClr val="1A2027">
+              <a:alpha val="8000"/>
+            </a:srgbClr>
+          </a:solidFill>
+          <a:ln/>
+        </p:spPr>
+      </p:sp>
+      <p:sp>
+        <p:nvSpPr>
+          <p:cNvPr id="171" name="Shape 169"/>
+          <p:cNvSpPr/>
+          <p:nvPr/>
+        </p:nvSpPr>
+        <p:spPr>
+          <a:xfrm>
+            <a:off x="7295998" y="4278478"/>
+            <a:ext cx="10973" cy="10973"/>
+          </a:xfrm>
+          <a:prstGeom prst="rect">
+            <a:avLst/>
+          </a:prstGeom>
+          <a:solidFill>
+            <a:srgbClr val="1A2027">
+              <a:alpha val="10000"/>
+            </a:srgbClr>
+          </a:solidFill>
+          <a:ln/>
+        </p:spPr>
+      </p:sp>
+      <p:sp>
+        <p:nvSpPr>
+          <p:cNvPr id="172" name="Shape 170"/>
+          <p:cNvSpPr/>
+          <p:nvPr/>
+        </p:nvSpPr>
+        <p:spPr>
+          <a:xfrm>
+            <a:off x="3394253" y="3922776"/>
+            <a:ext cx="10973" cy="10973"/>
+          </a:xfrm>
+          <a:prstGeom prst="rect">
+            <a:avLst/>
+          </a:prstGeom>
+          <a:solidFill>
+            <a:srgbClr val="1A2027">
+              <a:alpha val="8000"/>
+            </a:srgbClr>
+          </a:solidFill>
+          <a:ln/>
+        </p:spPr>
+      </p:sp>
+      <p:sp>
+        <p:nvSpPr>
+          <p:cNvPr id="173" name="Shape 171"/>
+          <p:cNvSpPr/>
+          <p:nvPr/>
+        </p:nvSpPr>
+        <p:spPr>
+          <a:xfrm>
+            <a:off x="1385316" y="1383487"/>
+            <a:ext cx="20117" cy="20117"/>
+          </a:xfrm>
+          <a:prstGeom prst="rect">
+            <a:avLst/>
+          </a:prstGeom>
+          <a:solidFill>
+            <a:srgbClr val="1A2027">
+              <a:alpha val="8000"/>
+            </a:srgbClr>
+          </a:solidFill>
+          <a:ln/>
+        </p:spPr>
+      </p:sp>
+      <p:sp>
+        <p:nvSpPr>
+          <p:cNvPr id="174" name="Shape 172"/>
+          <p:cNvSpPr/>
+          <p:nvPr/>
+        </p:nvSpPr>
+        <p:spPr>
+          <a:xfrm>
+            <a:off x="1915668" y="4172407"/>
+            <a:ext cx="21031" cy="21031"/>
+          </a:xfrm>
+          <a:prstGeom prst="rect">
+            <a:avLst/>
+          </a:prstGeom>
+          <a:solidFill>
+            <a:srgbClr val="1A2027">
+              <a:alpha val="6000"/>
+            </a:srgbClr>
+          </a:solidFill>
+          <a:ln/>
+        </p:spPr>
+      </p:sp>
+      <p:sp>
+        <p:nvSpPr>
+          <p:cNvPr id="175" name="Shape 173"/>
+          <p:cNvSpPr/>
+          <p:nvPr/>
+        </p:nvSpPr>
+        <p:spPr>
+          <a:xfrm>
+            <a:off x="177394" y="1133856"/>
+            <a:ext cx="19202" cy="19202"/>
+          </a:xfrm>
+          <a:prstGeom prst="rect">
+            <a:avLst/>
+          </a:prstGeom>
+          <a:solidFill>
+            <a:srgbClr val="1A2027">
+              <a:alpha val="5000"/>
+            </a:srgbClr>
+          </a:solidFill>
+          <a:ln/>
+        </p:spPr>
+      </p:sp>
+      <p:sp>
+        <p:nvSpPr>
+          <p:cNvPr id="176" name="Shape 174"/>
+          <p:cNvSpPr/>
+          <p:nvPr/>
+        </p:nvSpPr>
+        <p:spPr>
+          <a:xfrm>
+            <a:off x="8535924" y="1560881"/>
+            <a:ext cx="21946" cy="21946"/>
+          </a:xfrm>
+          <a:prstGeom prst="rect">
+            <a:avLst/>
+          </a:prstGeom>
+          <a:solidFill>
+            <a:srgbClr val="1A2027">
+              <a:alpha val="11000"/>
+            </a:srgbClr>
+          </a:solidFill>
+          <a:ln/>
+        </p:spPr>
+      </p:sp>
+      <p:sp>
+        <p:nvSpPr>
+          <p:cNvPr id="177" name="Shape 175"/>
+          <p:cNvSpPr/>
+          <p:nvPr/>
+        </p:nvSpPr>
+        <p:spPr>
+          <a:xfrm>
+            <a:off x="7231075" y="1577340"/>
+            <a:ext cx="11887" cy="11887"/>
+          </a:xfrm>
+          <a:prstGeom prst="rect">
+            <a:avLst/>
+          </a:prstGeom>
+          <a:solidFill>
+            <a:srgbClr val="1A2027">
+              <a:alpha val="6000"/>
+            </a:srgbClr>
+          </a:solidFill>
+          <a:ln/>
+        </p:spPr>
+      </p:sp>
+      <p:sp>
+        <p:nvSpPr>
+          <p:cNvPr id="178" name="Shape 176"/>
+          <p:cNvSpPr/>
+          <p:nvPr/>
+        </p:nvSpPr>
+        <p:spPr>
+          <a:xfrm>
+            <a:off x="8673084" y="518465"/>
+            <a:ext cx="11887" cy="11887"/>
+          </a:xfrm>
+          <a:prstGeom prst="rect">
+            <a:avLst/>
+          </a:prstGeom>
+          <a:solidFill>
+            <a:srgbClr val="1A2027">
+              <a:alpha val="12000"/>
+            </a:srgbClr>
+          </a:solidFill>
+          <a:ln/>
+        </p:spPr>
+      </p:sp>
+      <p:sp>
+        <p:nvSpPr>
+          <p:cNvPr id="179" name="Shape 177"/>
+          <p:cNvSpPr/>
+          <p:nvPr/>
+        </p:nvSpPr>
+        <p:spPr>
+          <a:xfrm>
+            <a:off x="4611319" y="2725826"/>
+            <a:ext cx="17374" cy="17374"/>
+          </a:xfrm>
+          <a:prstGeom prst="rect">
+            <a:avLst/>
+          </a:prstGeom>
+          <a:solidFill>
+            <a:srgbClr val="1A2027">
+              <a:alpha val="10000"/>
+            </a:srgbClr>
+          </a:solidFill>
+          <a:ln/>
+        </p:spPr>
+      </p:sp>
+      <p:sp>
+        <p:nvSpPr>
+          <p:cNvPr id="180" name="Shape 178"/>
+          <p:cNvSpPr/>
+          <p:nvPr/>
+        </p:nvSpPr>
+        <p:spPr>
+          <a:xfrm>
+            <a:off x="4430268" y="2601468"/>
+            <a:ext cx="18288" cy="18288"/>
+          </a:xfrm>
+          <a:prstGeom prst="rect">
+            <a:avLst/>
+          </a:prstGeom>
+          <a:solidFill>
+            <a:srgbClr val="1A2027">
+              <a:alpha val="8000"/>
+            </a:srgbClr>
+          </a:solidFill>
+          <a:ln/>
+        </p:spPr>
+      </p:sp>
+      <p:sp>
+        <p:nvSpPr>
+          <p:cNvPr id="181" name="Shape 179"/>
+          <p:cNvSpPr/>
+          <p:nvPr/>
+        </p:nvSpPr>
+        <p:spPr>
+          <a:xfrm>
+            <a:off x="2095805" y="3015691"/>
+            <a:ext cx="11887" cy="11887"/>
+          </a:xfrm>
+          <a:prstGeom prst="rect">
+            <a:avLst/>
+          </a:prstGeom>
+          <a:solidFill>
+            <a:srgbClr val="1A2027">
+              <a:alpha val="5000"/>
+            </a:srgbClr>
+          </a:solidFill>
+          <a:ln/>
+        </p:spPr>
+      </p:sp>
+      <p:sp>
+        <p:nvSpPr>
+          <p:cNvPr id="182" name="Shape 180"/>
+          <p:cNvSpPr/>
+          <p:nvPr/>
+        </p:nvSpPr>
+        <p:spPr>
+          <a:xfrm>
+            <a:off x="2673706" y="1207922"/>
+            <a:ext cx="21031" cy="21031"/>
+          </a:xfrm>
+          <a:prstGeom prst="rect">
+            <a:avLst/>
+          </a:prstGeom>
+          <a:solidFill>
+            <a:srgbClr val="1A2027">
+              <a:alpha val="9000"/>
+            </a:srgbClr>
+          </a:solidFill>
+          <a:ln/>
+        </p:spPr>
+      </p:sp>
+      <p:sp>
+        <p:nvSpPr>
+          <p:cNvPr id="183" name="Shape 181"/>
+          <p:cNvSpPr/>
+          <p:nvPr/>
+        </p:nvSpPr>
+        <p:spPr>
+          <a:xfrm>
+            <a:off x="5066690" y="5014570"/>
+            <a:ext cx="15545" cy="15545"/>
+          </a:xfrm>
+          <a:prstGeom prst="rect">
+            <a:avLst/>
+          </a:prstGeom>
+          <a:solidFill>
+            <a:srgbClr val="1A2027">
+              <a:alpha val="5000"/>
+            </a:srgbClr>
+          </a:solidFill>
+          <a:ln/>
+        </p:spPr>
+      </p:sp>
+      <p:sp>
+        <p:nvSpPr>
+          <p:cNvPr id="184" name="Shape 182"/>
+          <p:cNvSpPr/>
+          <p:nvPr/>
+        </p:nvSpPr>
+        <p:spPr>
+          <a:xfrm>
+            <a:off x="3677717" y="818388"/>
+            <a:ext cx="12802" cy="12802"/>
+          </a:xfrm>
+          <a:prstGeom prst="rect">
+            <a:avLst/>
+          </a:prstGeom>
+          <a:solidFill>
+            <a:srgbClr val="1A2027">
+              <a:alpha val="9000"/>
+            </a:srgbClr>
+          </a:solidFill>
+          <a:ln/>
+        </p:spPr>
+      </p:sp>
+      <p:sp>
+        <p:nvSpPr>
+          <p:cNvPr id="185" name="Shape 183"/>
+          <p:cNvSpPr/>
+          <p:nvPr/>
+        </p:nvSpPr>
+        <p:spPr>
+          <a:xfrm>
+            <a:off x="1161288" y="4876495"/>
+            <a:ext cx="21031" cy="21031"/>
+          </a:xfrm>
+          <a:prstGeom prst="rect">
+            <a:avLst/>
+          </a:prstGeom>
+          <a:solidFill>
+            <a:srgbClr val="1A2027">
+              <a:alpha val="6000"/>
+            </a:srgbClr>
+          </a:solidFill>
+          <a:ln/>
+        </p:spPr>
+      </p:sp>
+      <p:sp>
+        <p:nvSpPr>
+          <p:cNvPr id="186" name="Shape 184"/>
+          <p:cNvSpPr/>
+          <p:nvPr/>
+        </p:nvSpPr>
+        <p:spPr>
+          <a:xfrm>
+            <a:off x="8535010" y="4706417"/>
+            <a:ext cx="14630" cy="14630"/>
+          </a:xfrm>
+          <a:prstGeom prst="rect">
+            <a:avLst/>
+          </a:prstGeom>
+          <a:solidFill>
+            <a:srgbClr val="1A2027">
+              <a:alpha val="5000"/>
+            </a:srgbClr>
+          </a:solidFill>
+          <a:ln/>
+        </p:spPr>
+      </p:sp>
+      <p:sp>
+        <p:nvSpPr>
+          <p:cNvPr id="187" name="Shape 185"/>
+          <p:cNvSpPr/>
+          <p:nvPr/>
+        </p:nvSpPr>
+        <p:spPr>
+          <a:xfrm>
+            <a:off x="2086661" y="1233526"/>
+            <a:ext cx="18288" cy="18288"/>
+          </a:xfrm>
+          <a:prstGeom prst="rect">
+            <a:avLst/>
+          </a:prstGeom>
+          <a:solidFill>
+            <a:srgbClr val="1A2027">
+              <a:alpha val="8000"/>
+            </a:srgbClr>
+          </a:solidFill>
+          <a:ln/>
+        </p:spPr>
+      </p:sp>
+      <p:sp>
+        <p:nvSpPr>
+          <p:cNvPr id="188" name="Shape 186"/>
+          <p:cNvSpPr/>
+          <p:nvPr/>
+        </p:nvSpPr>
+        <p:spPr>
+          <a:xfrm>
+            <a:off x="8937346" y="1680667"/>
+            <a:ext cx="11887" cy="11887"/>
+          </a:xfrm>
+          <a:prstGeom prst="rect">
+            <a:avLst/>
+          </a:prstGeom>
+          <a:solidFill>
+            <a:srgbClr val="1A2027">
+              <a:alpha val="8000"/>
+            </a:srgbClr>
+          </a:solidFill>
+          <a:ln/>
+        </p:spPr>
+      </p:sp>
+      <p:sp>
+        <p:nvSpPr>
+          <p:cNvPr id="189" name="Shape 187"/>
+          <p:cNvSpPr/>
+          <p:nvPr/>
+        </p:nvSpPr>
+        <p:spPr>
+          <a:xfrm>
+            <a:off x="4118458" y="3134563"/>
+            <a:ext cx="16459" cy="16459"/>
+          </a:xfrm>
+          <a:prstGeom prst="rect">
+            <a:avLst/>
+          </a:prstGeom>
+          <a:solidFill>
+            <a:srgbClr val="1A2027">
+              <a:alpha val="11000"/>
+            </a:srgbClr>
+          </a:solidFill>
+          <a:ln/>
+        </p:spPr>
+      </p:sp>
+      <p:sp>
+        <p:nvSpPr>
+          <p:cNvPr id="190" name="Shape 188"/>
+          <p:cNvSpPr/>
+          <p:nvPr/>
+        </p:nvSpPr>
+        <p:spPr>
+          <a:xfrm>
+            <a:off x="4824374" y="2856586"/>
+            <a:ext cx="19202" cy="19202"/>
+          </a:xfrm>
+          <a:prstGeom prst="rect">
+            <a:avLst/>
+          </a:prstGeom>
+          <a:solidFill>
+            <a:srgbClr val="1A2027">
+              <a:alpha val="11000"/>
+            </a:srgbClr>
+          </a:solidFill>
+          <a:ln/>
+        </p:spPr>
+      </p:sp>
+      <p:sp>
+        <p:nvSpPr>
+          <p:cNvPr id="191" name="Shape 189"/>
+          <p:cNvSpPr/>
+          <p:nvPr/>
+        </p:nvSpPr>
+        <p:spPr>
+          <a:xfrm>
+            <a:off x="3755441" y="1332281"/>
+            <a:ext cx="21031" cy="21031"/>
+          </a:xfrm>
+          <a:prstGeom prst="rect">
+            <a:avLst/>
+          </a:prstGeom>
+          <a:solidFill>
+            <a:srgbClr val="1A2027">
+              <a:alpha val="10000"/>
+            </a:srgbClr>
+          </a:solidFill>
+          <a:ln/>
+        </p:spPr>
+      </p:sp>
+      <p:sp>
+        <p:nvSpPr>
+          <p:cNvPr id="192" name="Shape 190"/>
+          <p:cNvSpPr/>
+          <p:nvPr/>
+        </p:nvSpPr>
+        <p:spPr>
+          <a:xfrm>
+            <a:off x="4397350" y="1003097"/>
+            <a:ext cx="19202" cy="19202"/>
+          </a:xfrm>
+          <a:prstGeom prst="rect">
+            <a:avLst/>
+          </a:prstGeom>
+          <a:solidFill>
+            <a:srgbClr val="1A2027">
+              <a:alpha val="6000"/>
+            </a:srgbClr>
+          </a:solidFill>
+          <a:ln/>
+        </p:spPr>
+      </p:sp>
+      <p:sp>
+        <p:nvSpPr>
+          <p:cNvPr id="193" name="Shape 191"/>
+          <p:cNvSpPr/>
+          <p:nvPr/>
+        </p:nvSpPr>
+        <p:spPr>
+          <a:xfrm>
+            <a:off x="4843577" y="4903013"/>
+            <a:ext cx="12802" cy="12802"/>
+          </a:xfrm>
+          <a:prstGeom prst="rect">
+            <a:avLst/>
+          </a:prstGeom>
+          <a:solidFill>
+            <a:srgbClr val="1A2027">
+              <a:alpha val="11000"/>
+            </a:srgbClr>
+          </a:solidFill>
+          <a:ln/>
+        </p:spPr>
+      </p:sp>
+      <p:sp>
+        <p:nvSpPr>
+          <p:cNvPr id="194" name="Shape 192"/>
+          <p:cNvSpPr/>
+          <p:nvPr/>
+        </p:nvSpPr>
+        <p:spPr>
+          <a:xfrm>
+            <a:off x="6511442" y="306324"/>
+            <a:ext cx="10973" cy="10973"/>
+          </a:xfrm>
+          <a:prstGeom prst="rect">
+            <a:avLst/>
+          </a:prstGeom>
+          <a:solidFill>
+            <a:srgbClr val="1A2027">
+              <a:alpha val="12000"/>
+            </a:srgbClr>
+          </a:solidFill>
+          <a:ln/>
+        </p:spPr>
+      </p:sp>
+      <p:sp>
+        <p:nvSpPr>
+          <p:cNvPr id="195" name="Shape 193"/>
+          <p:cNvSpPr/>
+          <p:nvPr/>
+        </p:nvSpPr>
+        <p:spPr>
+          <a:xfrm>
+            <a:off x="8075066" y="427939"/>
+            <a:ext cx="15545" cy="15545"/>
+          </a:xfrm>
+          <a:prstGeom prst="rect">
+            <a:avLst/>
+          </a:prstGeom>
+          <a:solidFill>
+            <a:srgbClr val="1A2027">
+              <a:alpha val="11000"/>
+            </a:srgbClr>
+          </a:solidFill>
+          <a:ln/>
+        </p:spPr>
+      </p:sp>
+      <p:sp>
+        <p:nvSpPr>
+          <p:cNvPr id="196" name="Shape 194"/>
+          <p:cNvSpPr/>
+          <p:nvPr/>
+        </p:nvSpPr>
+        <p:spPr>
+          <a:xfrm>
+            <a:off x="1830629" y="4384548"/>
+            <a:ext cx="21946" cy="21946"/>
+          </a:xfrm>
+          <a:prstGeom prst="rect">
+            <a:avLst/>
+          </a:prstGeom>
+          <a:solidFill>
+            <a:srgbClr val="1A2027">
+              <a:alpha val="12000"/>
+            </a:srgbClr>
+          </a:solidFill>
+          <a:ln/>
+        </p:spPr>
+      </p:sp>
+      <p:sp>
+        <p:nvSpPr>
+          <p:cNvPr id="197" name="Shape 195"/>
+          <p:cNvSpPr/>
+          <p:nvPr/>
+        </p:nvSpPr>
+        <p:spPr>
+          <a:xfrm>
+            <a:off x="1056132" y="1986991"/>
+            <a:ext cx="13716" cy="13716"/>
+          </a:xfrm>
+          <a:prstGeom prst="rect">
+            <a:avLst/>
+          </a:prstGeom>
+          <a:solidFill>
+            <a:srgbClr val="1A2027">
+              <a:alpha val="12000"/>
+            </a:srgbClr>
+          </a:solidFill>
+          <a:ln/>
+        </p:spPr>
+      </p:sp>
+      <p:sp>
+        <p:nvSpPr>
+          <p:cNvPr id="198" name="Shape 196"/>
+          <p:cNvSpPr/>
+          <p:nvPr/>
+        </p:nvSpPr>
+        <p:spPr>
+          <a:xfrm>
+            <a:off x="1847088" y="3363163"/>
+            <a:ext cx="14630" cy="14630"/>
+          </a:xfrm>
+          <a:prstGeom prst="rect">
+            <a:avLst/>
+          </a:prstGeom>
+          <a:solidFill>
+            <a:srgbClr val="1A2027">
+              <a:alpha val="7000"/>
+            </a:srgbClr>
+          </a:solidFill>
+          <a:ln/>
+        </p:spPr>
+      </p:sp>
+      <p:sp>
+        <p:nvSpPr>
+          <p:cNvPr id="199" name="Shape 197"/>
+          <p:cNvSpPr/>
+          <p:nvPr/>
+        </p:nvSpPr>
+        <p:spPr>
+          <a:xfrm>
+            <a:off x="3530498" y="3338474"/>
+            <a:ext cx="16459" cy="16459"/>
+          </a:xfrm>
+          <a:prstGeom prst="rect">
+            <a:avLst/>
+          </a:prstGeom>
+          <a:solidFill>
+            <a:srgbClr val="1A2027">
+              <a:alpha val="8000"/>
+            </a:srgbClr>
+          </a:solidFill>
+          <a:ln/>
+        </p:spPr>
+      </p:sp>
+      <p:sp>
+        <p:nvSpPr>
+          <p:cNvPr id="200" name="Shape 198"/>
+          <p:cNvSpPr/>
+          <p:nvPr/>
+        </p:nvSpPr>
+        <p:spPr>
+          <a:xfrm>
+            <a:off x="4777740" y="759866"/>
+            <a:ext cx="18288" cy="18288"/>
+          </a:xfrm>
+          <a:prstGeom prst="rect">
+            <a:avLst/>
+          </a:prstGeom>
+          <a:solidFill>
+            <a:srgbClr val="1A2027">
+              <a:alpha val="12000"/>
+            </a:srgbClr>
+          </a:solidFill>
+          <a:ln/>
+        </p:spPr>
+      </p:sp>
+      <p:sp>
+        <p:nvSpPr>
+          <p:cNvPr id="201" name="Shape 199"/>
+          <p:cNvSpPr/>
+          <p:nvPr/>
+        </p:nvSpPr>
+        <p:spPr>
+          <a:xfrm>
+            <a:off x="3992270" y="512064"/>
+            <a:ext cx="14630" cy="14630"/>
+          </a:xfrm>
+          <a:prstGeom prst="rect">
+            <a:avLst/>
+          </a:prstGeom>
+          <a:solidFill>
+            <a:srgbClr val="1A2027">
+              <a:alpha val="10000"/>
+            </a:srgbClr>
+          </a:solidFill>
+          <a:ln/>
+        </p:spPr>
+      </p:sp>
+      <p:sp>
+        <p:nvSpPr>
+          <p:cNvPr id="202" name="Shape 200"/>
+          <p:cNvSpPr/>
+          <p:nvPr/>
+        </p:nvSpPr>
+        <p:spPr>
+          <a:xfrm>
+            <a:off x="7525512" y="3742639"/>
+            <a:ext cx="16459" cy="16459"/>
+          </a:xfrm>
+          <a:prstGeom prst="rect">
+            <a:avLst/>
+          </a:prstGeom>
+          <a:solidFill>
+            <a:srgbClr val="1A2027">
+              <a:alpha val="11000"/>
+            </a:srgbClr>
+          </a:solidFill>
+          <a:ln/>
+        </p:spPr>
+      </p:sp>
+      <p:sp>
+        <p:nvSpPr>
+          <p:cNvPr id="203" name="Shape 201"/>
+          <p:cNvSpPr/>
+          <p:nvPr/>
+        </p:nvSpPr>
+        <p:spPr>
+          <a:xfrm>
+            <a:off x="6052414" y="3242462"/>
+            <a:ext cx="18288" cy="18288"/>
+          </a:xfrm>
+          <a:prstGeom prst="rect">
+            <a:avLst/>
+          </a:prstGeom>
+          <a:solidFill>
+            <a:srgbClr val="1A2027">
+              <a:alpha val="5000"/>
+            </a:srgbClr>
+          </a:solidFill>
+          <a:ln/>
+        </p:spPr>
+      </p:sp>
+      <p:sp>
+        <p:nvSpPr>
+          <p:cNvPr id="204" name="Shape 202"/>
+          <p:cNvSpPr/>
+          <p:nvPr/>
+        </p:nvSpPr>
+        <p:spPr>
+          <a:xfrm>
+            <a:off x="10058" y="2228393"/>
+            <a:ext cx="12802" cy="12802"/>
+          </a:xfrm>
+          <a:prstGeom prst="rect">
+            <a:avLst/>
+          </a:prstGeom>
+          <a:solidFill>
+            <a:srgbClr val="1A2027">
+              <a:alpha val="12000"/>
+            </a:srgbClr>
+          </a:solidFill>
+          <a:ln/>
+        </p:spPr>
+      </p:sp>
+      <p:sp>
+        <p:nvSpPr>
+          <p:cNvPr id="205" name="Shape 203"/>
+          <p:cNvSpPr/>
+          <p:nvPr/>
+        </p:nvSpPr>
+        <p:spPr>
+          <a:xfrm>
+            <a:off x="2576779" y="4678985"/>
+            <a:ext cx="17374" cy="17374"/>
+          </a:xfrm>
+          <a:prstGeom prst="rect">
+            <a:avLst/>
+          </a:prstGeom>
+          <a:solidFill>
+            <a:srgbClr val="1A2027">
+              <a:alpha val="11000"/>
+            </a:srgbClr>
+          </a:solidFill>
+          <a:ln/>
+        </p:spPr>
+      </p:sp>
+      <p:sp>
+        <p:nvSpPr>
+          <p:cNvPr id="206" name="Shape 204"/>
+          <p:cNvSpPr/>
+          <p:nvPr/>
+        </p:nvSpPr>
+        <p:spPr>
+          <a:xfrm>
+            <a:off x="5560466" y="3103474"/>
+            <a:ext cx="21946" cy="21946"/>
+          </a:xfrm>
+          <a:prstGeom prst="rect">
+            <a:avLst/>
+          </a:prstGeom>
+          <a:solidFill>
+            <a:srgbClr val="1A2027">
+              <a:alpha val="7000"/>
+            </a:srgbClr>
+          </a:solidFill>
+          <a:ln/>
+        </p:spPr>
+      </p:sp>
+      <p:sp>
+        <p:nvSpPr>
+          <p:cNvPr id="207" name="Shape 205"/>
+          <p:cNvSpPr/>
+          <p:nvPr/>
+        </p:nvSpPr>
+        <p:spPr>
+          <a:xfrm>
+            <a:off x="4996282" y="1104595"/>
+            <a:ext cx="14630" cy="14630"/>
+          </a:xfrm>
+          <a:prstGeom prst="rect">
+            <a:avLst/>
+          </a:prstGeom>
+          <a:solidFill>
+            <a:srgbClr val="1A2027">
+              <a:alpha val="12000"/>
+            </a:srgbClr>
+          </a:solidFill>
+          <a:ln/>
+        </p:spPr>
+      </p:sp>
+      <p:sp>
+        <p:nvSpPr>
+          <p:cNvPr id="208" name="Shape 206"/>
+          <p:cNvSpPr/>
+          <p:nvPr/>
+        </p:nvSpPr>
+        <p:spPr>
+          <a:xfrm>
+            <a:off x="3594506" y="2315261"/>
+            <a:ext cx="11887" cy="11887"/>
+          </a:xfrm>
+          <a:prstGeom prst="rect">
+            <a:avLst/>
+          </a:prstGeom>
+          <a:solidFill>
+            <a:srgbClr val="1A2027">
+              <a:alpha val="12000"/>
+            </a:srgbClr>
+          </a:solidFill>
+          <a:ln/>
+        </p:spPr>
+      </p:sp>
+      <p:sp>
+        <p:nvSpPr>
+          <p:cNvPr id="209" name="Shape 207"/>
+          <p:cNvSpPr/>
+          <p:nvPr/>
+        </p:nvSpPr>
+        <p:spPr>
+          <a:xfrm>
+            <a:off x="386791" y="512064"/>
+            <a:ext cx="14630" cy="14630"/>
+          </a:xfrm>
+          <a:prstGeom prst="rect">
+            <a:avLst/>
+          </a:prstGeom>
+          <a:solidFill>
+            <a:srgbClr val="1A2027">
+              <a:alpha val="8000"/>
+            </a:srgbClr>
+          </a:solidFill>
+          <a:ln/>
+        </p:spPr>
+      </p:sp>
+      <p:sp>
+        <p:nvSpPr>
+          <p:cNvPr id="210" name="Shape 208"/>
+          <p:cNvSpPr/>
+          <p:nvPr/>
+        </p:nvSpPr>
+        <p:spPr>
+          <a:xfrm>
+            <a:off x="7544714" y="1891894"/>
+            <a:ext cx="19202" cy="19202"/>
+          </a:xfrm>
+          <a:prstGeom prst="rect">
+            <a:avLst/>
+          </a:prstGeom>
+          <a:solidFill>
+            <a:srgbClr val="1A2027">
+              <a:alpha val="7000"/>
+            </a:srgbClr>
+          </a:solidFill>
+          <a:ln/>
+        </p:spPr>
+      </p:sp>
+      <p:sp>
+        <p:nvSpPr>
+          <p:cNvPr id="211" name="Shape 209"/>
+          <p:cNvSpPr/>
+          <p:nvPr/>
+        </p:nvSpPr>
+        <p:spPr>
+          <a:xfrm>
+            <a:off x="106070" y="4727448"/>
+            <a:ext cx="13716" cy="13716"/>
+          </a:xfrm>
+          <a:prstGeom prst="rect">
+            <a:avLst/>
+          </a:prstGeom>
+          <a:solidFill>
+            <a:srgbClr val="1A2027">
+              <a:alpha val="12000"/>
+            </a:srgbClr>
+          </a:solidFill>
+          <a:ln/>
+        </p:spPr>
+      </p:sp>
+      <p:sp>
+        <p:nvSpPr>
+          <p:cNvPr id="212" name="Shape 210"/>
+          <p:cNvSpPr/>
+          <p:nvPr/>
+        </p:nvSpPr>
+        <p:spPr>
+          <a:xfrm>
+            <a:off x="6870802" y="506578"/>
+            <a:ext cx="17374" cy="17374"/>
+          </a:xfrm>
+          <a:prstGeom prst="rect">
+            <a:avLst/>
+          </a:prstGeom>
+          <a:solidFill>
+            <a:srgbClr val="1A2027">
+              <a:alpha val="9000"/>
+            </a:srgbClr>
+          </a:solidFill>
+          <a:ln/>
+        </p:spPr>
+      </p:sp>
+      <p:sp>
+        <p:nvSpPr>
+          <p:cNvPr id="213" name="Shape 211"/>
+          <p:cNvSpPr/>
+          <p:nvPr/>
+        </p:nvSpPr>
+        <p:spPr>
+          <a:xfrm>
+            <a:off x="7118604" y="783641"/>
+            <a:ext cx="16459" cy="16459"/>
+          </a:xfrm>
+          <a:prstGeom prst="rect">
+            <a:avLst/>
+          </a:prstGeom>
+          <a:solidFill>
+            <a:srgbClr val="1A2027">
+              <a:alpha val="11000"/>
+            </a:srgbClr>
+          </a:solidFill>
+          <a:ln/>
+        </p:spPr>
+      </p:sp>
+      <p:sp>
+        <p:nvSpPr>
+          <p:cNvPr id="214" name="Shape 212"/>
+          <p:cNvSpPr/>
+          <p:nvPr/>
+        </p:nvSpPr>
+        <p:spPr>
+          <a:xfrm>
+            <a:off x="629107" y="3489350"/>
+            <a:ext cx="19202" cy="19202"/>
+          </a:xfrm>
+          <a:prstGeom prst="rect">
+            <a:avLst/>
+          </a:prstGeom>
+          <a:solidFill>
+            <a:srgbClr val="1A2027">
+              <a:alpha val="9000"/>
+            </a:srgbClr>
+          </a:solidFill>
+          <a:ln/>
+        </p:spPr>
+      </p:sp>
+      <p:sp>
+        <p:nvSpPr>
+          <p:cNvPr id="215" name="Shape 213"/>
+          <p:cNvSpPr/>
+          <p:nvPr/>
+        </p:nvSpPr>
+        <p:spPr>
+          <a:xfrm>
+            <a:off x="2077517" y="2304288"/>
+            <a:ext cx="15545" cy="15545"/>
+          </a:xfrm>
+          <a:prstGeom prst="rect">
+            <a:avLst/>
+          </a:prstGeom>
+          <a:solidFill>
+            <a:srgbClr val="1A2027">
+              <a:alpha val="9000"/>
+            </a:srgbClr>
+          </a:solidFill>
+          <a:ln/>
+        </p:spPr>
+      </p:sp>
+      <p:sp>
+        <p:nvSpPr>
+          <p:cNvPr id="216" name="Shape 214"/>
+          <p:cNvSpPr/>
+          <p:nvPr/>
+        </p:nvSpPr>
+        <p:spPr>
+          <a:xfrm>
+            <a:off x="4314139" y="1288390"/>
+            <a:ext cx="12802" cy="12802"/>
+          </a:xfrm>
+          <a:prstGeom prst="rect">
+            <a:avLst/>
+          </a:prstGeom>
+          <a:solidFill>
+            <a:srgbClr val="1A2027">
+              <a:alpha val="10000"/>
+            </a:srgbClr>
+          </a:solidFill>
+          <a:ln/>
+        </p:spPr>
+      </p:sp>
+      <p:sp>
+        <p:nvSpPr>
+          <p:cNvPr id="217" name="Shape 215"/>
+          <p:cNvSpPr/>
+          <p:nvPr/>
+        </p:nvSpPr>
+        <p:spPr>
+          <a:xfrm>
+            <a:off x="2768803" y="3278124"/>
+            <a:ext cx="15545" cy="15545"/>
+          </a:xfrm>
+          <a:prstGeom prst="rect">
+            <a:avLst/>
+          </a:prstGeom>
+          <a:solidFill>
+            <a:srgbClr val="1A2027">
+              <a:alpha val="8000"/>
+            </a:srgbClr>
+          </a:solidFill>
+          <a:ln/>
+        </p:spPr>
+      </p:sp>
+      <p:sp>
+        <p:nvSpPr>
+          <p:cNvPr id="218" name="Shape 216"/>
+          <p:cNvSpPr/>
+          <p:nvPr/>
+        </p:nvSpPr>
+        <p:spPr>
+          <a:xfrm>
+            <a:off x="2678278" y="3055925"/>
+            <a:ext cx="14630" cy="14630"/>
+          </a:xfrm>
+          <a:prstGeom prst="rect">
+            <a:avLst/>
+          </a:prstGeom>
+          <a:solidFill>
+            <a:srgbClr val="1A2027">
+              <a:alpha val="11000"/>
+            </a:srgbClr>
+          </a:solidFill>
+          <a:ln/>
+        </p:spPr>
+      </p:sp>
+      <p:sp>
+        <p:nvSpPr>
+          <p:cNvPr id="219" name="Shape 217"/>
+          <p:cNvSpPr/>
+          <p:nvPr/>
+        </p:nvSpPr>
+        <p:spPr>
+          <a:xfrm>
+            <a:off x="5839358" y="2243938"/>
+            <a:ext cx="21031" cy="21031"/>
+          </a:xfrm>
+          <a:prstGeom prst="rect">
+            <a:avLst/>
+          </a:prstGeom>
+          <a:solidFill>
+            <a:srgbClr val="1A2027">
+              <a:alpha val="9000"/>
+            </a:srgbClr>
+          </a:solidFill>
+          <a:ln/>
+        </p:spPr>
+      </p:sp>
+      <p:sp>
+        <p:nvSpPr>
+          <p:cNvPr id="220" name="Shape 218"/>
+          <p:cNvSpPr/>
+          <p:nvPr/>
+        </p:nvSpPr>
+        <p:spPr>
+          <a:xfrm>
+            <a:off x="3204058" y="3001061"/>
+            <a:ext cx="13716" cy="13716"/>
+          </a:xfrm>
+          <a:prstGeom prst="rect">
+            <a:avLst/>
+          </a:prstGeom>
+          <a:solidFill>
+            <a:srgbClr val="1A2027">
+              <a:alpha val="5000"/>
+            </a:srgbClr>
+          </a:solidFill>
+          <a:ln/>
+        </p:spPr>
+      </p:sp>
+      <p:sp>
+        <p:nvSpPr>
+          <p:cNvPr id="221" name="Shape 219"/>
+          <p:cNvSpPr/>
+          <p:nvPr/>
+        </p:nvSpPr>
+        <p:spPr>
+          <a:xfrm>
+            <a:off x="1887322" y="28346"/>
+            <a:ext cx="13716" cy="13716"/>
+          </a:xfrm>
+          <a:prstGeom prst="rect">
+            <a:avLst/>
+          </a:prstGeom>
+          <a:solidFill>
+            <a:srgbClr val="1A2027">
+              <a:alpha val="6000"/>
+            </a:srgbClr>
+          </a:solidFill>
+          <a:ln/>
+        </p:spPr>
+      </p:sp>
+    </p:spTree>
+  </p:cSld>
+  <p:clrMapOvr>
+    <a:masterClrMapping/>
+  </p:clrMapOvr>
+</p:sldLayout>
+</file>
+
 <file path=ppt/slideMasters/slideMaster1.xml><?xml version="1.0" encoding="utf-8"?>
 <p:sldMaster xmlns:a="http://schemas.openxmlformats.org/drawingml/2006/main" xmlns:r="http://schemas.openxmlformats.org/officeDocument/2006/relationships" xmlns:p="http://schemas.openxmlformats.org/presentationml/2006/main">
   <p:cSld>
@@ -1753,6 +6625,7 @@
   <p:clrMap bg1="lt1" tx1="dk1" bg2="lt2" tx2="dk2" accent1="accent1" accent2="accent2" accent3="accent3" accent4="accent4" accent5="accent5" accent6="accent6" hlink="hlink" folHlink="folHlink"/>
   <p:sldLayoutIdLst>
     <p:sldLayoutId id="2147483649" r:id="rId1"/>
+    <p:sldLayoutId id="2147483650" r:id="rId2"/>
   </p:sldLayoutIdLst>
   <p:hf sldNum="0" hdr="0" ftr="0" dt="0"/>
   <p:txStyles>
@@ -2011,13 +6884,6 @@
 <file path=ppt/slides/slide1.xml><?xml version="1.0" encoding="utf-8"?>
 <p:sld xmlns:a="http://schemas.openxmlformats.org/drawingml/2006/main" xmlns:r="http://schemas.openxmlformats.org/officeDocument/2006/relationships" xmlns:p="http://schemas.openxmlformats.org/presentationml/2006/main">
   <p:cSld name="Slide 1">
-    <p:bg>
-      <p:bgPr>
-        <a:solidFill>
-          <a:srgbClr val="FAF7F0"/>
-        </a:solidFill>
-      </p:bgPr>
-    </p:bg>
     <p:spTree>
       <p:nvGrpSpPr>
         <p:cNvPr id="1" name=""/>
@@ -2059,7 +6925,7 @@
             <a:r>
               <a:rPr lang="en-US" sz="1000" b="1" spc="800" kern="0" dirty="0">
                 <a:solidFill>
-                  <a:srgbClr val="2F5D50"/>
+                  <a:srgbClr val="1F5C4A"/>
                 </a:solidFill>
                 <a:latin typeface="Noto Sans KR" pitchFamily="34" charset="0"/>
                 <a:ea typeface="Noto Sans KR" pitchFamily="34" charset="-122"/>
@@ -2137,7 +7003,7 @@
             <a:r>
               <a:rPr lang="en-US" sz="2200" dirty="0">
                 <a:solidFill>
-                  <a:srgbClr val="2F5D50"/>
+                  <a:srgbClr val="1F5C4A"/>
                 </a:solidFill>
                 <a:latin typeface="Noto Serif KR" pitchFamily="34" charset="0"/>
                 <a:ea typeface="Noto Serif KR" pitchFamily="34" charset="-122"/>
@@ -2232,7 +7098,7 @@
             <a:r>
               <a:rPr lang="en-US" sz="1200" dirty="0">
                 <a:solidFill>
-                  <a:srgbClr val="8A929B"/>
+                  <a:srgbClr val="6B6256"/>
                 </a:solidFill>
                 <a:latin typeface="Noto Sans KR" pitchFamily="34" charset="0"/>
                 <a:ea typeface="Noto Sans KR" pitchFamily="34" charset="-122"/>
@@ -2255,13 +7121,6 @@
 <file path=ppt/slides/slide10.xml><?xml version="1.0" encoding="utf-8"?>
 <p:sld xmlns:a="http://schemas.openxmlformats.org/drawingml/2006/main" xmlns:r="http://schemas.openxmlformats.org/officeDocument/2006/relationships" xmlns:p="http://schemas.openxmlformats.org/presentationml/2006/main">
   <p:cSld name="Slide 10">
-    <p:bg>
-      <p:bgPr>
-        <a:solidFill>
-          <a:srgbClr val="FAF7F0"/>
-        </a:solidFill>
-      </p:bgPr>
-    </p:bg>
     <p:spTree>
       <p:nvGrpSpPr>
         <p:cNvPr id="1" name=""/>
@@ -2303,7 +7162,7 @@
             <a:r>
               <a:rPr lang="en-US" sz="1100" b="1" spc="600" kern="0" dirty="0">
                 <a:solidFill>
-                  <a:srgbClr val="2F5D50"/>
+                  <a:srgbClr val="1F5C4A"/>
                 </a:solidFill>
                 <a:latin typeface="Noto Sans KR" pitchFamily="34" charset="0"/>
                 <a:ea typeface="Noto Sans KR" pitchFamily="34" charset="-122"/>
@@ -2406,7 +7265,7 @@
             <a:r>
               <a:rPr lang="en-US" sz="1000" i="1" dirty="0">
                 <a:solidFill>
-                  <a:srgbClr val="8A929B"/>
+                  <a:srgbClr val="6B6256"/>
                 </a:solidFill>
                 <a:latin typeface="Noto Serif KR" pitchFamily="34" charset="0"/>
                 <a:ea typeface="Noto Serif KR" pitchFamily="34" charset="-122"/>
@@ -2445,7 +7304,7 @@
             <a:r>
               <a:rPr lang="en-US" sz="1000" dirty="0">
                 <a:solidFill>
-                  <a:srgbClr val="8A929B"/>
+                  <a:srgbClr val="6B6256"/>
                 </a:solidFill>
                 <a:latin typeface="Noto Sans KR" pitchFamily="34" charset="0"/>
                 <a:ea typeface="Noto Sans KR" pitchFamily="34" charset="-122"/>
@@ -2472,13 +7331,13 @@
             <a:avLst/>
           </a:prstGeom>
           <a:solidFill>
-            <a:srgbClr val="2F5D50">
+            <a:srgbClr val="1F5C4A">
               <a:alpha val="12000"/>
             </a:srgbClr>
           </a:solidFill>
           <a:ln w="6350">
             <a:solidFill>
-              <a:srgbClr val="2F5D50">
+              <a:srgbClr val="1F5C4A">
                 <a:alpha val="40000"/>
               </a:srgbClr>
             </a:solidFill>
@@ -2513,7 +7372,7 @@
             <a:r>
               <a:rPr lang="en-US" sz="1200" b="1" spc="800" kern="0" dirty="0">
                 <a:solidFill>
-                  <a:srgbClr val="2F5D50"/>
+                  <a:srgbClr val="1F5C4A"/>
                 </a:solidFill>
                 <a:latin typeface="Noto Sans KR" pitchFamily="34" charset="0"/>
                 <a:ea typeface="Noto Sans KR" pitchFamily="34" charset="-122"/>
@@ -2630,7 +7489,7 @@
             <a:r>
               <a:rPr lang="en-US" sz="1000" i="1" dirty="0">
                 <a:solidFill>
-                  <a:srgbClr val="8A929B"/>
+                  <a:srgbClr val="6B6256"/>
                 </a:solidFill>
                 <a:latin typeface="Noto Sans KR" pitchFamily="34" charset="0"/>
                 <a:ea typeface="Noto Sans KR" pitchFamily="34" charset="-122"/>
@@ -2657,13 +7516,13 @@
             <a:avLst/>
           </a:prstGeom>
           <a:solidFill>
-            <a:srgbClr val="2F5D50">
+            <a:srgbClr val="1F5C4A">
               <a:alpha val="20000"/>
             </a:srgbClr>
           </a:solidFill>
           <a:ln w="6350">
             <a:solidFill>
-              <a:srgbClr val="2F5D50">
+              <a:srgbClr val="1F5C4A">
                 <a:alpha val="40000"/>
               </a:srgbClr>
             </a:solidFill>
@@ -2698,7 +7557,7 @@
             <a:r>
               <a:rPr lang="en-US" sz="1200" b="1" spc="800" kern="0" dirty="0">
                 <a:solidFill>
-                  <a:srgbClr val="2F5D50"/>
+                  <a:srgbClr val="1F5C4A"/>
                 </a:solidFill>
                 <a:latin typeface="Noto Sans KR" pitchFamily="34" charset="0"/>
                 <a:ea typeface="Noto Sans KR" pitchFamily="34" charset="-122"/>
@@ -2815,7 +7674,7 @@
             <a:r>
               <a:rPr lang="en-US" sz="1000" i="1" dirty="0">
                 <a:solidFill>
-                  <a:srgbClr val="8A929B"/>
+                  <a:srgbClr val="6B6256"/>
                 </a:solidFill>
                 <a:latin typeface="Noto Sans KR" pitchFamily="34" charset="0"/>
                 <a:ea typeface="Noto Sans KR" pitchFamily="34" charset="-122"/>
@@ -2842,13 +7701,13 @@
             <a:avLst/>
           </a:prstGeom>
           <a:solidFill>
-            <a:srgbClr val="2F5D50">
+            <a:srgbClr val="1F5C4A">
               <a:alpha val="30000"/>
             </a:srgbClr>
           </a:solidFill>
           <a:ln w="6350">
             <a:solidFill>
-              <a:srgbClr val="2F5D50">
+              <a:srgbClr val="1F5C4A">
                 <a:alpha val="40000"/>
               </a:srgbClr>
             </a:solidFill>
@@ -2883,7 +7742,7 @@
             <a:r>
               <a:rPr lang="en-US" sz="1200" b="1" spc="800" kern="0" dirty="0">
                 <a:solidFill>
-                  <a:srgbClr val="2F5D50"/>
+                  <a:srgbClr val="1F5C4A"/>
                 </a:solidFill>
                 <a:latin typeface="Noto Sans KR" pitchFamily="34" charset="0"/>
                 <a:ea typeface="Noto Sans KR" pitchFamily="34" charset="-122"/>
@@ -3000,7 +7859,7 @@
             <a:r>
               <a:rPr lang="en-US" sz="1000" i="1" dirty="0">
                 <a:solidFill>
-                  <a:srgbClr val="8A929B"/>
+                  <a:srgbClr val="6B6256"/>
                 </a:solidFill>
                 <a:latin typeface="Noto Sans KR" pitchFamily="34" charset="0"/>
                 <a:ea typeface="Noto Sans KR" pitchFamily="34" charset="-122"/>
@@ -3027,11 +7886,11 @@
             <a:avLst/>
           </a:prstGeom>
           <a:solidFill>
-            <a:srgbClr val="FAF7F0"/>
+            <a:srgbClr val="FAF6EE"/>
           </a:solidFill>
           <a:ln w="19050">
             <a:solidFill>
-              <a:srgbClr val="2F5D50"/>
+              <a:srgbClr val="1F5C4A"/>
             </a:solidFill>
             <a:prstDash val="solid"/>
           </a:ln>
@@ -3084,7 +7943,7 @@
             <a:r>
               <a:rPr lang="en-US" sz="3200" b="1" dirty="0">
                 <a:solidFill>
-                  <a:srgbClr val="2F5D50"/>
+                  <a:srgbClr val="1F5C4A"/>
                 </a:solidFill>
                 <a:latin typeface="Noto Serif KR" pitchFamily="34" charset="0"/>
                 <a:ea typeface="Noto Serif KR" pitchFamily="34" charset="-122"/>
@@ -3104,7 +7963,7 @@
             <a:r>
               <a:rPr lang="en-US" sz="1100" i="1" dirty="0">
                 <a:solidFill>
-                  <a:srgbClr val="8A929B"/>
+                  <a:srgbClr val="6B6256"/>
                 </a:solidFill>
                 <a:latin typeface="Noto Sans KR" pitchFamily="34" charset="0"/>
                 <a:ea typeface="Noto Sans KR" pitchFamily="34" charset="-122"/>
@@ -3127,13 +7986,6 @@
 <file path=ppt/slides/slide11.xml><?xml version="1.0" encoding="utf-8"?>
 <p:sld xmlns:a="http://schemas.openxmlformats.org/drawingml/2006/main" xmlns:r="http://schemas.openxmlformats.org/officeDocument/2006/relationships" xmlns:p="http://schemas.openxmlformats.org/presentationml/2006/main">
   <p:cSld name="Slide 11">
-    <p:bg>
-      <p:bgPr>
-        <a:solidFill>
-          <a:srgbClr val="FAF7F0"/>
-        </a:solidFill>
-      </p:bgPr>
-    </p:bg>
     <p:spTree>
       <p:nvGrpSpPr>
         <p:cNvPr id="1" name=""/>
@@ -3175,7 +8027,7 @@
             <a:r>
               <a:rPr lang="en-US" sz="1100" b="1" spc="600" kern="0" dirty="0">
                 <a:solidFill>
-                  <a:srgbClr val="2F5D50"/>
+                  <a:srgbClr val="1F5C4A"/>
                 </a:solidFill>
                 <a:latin typeface="Noto Sans KR" pitchFamily="34" charset="0"/>
                 <a:ea typeface="Noto Sans KR" pitchFamily="34" charset="-122"/>
@@ -3278,7 +8130,7 @@
             <a:r>
               <a:rPr lang="en-US" sz="1000" i="1" dirty="0">
                 <a:solidFill>
-                  <a:srgbClr val="8A929B"/>
+                  <a:srgbClr val="6B6256"/>
                 </a:solidFill>
                 <a:latin typeface="Noto Serif KR" pitchFamily="34" charset="0"/>
                 <a:ea typeface="Noto Serif KR" pitchFamily="34" charset="-122"/>
@@ -3317,7 +8169,7 @@
             <a:r>
               <a:rPr lang="en-US" sz="1000" dirty="0">
                 <a:solidFill>
-                  <a:srgbClr val="8A929B"/>
+                  <a:srgbClr val="6B6256"/>
                 </a:solidFill>
                 <a:latin typeface="Noto Sans KR" pitchFamily="34" charset="0"/>
                 <a:ea typeface="Noto Sans KR" pitchFamily="34" charset="-122"/>
@@ -3344,7 +8196,7 @@
             <a:avLst/>
           </a:prstGeom>
           <a:solidFill>
-            <a:srgbClr val="FAF7F0"/>
+            <a:srgbClr val="FAF6EE"/>
           </a:solidFill>
           <a:ln w="6350">
             <a:solidFill>
@@ -3383,7 +8235,7 @@
             <a:r>
               <a:rPr lang="en-US" sz="1400" b="1" spc="600" kern="0" dirty="0">
                 <a:solidFill>
-                  <a:srgbClr val="8A929B"/>
+                  <a:srgbClr val="6B6256"/>
                 </a:solidFill>
                 <a:latin typeface="Noto Sans KR" pitchFamily="34" charset="0"/>
                 <a:ea typeface="Noto Sans KR" pitchFamily="34" charset="-122"/>
@@ -3596,13 +8448,13 @@
             <a:avLst/>
           </a:prstGeom>
           <a:solidFill>
-            <a:srgbClr val="2F5D50">
+            <a:srgbClr val="1F5C4A">
               <a:alpha val="8000"/>
             </a:srgbClr>
           </a:solidFill>
           <a:ln w="19050">
             <a:solidFill>
-              <a:srgbClr val="2F5D50"/>
+              <a:srgbClr val="1F5C4A"/>
             </a:solidFill>
             <a:prstDash val="solid"/>
           </a:ln>
@@ -3635,7 +8487,7 @@
             <a:r>
               <a:rPr lang="en-US" sz="1400" b="1" spc="600" kern="0" dirty="0">
                 <a:solidFill>
-                  <a:srgbClr val="2F5D50"/>
+                  <a:srgbClr val="1F5C4A"/>
                 </a:solidFill>
                 <a:latin typeface="Noto Sans KR" pitchFamily="34" charset="0"/>
                 <a:ea typeface="Noto Sans KR" pitchFamily="34" charset="-122"/>
@@ -3674,7 +8526,7 @@
             <a:r>
               <a:rPr lang="en-US" sz="3200" b="1" dirty="0">
                 <a:solidFill>
-                  <a:srgbClr val="2F5D50"/>
+                  <a:srgbClr val="1F5C4A"/>
                 </a:solidFill>
                 <a:latin typeface="Noto Serif KR" pitchFamily="34" charset="0"/>
                 <a:ea typeface="Noto Serif KR" pitchFamily="34" charset="-122"/>
@@ -3713,7 +8565,7 @@
             <a:r>
               <a:rPr lang="en-US" sz="1000" i="1" dirty="0">
                 <a:solidFill>
-                  <a:srgbClr val="8A929B"/>
+                  <a:srgbClr val="6B6256"/>
                 </a:solidFill>
                 <a:latin typeface="Noto Sans KR" pitchFamily="34" charset="0"/>
                 <a:ea typeface="Noto Sans KR" pitchFamily="34" charset="-122"/>
@@ -3742,7 +8594,7 @@
           <a:noFill/>
           <a:ln w="6350">
             <a:solidFill>
-              <a:srgbClr val="2F5D50">
+              <a:srgbClr val="1F5C4A">
                 <a:alpha val="40000"/>
               </a:srgbClr>
             </a:solidFill>
@@ -3899,7 +8751,7 @@
             <a:r>
               <a:rPr lang="en-US" sz="1400" b="1" i="1" dirty="0">
                 <a:solidFill>
-                  <a:srgbClr val="2F5D50"/>
+                  <a:srgbClr val="1F5C4A"/>
                 </a:solidFill>
                 <a:latin typeface="Noto Serif KR" pitchFamily="34" charset="0"/>
                 <a:ea typeface="Noto Serif KR" pitchFamily="34" charset="-122"/>
@@ -3922,13 +8774,6 @@
 <file path=ppt/slides/slide12.xml><?xml version="1.0" encoding="utf-8"?>
 <p:sld xmlns:a="http://schemas.openxmlformats.org/drawingml/2006/main" xmlns:r="http://schemas.openxmlformats.org/officeDocument/2006/relationships" xmlns:p="http://schemas.openxmlformats.org/presentationml/2006/main">
   <p:cSld name="Slide 12">
-    <p:bg>
-      <p:bgPr>
-        <a:solidFill>
-          <a:srgbClr val="FAF7F0"/>
-        </a:solidFill>
-      </p:bgPr>
-    </p:bg>
     <p:spTree>
       <p:nvGrpSpPr>
         <p:cNvPr id="1" name=""/>
@@ -3970,7 +8815,7 @@
             <a:r>
               <a:rPr lang="en-US" sz="1100" b="1" spc="600" kern="0" dirty="0">
                 <a:solidFill>
-                  <a:srgbClr val="2F5D50"/>
+                  <a:srgbClr val="1F5C4A"/>
                 </a:solidFill>
                 <a:latin typeface="Noto Sans KR" pitchFamily="34" charset="0"/>
                 <a:ea typeface="Noto Sans KR" pitchFamily="34" charset="-122"/>
@@ -4073,7 +8918,7 @@
             <a:r>
               <a:rPr lang="en-US" sz="1000" i="1" dirty="0">
                 <a:solidFill>
-                  <a:srgbClr val="8A929B"/>
+                  <a:srgbClr val="6B6256"/>
                 </a:solidFill>
                 <a:latin typeface="Noto Serif KR" pitchFamily="34" charset="0"/>
                 <a:ea typeface="Noto Serif KR" pitchFamily="34" charset="-122"/>
@@ -4112,7 +8957,7 @@
             <a:r>
               <a:rPr lang="en-US" sz="1000" dirty="0">
                 <a:solidFill>
-                  <a:srgbClr val="8A929B"/>
+                  <a:srgbClr val="6B6256"/>
                 </a:solidFill>
                 <a:latin typeface="Noto Sans KR" pitchFamily="34" charset="0"/>
                 <a:ea typeface="Noto Sans KR" pitchFamily="34" charset="-122"/>
@@ -4151,7 +8996,7 @@
             <a:r>
               <a:rPr lang="en-US" sz="1100" b="1" spc="600" kern="0" dirty="0">
                 <a:solidFill>
-                  <a:srgbClr val="2F5D50"/>
+                  <a:srgbClr val="1F5C4A"/>
                 </a:solidFill>
                 <a:latin typeface="Noto Sans KR" pitchFamily="34" charset="0"/>
                 <a:ea typeface="Noto Sans KR" pitchFamily="34" charset="-122"/>
@@ -4172,19 +9017,17 @@
         <p:spPr>
           <a:xfrm>
             <a:off x="457200" y="1691640"/>
-            <a:ext cx="3931920" cy="1097280"/>
-          </a:xfrm>
-          <a:prstGeom prst="rect">
-            <a:avLst/>
-          </a:prstGeom>
-          <a:solidFill>
-            <a:srgbClr val="FAF7F0"/>
+            <a:ext cx="3931920" cy="1417320"/>
+          </a:xfrm>
+          <a:prstGeom prst="rect">
+            <a:avLst/>
+          </a:prstGeom>
+          <a:solidFill>
+            <a:srgbClr val="FFFAF1"/>
           </a:solidFill>
           <a:ln w="6350">
             <a:solidFill>
-              <a:srgbClr val="1A2027">
-                <a:alpha val="20000"/>
-              </a:srgbClr>
+              <a:srgbClr val="C8BFA8"/>
             </a:solidFill>
             <a:prstDash val="solid"/>
           </a:ln>
@@ -4199,7 +9042,7 @@
         <p:spPr>
           <a:xfrm>
             <a:off x="685800" y="1783080"/>
-            <a:ext cx="3474720" cy="914400"/>
+            <a:ext cx="3474720" cy="1280160"/>
           </a:xfrm>
           <a:prstGeom prst="rect">
             <a:avLst/>
@@ -4220,7 +9063,7 @@
             <a:r>
               <a:rPr lang="en-US" sz="1100" b="1" spc="400" kern="0" dirty="0">
                 <a:solidFill>
-                  <a:srgbClr val="8A929B"/>
+                  <a:srgbClr val="6B6256"/>
                 </a:solidFill>
                 <a:latin typeface="Noto Sans KR" pitchFamily="34" charset="0"/>
                 <a:ea typeface="Noto Sans KR" pitchFamily="34" charset="-122"/>
@@ -4243,7 +9086,7 @@
                 <a:ea typeface="Noto Sans KR" pitchFamily="34" charset="-122"/>
                 <a:cs typeface="Noto Sans KR" pitchFamily="34" charset="-120"/>
               </a:rPr>
-              <a:t>임용 유튜버 합작</a:t>
+              <a:t>유튜버 합작 + 교대 커뮤니티 바이럴</a:t>
             </a:r>
             <a:endParaRPr lang="en-US" sz="1100" dirty="0"/>
           </a:p>
@@ -4304,6 +9147,60 @@
             </a:r>
             <a:endParaRPr lang="en-US" sz="1100" dirty="0"/>
           </a:p>
+          <a:p>
+            <a:pPr indent="0" marL="0">
+              <a:spcAft>
+                <a:spcPts val="200"/>
+              </a:spcAft>
+              <a:buNone/>
+            </a:pPr>
+            <a:r>
+              <a:rPr lang="en-US" sz="1200" dirty="0">
+                <a:solidFill>
+                  <a:srgbClr val="434B55"/>
+                </a:solidFill>
+                <a:latin typeface="Noto Sans KR" pitchFamily="34" charset="0"/>
+                <a:ea typeface="Noto Sans KR" pitchFamily="34" charset="-122"/>
+                <a:cs typeface="Noto Sans KR" pitchFamily="34" charset="-120"/>
+              </a:rPr>
+              <a:t>교대 </a:t>
+            </a:r>
+            <a:pPr indent="0" marL="0">
+              <a:spcAft>
+                <a:spcPts val="200"/>
+              </a:spcAft>
+              <a:buNone/>
+            </a:pPr>
+            <a:r>
+              <a:rPr lang="en-US" sz="1200" b="1" dirty="0">
+                <a:solidFill>
+                  <a:srgbClr val="1A2027"/>
+                </a:solidFill>
+                <a:latin typeface="Noto Sans KR" pitchFamily="34" charset="0"/>
+                <a:ea typeface="Noto Sans KR" pitchFamily="34" charset="-122"/>
+                <a:cs typeface="Noto Sans KR" pitchFamily="34" charset="-120"/>
+              </a:rPr>
+              <a:t>에브리타임·초임공</a:t>
+            </a:r>
+            <a:pPr indent="0" marL="0">
+              <a:spcAft>
+                <a:spcPts val="200"/>
+              </a:spcAft>
+              <a:buNone/>
+            </a:pPr>
+            <a:r>
+              <a:rPr lang="en-US" sz="1200" dirty="0">
+                <a:solidFill>
+                  <a:srgbClr val="434B55"/>
+                </a:solidFill>
+                <a:latin typeface="Noto Sans KR" pitchFamily="34" charset="0"/>
+                <a:ea typeface="Noto Sans KR" pitchFamily="34" charset="-122"/>
+                <a:cs typeface="Noto Sans KR" pitchFamily="34" charset="-120"/>
+              </a:rPr>
+              <a:t> 시드 후기 + 무료 체험</a:t>
+            </a:r>
+            <a:endParaRPr lang="en-US" sz="1100" dirty="0"/>
+          </a:p>
         </p:txBody>
       </p:sp>
       <p:sp>
@@ -4314,20 +9211,18 @@
         </p:nvSpPr>
         <p:spPr>
           <a:xfrm>
-            <a:off x="457200" y="2880360"/>
+            <a:off x="457200" y="3200400"/>
             <a:ext cx="3931920" cy="1097280"/>
           </a:xfrm>
           <a:prstGeom prst="rect">
             <a:avLst/>
           </a:prstGeom>
           <a:solidFill>
-            <a:srgbClr val="FAF7F0"/>
+            <a:srgbClr val="FFFAF1"/>
           </a:solidFill>
           <a:ln w="6350">
             <a:solidFill>
-              <a:srgbClr val="1A2027">
-                <a:alpha val="20000"/>
-              </a:srgbClr>
+              <a:srgbClr val="C8BFA8"/>
             </a:solidFill>
             <a:prstDash val="solid"/>
           </a:ln>
@@ -4341,7 +9236,7 @@
         </p:nvSpPr>
         <p:spPr>
           <a:xfrm>
-            <a:off x="685800" y="2971800"/>
+            <a:off x="685800" y="3291840"/>
             <a:ext cx="3474720" cy="914400"/>
           </a:xfrm>
           <a:prstGeom prst="rect">
@@ -4363,7 +9258,7 @@
             <a:r>
               <a:rPr lang="en-US" sz="1100" b="1" spc="400" kern="0" dirty="0">
                 <a:solidFill>
-                  <a:srgbClr val="8A929B"/>
+                  <a:srgbClr val="6B6256"/>
                 </a:solidFill>
                 <a:latin typeface="Noto Sans KR" pitchFamily="34" charset="0"/>
                 <a:ea typeface="Noto Sans KR" pitchFamily="34" charset="-122"/>
@@ -4476,7 +9371,7 @@
             <a:r>
               <a:rPr lang="en-US" sz="1100" b="1" spc="600" kern="0" dirty="0">
                 <a:solidFill>
-                  <a:srgbClr val="2F5D50"/>
+                  <a:srgbClr val="1F5C4A"/>
                 </a:solidFill>
                 <a:latin typeface="Noto Sans KR" pitchFamily="34" charset="0"/>
                 <a:ea typeface="Noto Sans KR" pitchFamily="34" charset="-122"/>
@@ -4505,7 +9400,7 @@
           <a:noFill/>
           <a:ln w="19050">
             <a:solidFill>
-              <a:srgbClr val="2F5D50"/>
+              <a:srgbClr val="1F5C4A"/>
             </a:solidFill>
             <a:prstDash val="solid"/>
           </a:ln>
@@ -4526,11 +9421,11 @@
             <a:avLst/>
           </a:prstGeom>
           <a:solidFill>
-            <a:srgbClr val="2F5D50"/>
+            <a:srgbClr val="1F5C4A"/>
           </a:solidFill>
           <a:ln w="12700">
             <a:solidFill>
-              <a:srgbClr val="2F5D50"/>
+              <a:srgbClr val="1F5C4A"/>
             </a:solidFill>
             <a:prstDash val="solid"/>
           </a:ln>
@@ -4563,7 +9458,7 @@
             <a:r>
               <a:rPr lang="en-US" sz="1000" b="1" spc="200" kern="0" dirty="0">
                 <a:solidFill>
-                  <a:srgbClr val="2F5D50"/>
+                  <a:srgbClr val="1F5C4A"/>
                 </a:solidFill>
                 <a:latin typeface="Noto Sans KR" pitchFamily="34" charset="0"/>
                 <a:ea typeface="Noto Sans KR" pitchFamily="34" charset="-122"/>
@@ -4629,11 +9524,11 @@
             <a:avLst/>
           </a:prstGeom>
           <a:solidFill>
-            <a:srgbClr val="2F5D50"/>
+            <a:srgbClr val="1F5C4A"/>
           </a:solidFill>
           <a:ln w="12700">
             <a:solidFill>
-              <a:srgbClr val="2F5D50"/>
+              <a:srgbClr val="1F5C4A"/>
             </a:solidFill>
             <a:prstDash val="solid"/>
           </a:ln>
@@ -4666,7 +9561,7 @@
             <a:r>
               <a:rPr lang="en-US" sz="1000" b="1" spc="200" kern="0" dirty="0">
                 <a:solidFill>
-                  <a:srgbClr val="2F5D50"/>
+                  <a:srgbClr val="1F5C4A"/>
                 </a:solidFill>
                 <a:latin typeface="Noto Sans KR" pitchFamily="34" charset="0"/>
                 <a:ea typeface="Noto Sans KR" pitchFamily="34" charset="-122"/>
@@ -4732,11 +9627,11 @@
             <a:avLst/>
           </a:prstGeom>
           <a:solidFill>
-            <a:srgbClr val="2F5D50"/>
+            <a:srgbClr val="1F5C4A"/>
           </a:solidFill>
           <a:ln w="12700">
             <a:solidFill>
-              <a:srgbClr val="2F5D50"/>
+              <a:srgbClr val="1F5C4A"/>
             </a:solidFill>
             <a:prstDash val="solid"/>
           </a:ln>
@@ -4769,7 +9664,7 @@
             <a:r>
               <a:rPr lang="en-US" sz="1000" b="1" spc="200" kern="0" dirty="0">
                 <a:solidFill>
-                  <a:srgbClr val="2F5D50"/>
+                  <a:srgbClr val="1F5C4A"/>
                 </a:solidFill>
                 <a:latin typeface="Noto Sans KR" pitchFamily="34" charset="0"/>
                 <a:ea typeface="Noto Sans KR" pitchFamily="34" charset="-122"/>
@@ -4835,11 +9730,11 @@
             <a:avLst/>
           </a:prstGeom>
           <a:solidFill>
-            <a:srgbClr val="2F5D50"/>
+            <a:srgbClr val="1F5C4A"/>
           </a:solidFill>
           <a:ln w="12700">
             <a:solidFill>
-              <a:srgbClr val="2F5D50"/>
+              <a:srgbClr val="1F5C4A"/>
             </a:solidFill>
             <a:prstDash val="solid"/>
           </a:ln>
@@ -4872,7 +9767,7 @@
             <a:r>
               <a:rPr lang="en-US" sz="1000" b="1" spc="200" kern="0" dirty="0">
                 <a:solidFill>
-                  <a:srgbClr val="2F5D50"/>
+                  <a:srgbClr val="1F5C4A"/>
                 </a:solidFill>
                 <a:latin typeface="Noto Sans KR" pitchFamily="34" charset="0"/>
                 <a:ea typeface="Noto Sans KR" pitchFamily="34" charset="-122"/>
@@ -4938,11 +9833,11 @@
             <a:avLst/>
           </a:prstGeom>
           <a:solidFill>
-            <a:srgbClr val="2F5D50"/>
+            <a:srgbClr val="1F5C4A"/>
           </a:solidFill>
           <a:ln w="12700">
             <a:solidFill>
-              <a:srgbClr val="2F5D50"/>
+              <a:srgbClr val="1F5C4A"/>
             </a:solidFill>
             <a:prstDash val="solid"/>
           </a:ln>
@@ -4975,7 +9870,7 @@
             <a:r>
               <a:rPr lang="en-US" sz="1000" b="1" spc="200" kern="0" dirty="0">
                 <a:solidFill>
-                  <a:srgbClr val="2F5D50"/>
+                  <a:srgbClr val="1F5C4A"/>
                 </a:solidFill>
                 <a:latin typeface="Noto Sans KR" pitchFamily="34" charset="0"/>
                 <a:ea typeface="Noto Sans KR" pitchFamily="34" charset="-122"/>
@@ -5041,11 +9936,11 @@
             <a:avLst/>
           </a:prstGeom>
           <a:solidFill>
-            <a:srgbClr val="2F5D50"/>
+            <a:srgbClr val="1F5C4A"/>
           </a:solidFill>
           <a:ln w="12700">
             <a:solidFill>
-              <a:srgbClr val="2F5D50"/>
+              <a:srgbClr val="1F5C4A"/>
             </a:solidFill>
             <a:prstDash val="solid"/>
           </a:ln>
@@ -5078,7 +9973,7 @@
             <a:r>
               <a:rPr lang="en-US" sz="1000" b="1" spc="200" kern="0" dirty="0">
                 <a:solidFill>
-                  <a:srgbClr val="2F5D50"/>
+                  <a:srgbClr val="1F5C4A"/>
                 </a:solidFill>
                 <a:latin typeface="Noto Sans KR" pitchFamily="34" charset="0"/>
                 <a:ea typeface="Noto Sans KR" pitchFamily="34" charset="-122"/>
@@ -5156,7 +10051,7 @@
             <a:r>
               <a:rPr lang="en-US" sz="1300" b="1" i="1" dirty="0">
                 <a:solidFill>
-                  <a:srgbClr val="2F5D50"/>
+                  <a:srgbClr val="1F5C4A"/>
                 </a:solidFill>
                 <a:latin typeface="Noto Serif KR" pitchFamily="34" charset="0"/>
                 <a:ea typeface="Noto Serif KR" pitchFamily="34" charset="-122"/>
@@ -5179,13 +10074,6 @@
 <file path=ppt/slides/slide13.xml><?xml version="1.0" encoding="utf-8"?>
 <p:sld xmlns:a="http://schemas.openxmlformats.org/drawingml/2006/main" xmlns:r="http://schemas.openxmlformats.org/officeDocument/2006/relationships" xmlns:p="http://schemas.openxmlformats.org/presentationml/2006/main">
   <p:cSld name="Slide 13">
-    <p:bg>
-      <p:bgPr>
-        <a:solidFill>
-          <a:srgbClr val="FAF7F0"/>
-        </a:solidFill>
-      </p:bgPr>
-    </p:bg>
     <p:spTree>
       <p:nvGrpSpPr>
         <p:cNvPr id="1" name=""/>
@@ -5227,7 +10115,7 @@
             <a:r>
               <a:rPr lang="en-US" sz="1100" b="1" spc="600" kern="0" dirty="0">
                 <a:solidFill>
-                  <a:srgbClr val="2F5D50"/>
+                  <a:srgbClr val="1F5C4A"/>
                 </a:solidFill>
                 <a:latin typeface="Noto Sans KR" pitchFamily="34" charset="0"/>
                 <a:ea typeface="Noto Sans KR" pitchFamily="34" charset="-122"/>
@@ -5330,7 +10218,7 @@
             <a:r>
               <a:rPr lang="en-US" sz="1000" i="1" dirty="0">
                 <a:solidFill>
-                  <a:srgbClr val="8A929B"/>
+                  <a:srgbClr val="6B6256"/>
                 </a:solidFill>
                 <a:latin typeface="Noto Serif KR" pitchFamily="34" charset="0"/>
                 <a:ea typeface="Noto Serif KR" pitchFamily="34" charset="-122"/>
@@ -5369,7 +10257,7 @@
             <a:r>
               <a:rPr lang="en-US" sz="1000" dirty="0">
                 <a:solidFill>
-                  <a:srgbClr val="8A929B"/>
+                  <a:srgbClr val="6B6256"/>
                 </a:solidFill>
                 <a:latin typeface="Noto Sans KR" pitchFamily="34" charset="0"/>
                 <a:ea typeface="Noto Sans KR" pitchFamily="34" charset="-122"/>
@@ -5389,8 +10277,8 @@
         </p:nvSpPr>
         <p:spPr>
           <a:xfrm>
-            <a:off x="457200" y="1280160"/>
-            <a:ext cx="8229600" cy="822960"/>
+            <a:off x="457200" y="1143000"/>
+            <a:ext cx="8229600" cy="640080"/>
           </a:xfrm>
           <a:prstGeom prst="rect">
             <a:avLst/>
@@ -5406,9 +10294,9 @@
               <a:buNone/>
             </a:pPr>
             <a:r>
-              <a:rPr lang="en-US" sz="3600" b="1" dirty="0">
-                <a:solidFill>
-                  <a:srgbClr val="2F5D50"/>
+              <a:rPr lang="en-US" sz="3200" b="1" dirty="0">
+                <a:solidFill>
+                  <a:srgbClr val="1F5C4A"/>
                 </a:solidFill>
                 <a:latin typeface="Noto Serif KR" pitchFamily="34" charset="0"/>
                 <a:ea typeface="Noto Serif KR" pitchFamily="34" charset="-122"/>
@@ -5420,9 +10308,9 @@
               <a:buNone/>
             </a:pPr>
             <a:r>
-              <a:rPr lang="en-US" sz="1400" dirty="0">
-                <a:solidFill>
-                  <a:srgbClr val="8A929B"/>
+              <a:rPr lang="en-US" sz="1300" dirty="0">
+                <a:solidFill>
+                  <a:srgbClr val="6B6256"/>
                 </a:solidFill>
                 <a:latin typeface="Noto Sans KR" pitchFamily="34" charset="0"/>
                 <a:ea typeface="Noto Sans KR" pitchFamily="34" charset="-122"/>
@@ -5434,9 +10322,9 @@
               <a:buNone/>
             </a:pPr>
             <a:r>
-              <a:rPr lang="en-US" sz="3600" b="1" dirty="0">
-                <a:solidFill>
-                  <a:srgbClr val="2F5D50"/>
+              <a:rPr lang="en-US" sz="3200" b="1" dirty="0">
+                <a:solidFill>
+                  <a:srgbClr val="1F5C4A"/>
                 </a:solidFill>
                 <a:latin typeface="Noto Serif KR" pitchFamily="34" charset="0"/>
                 <a:ea typeface="Noto Serif KR" pitchFamily="34" charset="-122"/>
@@ -5448,9 +10336,9 @@
               <a:buNone/>
             </a:pPr>
             <a:r>
-              <a:rPr lang="en-US" sz="1400" dirty="0">
-                <a:solidFill>
-                  <a:srgbClr val="8A929B"/>
+              <a:rPr lang="en-US" sz="1300" dirty="0">
+                <a:solidFill>
+                  <a:srgbClr val="6B6256"/>
                 </a:solidFill>
                 <a:latin typeface="Noto Sans KR" pitchFamily="34" charset="0"/>
                 <a:ea typeface="Noto Sans KR" pitchFamily="34" charset="-122"/>
@@ -5462,9 +10350,9 @@
               <a:buNone/>
             </a:pPr>
             <a:r>
-              <a:rPr lang="en-US" sz="3600" b="1" dirty="0">
-                <a:solidFill>
-                  <a:srgbClr val="2F5D50"/>
+              <a:rPr lang="en-US" sz="3200" b="1" dirty="0">
+                <a:solidFill>
+                  <a:srgbClr val="1F5C4A"/>
                 </a:solidFill>
                 <a:latin typeface="Noto Serif KR" pitchFamily="34" charset="0"/>
                 <a:ea typeface="Noto Serif KR" pitchFamily="34" charset="-122"/>
@@ -5476,9 +10364,9 @@
               <a:buNone/>
             </a:pPr>
             <a:r>
-              <a:rPr lang="en-US" sz="1400" dirty="0">
-                <a:solidFill>
-                  <a:srgbClr val="8A929B"/>
+              <a:rPr lang="en-US" sz="1300" dirty="0">
+                <a:solidFill>
+                  <a:srgbClr val="6B6256"/>
                 </a:solidFill>
                 <a:latin typeface="Noto Sans KR" pitchFamily="34" charset="0"/>
                 <a:ea typeface="Noto Sans KR" pitchFamily="34" charset="-122"/>
@@ -5486,7 +10374,7 @@
               </a:rPr>
               <a:t>단계 PR 시리즈</a:t>
             </a:r>
-            <a:endParaRPr lang="en-US" sz="3600" dirty="0"/>
+            <a:endParaRPr lang="en-US" sz="3200" dirty="0"/>
           </a:p>
         </p:txBody>
       </p:sp>
@@ -5498,20 +10386,20 @@
         </p:nvSpPr>
         <p:spPr>
           <a:xfrm>
-            <a:off x="457200" y="2194560"/>
-            <a:ext cx="8229600" cy="1691640"/>
-          </a:xfrm>
-          <a:prstGeom prst="rect">
-            <a:avLst/>
-          </a:prstGeom>
-          <a:solidFill>
-            <a:srgbClr val="2F5D50">
+            <a:off x="457200" y="1874520"/>
+            <a:ext cx="3977640" cy="2286000"/>
+          </a:xfrm>
+          <a:prstGeom prst="rect">
+            <a:avLst/>
+          </a:prstGeom>
+          <a:solidFill>
+            <a:srgbClr val="1F5C4A">
               <a:alpha val="8000"/>
             </a:srgbClr>
           </a:solidFill>
           <a:ln w="12700">
             <a:solidFill>
-              <a:srgbClr val="2F5D50"/>
+              <a:srgbClr val="1F5C4A"/>
             </a:solidFill>
             <a:prstDash val="solid"/>
           </a:ln>
@@ -5525,8 +10413,8 @@
         </p:nvSpPr>
         <p:spPr>
           <a:xfrm>
-            <a:off x="731520" y="2331720"/>
-            <a:ext cx="7680960" cy="320040"/>
+            <a:off x="685800" y="2011680"/>
+            <a:ext cx="3520440" cy="292608"/>
           </a:xfrm>
           <a:prstGeom prst="rect">
             <a:avLst/>
@@ -5542,17 +10430,17 @@
               <a:buNone/>
             </a:pPr>
             <a:r>
-              <a:rPr lang="en-US" sz="1300" b="1" spc="400" kern="0" dirty="0">
-                <a:solidFill>
-                  <a:srgbClr val="2F5D50"/>
-                </a:solidFill>
-                <a:latin typeface="Noto Sans KR" pitchFamily="34" charset="0"/>
-                <a:ea typeface="Noto Sans KR" pitchFamily="34" charset="-122"/>
-                <a:cs typeface="Noto Sans KR" pitchFamily="34" charset="-120"/>
-              </a:rPr>
-              <a:t>극복점 — AI silent fallback 회귀 (PR #71)</a:t>
-            </a:r>
-            <a:endParaRPr lang="en-US" sz="1300" dirty="0"/>
+              <a:rPr lang="en-US" sz="1200" b="1" spc="400" kern="0" dirty="0">
+                <a:solidFill>
+                  <a:srgbClr val="1F5C4A"/>
+                </a:solidFill>
+                <a:latin typeface="Noto Sans KR" pitchFamily="34" charset="0"/>
+                <a:ea typeface="Noto Sans KR" pitchFamily="34" charset="-122"/>
+                <a:cs typeface="Noto Sans KR" pitchFamily="34" charset="-120"/>
+              </a:rPr>
+              <a:t>규율 — 헌법 시스템으로 AI 통제</a:t>
+            </a:r>
+            <a:endParaRPr lang="en-US" sz="1200" dirty="0"/>
           </a:p>
         </p:txBody>
       </p:sp>
@@ -5564,8 +10452,8 @@
         </p:nvSpPr>
         <p:spPr>
           <a:xfrm>
-            <a:off x="731520" y="2697480"/>
-            <a:ext cx="7680960" cy="1097280"/>
+            <a:off x="685800" y="2331720"/>
+            <a:ext cx="3520440" cy="1691640"/>
           </a:xfrm>
           <a:prstGeom prst="rect">
             <a:avLst/>
@@ -5584,15 +10472,15 @@
               <a:buNone/>
             </a:pPr>
             <a:r>
-              <a:rPr lang="en-US" sz="1100" b="1" spc="400" kern="0" dirty="0">
-                <a:solidFill>
-                  <a:srgbClr val="8A929B"/>
-                </a:solidFill>
-                <a:latin typeface="Noto Sans KR" pitchFamily="34" charset="0"/>
-                <a:ea typeface="Noto Sans KR" pitchFamily="34" charset="-122"/>
-                <a:cs typeface="Noto Sans KR" pitchFamily="34" charset="-120"/>
-              </a:rPr>
-              <a:t>증상  </a:t>
+              <a:rPr lang="en-US" sz="1000" b="1" spc="400" kern="0" dirty="0">
+                <a:solidFill>
+                  <a:srgbClr val="6B6256"/>
+                </a:solidFill>
+                <a:latin typeface="Noto Sans KR" pitchFamily="34" charset="0"/>
+                <a:ea typeface="Noto Sans KR" pitchFamily="34" charset="-122"/>
+                <a:cs typeface="Noto Sans KR" pitchFamily="34" charset="-120"/>
+              </a:rPr>
+              <a:t>종전  </a:t>
             </a:r>
             <a:pPr indent="0" marL="0">
               <a:spcAft>
@@ -5601,7 +10489,7 @@
               <a:buNone/>
             </a:pPr>
             <a:r>
-              <a:rPr lang="en-US" sz="1200" dirty="0">
+              <a:rPr lang="en-US" sz="1100" dirty="0">
                 <a:solidFill>
                   <a:srgbClr val="1A2027"/>
                 </a:solidFill>
@@ -5609,11 +10497,8 @@
                 <a:ea typeface="Noto Sans KR" pitchFamily="34" charset="-122"/>
                 <a:cs typeface="Noto Sans KR" pitchFamily="34" charset="-120"/>
               </a:rPr>
-              <a:t>채점 후 AI 총평·키워드·diff 모두 “분석 결과가 비어 있습니다” 표시</a:t>
-            </a:r>
-            <a:endParaRPr lang="en-US" sz="1100" dirty="0"/>
-          </a:p>
-          <a:p>
+              <a:t>단일 </a:t>
+            </a:r>
             <a:pPr indent="0" marL="0">
               <a:spcAft>
                 <a:spcPts val="400"/>
@@ -5621,15 +10506,15 @@
               <a:buNone/>
             </a:pPr>
             <a:r>
-              <a:rPr lang="en-US" sz="1100" b="1" spc="400" kern="0" dirty="0">
-                <a:solidFill>
-                  <a:srgbClr val="8A929B"/>
-                </a:solidFill>
-                <a:latin typeface="Noto Sans KR" pitchFamily="34" charset="0"/>
-                <a:ea typeface="Noto Sans KR" pitchFamily="34" charset="-122"/>
-                <a:cs typeface="Noto Sans KR" pitchFamily="34" charset="-120"/>
-              </a:rPr>
-              <a:t>원인  </a:t>
+              <a:rPr lang="en-US" sz="1100" i="1" dirty="0">
+                <a:solidFill>
+                  <a:srgbClr val="1A2027"/>
+                </a:solidFill>
+                <a:latin typeface="Noto Sans KR" pitchFamily="34" charset="0"/>
+                <a:ea typeface="Noto Sans KR" pitchFamily="34" charset="-122"/>
+                <a:cs typeface="Noto Sans KR" pitchFamily="34" charset="-120"/>
+              </a:rPr>
+              <a:t>CLAUDE.md </a:t>
             </a:r>
             <a:pPr indent="0" marL="0">
               <a:spcAft>
@@ -5638,7 +10523,7 @@
               <a:buNone/>
             </a:pPr>
             <a:r>
-              <a:rPr lang="en-US" sz="1200" dirty="0">
+              <a:rPr lang="en-US" sz="1100" dirty="0">
                 <a:solidFill>
                   <a:srgbClr val="1A2027"/>
                 </a:solidFill>
@@ -5646,8 +10531,11 @@
                 <a:ea typeface="Noto Sans KR" pitchFamily="34" charset="-122"/>
                 <a:cs typeface="Noto Sans KR" pitchFamily="34" charset="-120"/>
               </a:rPr>
-              <a:t>LLM JSON 파싱 실패 시 빈 배열로 </a:t>
-            </a:r>
+              <a:t>지침서 → AI 가 자주 말을 안 듣고 스코프 폭주</a:t>
+            </a:r>
+            <a:endParaRPr lang="en-US" sz="1000" dirty="0"/>
+          </a:p>
+          <a:p>
             <a:pPr indent="0" marL="0">
               <a:spcAft>
                 <a:spcPts val="400"/>
@@ -5655,15 +10543,15 @@
               <a:buNone/>
             </a:pPr>
             <a:r>
-              <a:rPr lang="en-US" sz="1200" b="1" i="1" dirty="0">
-                <a:solidFill>
-                  <a:srgbClr val="1A2027"/>
-                </a:solidFill>
-                <a:latin typeface="Noto Sans KR" pitchFamily="34" charset="0"/>
-                <a:ea typeface="Noto Sans KR" pitchFamily="34" charset="-122"/>
-                <a:cs typeface="Noto Sans KR" pitchFamily="34" charset="-120"/>
-              </a:rPr>
-              <a:t>조용히 fallback </a:t>
+              <a:rPr lang="en-US" sz="1000" b="1" spc="400" kern="0" dirty="0">
+                <a:solidFill>
+                  <a:srgbClr val="6B6256"/>
+                </a:solidFill>
+                <a:latin typeface="Noto Sans KR" pitchFamily="34" charset="0"/>
+                <a:ea typeface="Noto Sans KR" pitchFamily="34" charset="-122"/>
+                <a:cs typeface="Noto Sans KR" pitchFamily="34" charset="-120"/>
+              </a:rPr>
+              <a:t>전환  </a:t>
             </a:r>
             <a:pPr indent="0" marL="0">
               <a:spcAft>
@@ -5672,7 +10560,7 @@
               <a:buNone/>
             </a:pPr>
             <a:r>
-              <a:rPr lang="en-US" sz="1200" dirty="0">
+              <a:rPr lang="en-US" sz="1100" b="1" dirty="0">
                 <a:solidFill>
                   <a:srgbClr val="1A2027"/>
                 </a:solidFill>
@@ -5680,9 +10568,9 @@
                 <a:ea typeface="Noto Sans KR" pitchFamily="34" charset="-122"/>
                 <a:cs typeface="Noto Sans KR" pitchFamily="34" charset="-120"/>
               </a:rPr>
-              <a:t>→ UI 가 “성공인데 빈 답안” 으로 잘못 안내</a:t>
-            </a:r>
-            <a:endParaRPr lang="en-US" sz="1100" dirty="0"/>
+              <a:t>4 계층 위계 (한국 법체계 정합)</a:t>
+            </a:r>
+            <a:endParaRPr lang="en-US" sz="1000" dirty="0"/>
           </a:p>
           <a:p>
             <a:pPr indent="0" marL="0">
@@ -5692,16 +10580,19 @@
               <a:buNone/>
             </a:pPr>
             <a:r>
-              <a:rPr lang="en-US" sz="1100" b="1" spc="400" kern="0" dirty="0">
-                <a:solidFill>
-                  <a:srgbClr val="8A929B"/>
-                </a:solidFill>
-                <a:latin typeface="Noto Sans KR" pitchFamily="34" charset="0"/>
-                <a:ea typeface="Noto Sans KR" pitchFamily="34" charset="-122"/>
-                <a:cs typeface="Noto Sans KR" pitchFamily="34" charset="-120"/>
-              </a:rPr>
-              <a:t>해결  </a:t>
-            </a:r>
+              <a:rPr lang="en-US" sz="1050" i="1" dirty="0">
+                <a:solidFill>
+                  <a:srgbClr val="434B55"/>
+                </a:solidFill>
+                <a:latin typeface="Noto Sans KR" pitchFamily="34" charset="0"/>
+                <a:ea typeface="Noto Sans KR" pitchFamily="34" charset="-122"/>
+                <a:cs typeface="Noto Sans KR" pitchFamily="34" charset="-120"/>
+              </a:rPr>
+              <a:t>        헌법 / 법률 / 시행령 / 시행규칙</a:t>
+            </a:r>
+            <a:endParaRPr lang="en-US" sz="1000" dirty="0"/>
+          </a:p>
+          <a:p>
             <a:pPr indent="0" marL="0">
               <a:spcAft>
                 <a:spcPts val="400"/>
@@ -5709,7 +10600,24 @@
               <a:buNone/>
             </a:pPr>
             <a:r>
-              <a:rPr lang="en-US" sz="1200" dirty="0">
+              <a:rPr lang="en-US" sz="1000" b="1" spc="400" kern="0" dirty="0">
+                <a:solidFill>
+                  <a:srgbClr val="6B6256"/>
+                </a:solidFill>
+                <a:latin typeface="Noto Sans KR" pitchFamily="34" charset="0"/>
+                <a:ea typeface="Noto Sans KR" pitchFamily="34" charset="-122"/>
+                <a:cs typeface="Noto Sans KR" pitchFamily="34" charset="-120"/>
+              </a:rPr>
+              <a:t>결과  </a:t>
+            </a:r>
+            <a:pPr indent="0" marL="0">
+              <a:spcAft>
+                <a:spcPts val="400"/>
+              </a:spcAft>
+              <a:buNone/>
+            </a:pPr>
+            <a:r>
+              <a:rPr lang="en-US" sz="1100" dirty="0">
                 <a:solidFill>
                   <a:srgbClr val="1A2027"/>
                 </a:solidFill>
@@ -5717,22 +10625,86 @@
                 <a:ea typeface="Noto Sans KR" pitchFamily="34" charset="-122"/>
                 <a:cs typeface="Noto Sans KR" pitchFamily="34" charset="-120"/>
               </a:rPr>
-              <a:t>파싱 실패 시 명시 throw + 진단 로그 + 출력 토큰 2048 → 4096 격상</a:t>
-            </a:r>
-            <a:endParaRPr lang="en-US" sz="1100" dirty="0"/>
-          </a:p>
-        </p:txBody>
-      </p:sp>
-      <p:sp>
-        <p:nvSpPr>
-          <p:cNvPr id="11" name="Text 9"/>
-          <p:cNvSpPr/>
-          <p:nvPr/>
-        </p:nvSpPr>
-        <p:spPr>
-          <a:xfrm>
-            <a:off x="457200" y="4114800"/>
-            <a:ext cx="8229600" cy="640080"/>
+              <a:t>모든 결정 → 헌법 조항 </a:t>
+            </a:r>
+            <a:pPr indent="0" marL="0">
+              <a:spcAft>
+                <a:spcPts val="400"/>
+              </a:spcAft>
+              <a:buNone/>
+            </a:pPr>
+            <a:r>
+              <a:rPr lang="en-US" sz="1100" b="1" dirty="0">
+                <a:solidFill>
+                  <a:srgbClr val="1A2027"/>
+                </a:solidFill>
+                <a:latin typeface="Noto Sans KR" pitchFamily="34" charset="0"/>
+                <a:ea typeface="Noto Sans KR" pitchFamily="34" charset="-122"/>
+                <a:cs typeface="Noto Sans KR" pitchFamily="34" charset="-120"/>
+              </a:rPr>
+              <a:t>근거 명시 의무</a:t>
+            </a:r>
+            <a:endParaRPr lang="en-US" sz="1000" dirty="0"/>
+          </a:p>
+          <a:p>
+            <a:pPr indent="0" marL="0">
+              <a:spcAft>
+                <a:spcPts val="400"/>
+              </a:spcAft>
+              <a:buNone/>
+            </a:pPr>
+            <a:r>
+              <a:rPr lang="en-US" sz="1050" i="1" dirty="0">
+                <a:solidFill>
+                  <a:srgbClr val="434B55"/>
+                </a:solidFill>
+                <a:latin typeface="Noto Sans KR" pitchFamily="34" charset="0"/>
+                <a:ea typeface="Noto Sans KR" pitchFamily="34" charset="-122"/>
+                <a:cs typeface="Noto Sans KR" pitchFamily="34" charset="-120"/>
+              </a:rPr>
+              <a:t>        신규 기능 자가 추가 금지 (스코프 보호)</a:t>
+            </a:r>
+            <a:endParaRPr lang="en-US" sz="1000" dirty="0"/>
+          </a:p>
+        </p:txBody>
+      </p:sp>
+      <p:sp>
+        <p:nvSpPr>
+          <p:cNvPr id="11" name="Shape 9"/>
+          <p:cNvSpPr/>
+          <p:nvPr/>
+        </p:nvSpPr>
+        <p:spPr>
+          <a:xfrm>
+            <a:off x="4709160" y="1874520"/>
+            <a:ext cx="3977640" cy="2286000"/>
+          </a:xfrm>
+          <a:prstGeom prst="rect">
+            <a:avLst/>
+          </a:prstGeom>
+          <a:solidFill>
+            <a:srgbClr val="1F5C4A">
+              <a:alpha val="8000"/>
+            </a:srgbClr>
+          </a:solidFill>
+          <a:ln w="12700">
+            <a:solidFill>
+              <a:srgbClr val="1F5C4A"/>
+            </a:solidFill>
+            <a:prstDash val="solid"/>
+          </a:ln>
+        </p:spPr>
+      </p:sp>
+      <p:sp>
+        <p:nvSpPr>
+          <p:cNvPr id="12" name="Text 10"/>
+          <p:cNvSpPr/>
+          <p:nvPr/>
+        </p:nvSpPr>
+        <p:spPr>
+          <a:xfrm>
+            <a:off x="4937760" y="2011680"/>
+            <a:ext cx="3520440" cy="292608"/>
           </a:xfrm>
           <a:prstGeom prst="rect">
             <a:avLst/>
@@ -5744,13 +10716,242 @@
           <a:bodyPr wrap="square" lIns="0" tIns="0" rIns="0" bIns="0" rtlCol="0" anchor="ctr"/>
           <a:lstStyle/>
           <a:p>
+            <a:pPr indent="0" marL="0">
+              <a:buNone/>
+            </a:pPr>
+            <a:r>
+              <a:rPr lang="en-US" sz="1200" b="1" spc="400" kern="0" dirty="0">
+                <a:solidFill>
+                  <a:srgbClr val="1F5C4A"/>
+                </a:solidFill>
+                <a:latin typeface="Noto Sans KR" pitchFamily="34" charset="0"/>
+                <a:ea typeface="Noto Sans KR" pitchFamily="34" charset="-122"/>
+                <a:cs typeface="Noto Sans KR" pitchFamily="34" charset="-120"/>
+              </a:rPr>
+              <a:t>정직 — silent fallback 회귀 (PR #71)</a:t>
+            </a:r>
+            <a:endParaRPr lang="en-US" sz="1200" dirty="0"/>
+          </a:p>
+        </p:txBody>
+      </p:sp>
+      <p:sp>
+        <p:nvSpPr>
+          <p:cNvPr id="13" name="Text 11"/>
+          <p:cNvSpPr/>
+          <p:nvPr/>
+        </p:nvSpPr>
+        <p:spPr>
+          <a:xfrm>
+            <a:off x="4937760" y="2331720"/>
+            <a:ext cx="3520440" cy="1691640"/>
+          </a:xfrm>
+          <a:prstGeom prst="rect">
+            <a:avLst/>
+          </a:prstGeom>
+          <a:noFill/>
+          <a:ln/>
+        </p:spPr>
+        <p:txBody>
+          <a:bodyPr wrap="square" lIns="0" tIns="0" rIns="0" bIns="0" rtlCol="0" anchor="t"/>
+          <a:lstStyle/>
+          <a:p>
+            <a:pPr indent="0" marL="0">
+              <a:spcAft>
+                <a:spcPts val="400"/>
+              </a:spcAft>
+              <a:buNone/>
+            </a:pPr>
+            <a:r>
+              <a:rPr lang="en-US" sz="1000" b="1" spc="400" kern="0" dirty="0">
+                <a:solidFill>
+                  <a:srgbClr val="6B6256"/>
+                </a:solidFill>
+                <a:latin typeface="Noto Sans KR" pitchFamily="34" charset="0"/>
+                <a:ea typeface="Noto Sans KR" pitchFamily="34" charset="-122"/>
+                <a:cs typeface="Noto Sans KR" pitchFamily="34" charset="-120"/>
+              </a:rPr>
+              <a:t>증상  </a:t>
+            </a:r>
+            <a:pPr indent="0" marL="0">
+              <a:spcAft>
+                <a:spcPts val="400"/>
+              </a:spcAft>
+              <a:buNone/>
+            </a:pPr>
+            <a:r>
+              <a:rPr lang="en-US" sz="1100" dirty="0">
+                <a:solidFill>
+                  <a:srgbClr val="1A2027"/>
+                </a:solidFill>
+                <a:latin typeface="Noto Sans KR" pitchFamily="34" charset="0"/>
+                <a:ea typeface="Noto Sans KR" pitchFamily="34" charset="-122"/>
+                <a:cs typeface="Noto Sans KR" pitchFamily="34" charset="-120"/>
+              </a:rPr>
+              <a:t>채점 후 AI 총평·키워드·diff 모두 빈 화면</a:t>
+            </a:r>
+            <a:endParaRPr lang="en-US" sz="1000" dirty="0"/>
+          </a:p>
+          <a:p>
+            <a:pPr indent="0" marL="0">
+              <a:spcAft>
+                <a:spcPts val="400"/>
+              </a:spcAft>
+              <a:buNone/>
+            </a:pPr>
+            <a:r>
+              <a:rPr lang="en-US" sz="1000" b="1" spc="400" kern="0" dirty="0">
+                <a:solidFill>
+                  <a:srgbClr val="6B6256"/>
+                </a:solidFill>
+                <a:latin typeface="Noto Sans KR" pitchFamily="34" charset="0"/>
+                <a:ea typeface="Noto Sans KR" pitchFamily="34" charset="-122"/>
+                <a:cs typeface="Noto Sans KR" pitchFamily="34" charset="-120"/>
+              </a:rPr>
+              <a:t>원인  </a:t>
+            </a:r>
+            <a:pPr indent="0" marL="0">
+              <a:spcAft>
+                <a:spcPts val="400"/>
+              </a:spcAft>
+              <a:buNone/>
+            </a:pPr>
+            <a:r>
+              <a:rPr lang="en-US" sz="1100" dirty="0">
+                <a:solidFill>
+                  <a:srgbClr val="1A2027"/>
+                </a:solidFill>
+                <a:latin typeface="Noto Sans KR" pitchFamily="34" charset="0"/>
+                <a:ea typeface="Noto Sans KR" pitchFamily="34" charset="-122"/>
+                <a:cs typeface="Noto Sans KR" pitchFamily="34" charset="-120"/>
+              </a:rPr>
+              <a:t>LLM JSON 파싱 실패 시 </a:t>
+            </a:r>
+            <a:pPr indent="0" marL="0">
+              <a:spcAft>
+                <a:spcPts val="400"/>
+              </a:spcAft>
+              <a:buNone/>
+            </a:pPr>
+            <a:r>
+              <a:rPr lang="en-US" sz="1100" b="1" i="1" dirty="0">
+                <a:solidFill>
+                  <a:srgbClr val="1A2027"/>
+                </a:solidFill>
+                <a:latin typeface="Noto Sans KR" pitchFamily="34" charset="0"/>
+                <a:ea typeface="Noto Sans KR" pitchFamily="34" charset="-122"/>
+                <a:cs typeface="Noto Sans KR" pitchFamily="34" charset="-120"/>
+              </a:rPr>
+              <a:t>조용히 빈 배열 fallback</a:t>
+            </a:r>
+            <a:endParaRPr lang="en-US" sz="1000" dirty="0"/>
+          </a:p>
+          <a:p>
+            <a:pPr indent="0" marL="0">
+              <a:spcAft>
+                <a:spcPts val="400"/>
+              </a:spcAft>
+              <a:buNone/>
+            </a:pPr>
+            <a:r>
+              <a:rPr lang="en-US" sz="1050" i="1" dirty="0">
+                <a:solidFill>
+                  <a:srgbClr val="434B55"/>
+                </a:solidFill>
+                <a:latin typeface="Noto Sans KR" pitchFamily="34" charset="0"/>
+                <a:ea typeface="Noto Sans KR" pitchFamily="34" charset="-122"/>
+                <a:cs typeface="Noto Sans KR" pitchFamily="34" charset="-120"/>
+              </a:rPr>
+              <a:t>        → UI 가 “성공인데 빈 답안” 으로 오안내</a:t>
+            </a:r>
+            <a:endParaRPr lang="en-US" sz="1000" dirty="0"/>
+          </a:p>
+          <a:p>
+            <a:pPr indent="0" marL="0">
+              <a:spcAft>
+                <a:spcPts val="400"/>
+              </a:spcAft>
+              <a:buNone/>
+            </a:pPr>
+            <a:r>
+              <a:rPr lang="en-US" sz="1000" b="1" spc="400" kern="0" dirty="0">
+                <a:solidFill>
+                  <a:srgbClr val="6B6256"/>
+                </a:solidFill>
+                <a:latin typeface="Noto Sans KR" pitchFamily="34" charset="0"/>
+                <a:ea typeface="Noto Sans KR" pitchFamily="34" charset="-122"/>
+                <a:cs typeface="Noto Sans KR" pitchFamily="34" charset="-120"/>
+              </a:rPr>
+              <a:t>해결  </a:t>
+            </a:r>
+            <a:pPr indent="0" marL="0">
+              <a:spcAft>
+                <a:spcPts val="400"/>
+              </a:spcAft>
+              <a:buNone/>
+            </a:pPr>
+            <a:r>
+              <a:rPr lang="en-US" sz="1100" b="1" dirty="0">
+                <a:solidFill>
+                  <a:srgbClr val="1A2027"/>
+                </a:solidFill>
+                <a:latin typeface="Noto Sans KR" pitchFamily="34" charset="0"/>
+                <a:ea typeface="Noto Sans KR" pitchFamily="34" charset="-122"/>
+                <a:cs typeface="Noto Sans KR" pitchFamily="34" charset="-120"/>
+              </a:rPr>
+              <a:t>명시 throw + 진단 로그</a:t>
+            </a:r>
+            <a:endParaRPr lang="en-US" sz="1000" dirty="0"/>
+          </a:p>
+          <a:p>
+            <a:pPr indent="0" marL="0">
+              <a:spcAft>
+                <a:spcPts val="400"/>
+              </a:spcAft>
+              <a:buNone/>
+            </a:pPr>
+            <a:r>
+              <a:rPr lang="en-US" sz="1050" i="1" dirty="0">
+                <a:solidFill>
+                  <a:srgbClr val="434B55"/>
+                </a:solidFill>
+                <a:latin typeface="Noto Sans KR" pitchFamily="34" charset="0"/>
+                <a:ea typeface="Noto Sans KR" pitchFamily="34" charset="-122"/>
+                <a:cs typeface="Noto Sans KR" pitchFamily="34" charset="-120"/>
+              </a:rPr>
+              <a:t>        + 출력 토큰 2048 → 4096 격상</a:t>
+            </a:r>
+            <a:endParaRPr lang="en-US" sz="1000" dirty="0"/>
+          </a:p>
+        </p:txBody>
+      </p:sp>
+      <p:sp>
+        <p:nvSpPr>
+          <p:cNvPr id="14" name="Text 12"/>
+          <p:cNvSpPr/>
+          <p:nvPr/>
+        </p:nvSpPr>
+        <p:spPr>
+          <a:xfrm>
+            <a:off x="457200" y="4343400"/>
+            <a:ext cx="8229600" cy="365760"/>
+          </a:xfrm>
+          <a:prstGeom prst="rect">
+            <a:avLst/>
+          </a:prstGeom>
+          <a:noFill/>
+          <a:ln/>
+        </p:spPr>
+        <p:txBody>
+          <a:bodyPr wrap="square" lIns="0" tIns="0" rIns="0" bIns="0" rtlCol="0" anchor="ctr"/>
+          <a:lstStyle/>
+          <a:p>
             <a:pPr algn="ctr" indent="0" marL="0">
               <a:buNone/>
             </a:pPr>
             <a:r>
               <a:rPr lang="en-US" sz="1100" b="1" spc="400" kern="0" dirty="0">
                 <a:solidFill>
-                  <a:srgbClr val="2F5D50"/>
+                  <a:srgbClr val="1F5C4A"/>
                 </a:solidFill>
                 <a:latin typeface="Noto Sans KR" pitchFamily="34" charset="0"/>
                 <a:ea typeface="Noto Sans KR" pitchFamily="34" charset="-122"/>
@@ -5770,7 +10971,7 @@
                 <a:ea typeface="Noto Serif KR" pitchFamily="34" charset="-122"/>
                 <a:cs typeface="Noto Serif KR" pitchFamily="34" charset="-120"/>
               </a:rPr>
-              <a:t>AI 출력 처리에서 fallback 은 </a:t>
+              <a:t>AI 협업은 </a:t>
             </a:r>
             <a:pPr algn="ctr" indent="0" marL="0">
               <a:buNone/>
@@ -5778,13 +10979,13 @@
             <a:r>
               <a:rPr lang="en-US" sz="1400" b="1" i="1" dirty="0">
                 <a:solidFill>
-                  <a:srgbClr val="2F5D50"/>
+                  <a:srgbClr val="1F5C4A"/>
                 </a:solidFill>
                 <a:latin typeface="Noto Serif KR" pitchFamily="34" charset="0"/>
                 <a:ea typeface="Noto Serif KR" pitchFamily="34" charset="-122"/>
                 <a:cs typeface="Noto Serif KR" pitchFamily="34" charset="-120"/>
               </a:rPr>
-              <a:t>명시 에러로 surface</a:t>
+              <a:t>규율과 정직</a:t>
             </a:r>
             <a:pPr algn="ctr" indent="0" marL="0">
               <a:buNone/>
@@ -5798,7 +10999,7 @@
                 <a:ea typeface="Noto Serif KR" pitchFamily="34" charset="-122"/>
                 <a:cs typeface="Noto Serif KR" pitchFamily="34" charset="-120"/>
               </a:rPr>
-              <a:t> — silent 는 사용자에게 정직하지 않다.</a:t>
+              <a:t> — 헌법으로 통제, fallback 은 명시 에러로 surface.</a:t>
             </a:r>
             <a:endParaRPr lang="en-US" sz="1100" dirty="0"/>
           </a:p>
@@ -5815,13 +11016,6 @@
 <file path=ppt/slides/slide14.xml><?xml version="1.0" encoding="utf-8"?>
 <p:sld xmlns:a="http://schemas.openxmlformats.org/drawingml/2006/main" xmlns:r="http://schemas.openxmlformats.org/officeDocument/2006/relationships" xmlns:p="http://schemas.openxmlformats.org/presentationml/2006/main">
   <p:cSld name="Slide 14">
-    <p:bg>
-      <p:bgPr>
-        <a:solidFill>
-          <a:srgbClr val="FAF7F0"/>
-        </a:solidFill>
-      </p:bgPr>
-    </p:bg>
     <p:spTree>
       <p:nvGrpSpPr>
         <p:cNvPr id="1" name=""/>
@@ -5902,7 +11096,7 @@
             <a:r>
               <a:rPr lang="en-US" sz="2200" dirty="0">
                 <a:solidFill>
-                  <a:srgbClr val="2F5D50"/>
+                  <a:srgbClr val="1F5C4A"/>
                 </a:solidFill>
                 <a:latin typeface="Noto Serif KR" pitchFamily="34" charset="0"/>
                 <a:ea typeface="Noto Serif KR" pitchFamily="34" charset="-122"/>
@@ -5969,7 +11163,7 @@
             <a:r>
               <a:rPr lang="en-US" sz="1400" b="1" spc="400" kern="0" dirty="0">
                 <a:solidFill>
-                  <a:srgbClr val="2F5D50"/>
+                  <a:srgbClr val="1F5C4A"/>
                 </a:solidFill>
                 <a:latin typeface="Noto Sans KR" pitchFamily="34" charset="0"/>
                 <a:ea typeface="Noto Sans KR" pitchFamily="34" charset="-122"/>
@@ -6023,7 +11217,7 @@
             <a:r>
               <a:rPr lang="en-US" sz="1200" i="1" dirty="0">
                 <a:solidFill>
-                  <a:srgbClr val="8A929B"/>
+                  <a:srgbClr val="6B6256"/>
                 </a:solidFill>
                 <a:latin typeface="Noto Sans KR" pitchFamily="34" charset="0"/>
                 <a:ea typeface="Noto Sans KR" pitchFamily="34" charset="-122"/>
@@ -6062,7 +11256,7 @@
             <a:r>
               <a:rPr lang="en-US" sz="1400" i="1" dirty="0">
                 <a:solidFill>
-                  <a:srgbClr val="8A929B"/>
+                  <a:srgbClr val="6B6256"/>
                 </a:solidFill>
                 <a:latin typeface="Noto Serif KR" pitchFamily="34" charset="0"/>
                 <a:ea typeface="Noto Serif KR" pitchFamily="34" charset="-122"/>
@@ -6085,13 +11279,6 @@
 <file path=ppt/slides/slide2.xml><?xml version="1.0" encoding="utf-8"?>
 <p:sld xmlns:a="http://schemas.openxmlformats.org/drawingml/2006/main" xmlns:r="http://schemas.openxmlformats.org/officeDocument/2006/relationships" xmlns:p="http://schemas.openxmlformats.org/presentationml/2006/main">
   <p:cSld name="Slide 2">
-    <p:bg>
-      <p:bgPr>
-        <a:solidFill>
-          <a:srgbClr val="FAF7F0"/>
-        </a:solidFill>
-      </p:bgPr>
-    </p:bg>
     <p:spTree>
       <p:nvGrpSpPr>
         <p:cNvPr id="1" name=""/>
@@ -6133,7 +11320,7 @@
             <a:r>
               <a:rPr lang="en-US" sz="1100" b="1" spc="600" kern="0" dirty="0">
                 <a:solidFill>
-                  <a:srgbClr val="2F5D50"/>
+                  <a:srgbClr val="1F5C4A"/>
                 </a:solidFill>
                 <a:latin typeface="Noto Sans KR" pitchFamily="34" charset="0"/>
                 <a:ea typeface="Noto Sans KR" pitchFamily="34" charset="-122"/>
@@ -6236,7 +11423,7 @@
             <a:r>
               <a:rPr lang="en-US" sz="1000" i="1" dirty="0">
                 <a:solidFill>
-                  <a:srgbClr val="8A929B"/>
+                  <a:srgbClr val="6B6256"/>
                 </a:solidFill>
                 <a:latin typeface="Noto Serif KR" pitchFamily="34" charset="0"/>
                 <a:ea typeface="Noto Serif KR" pitchFamily="34" charset="-122"/>
@@ -6275,7 +11462,7 @@
             <a:r>
               <a:rPr lang="en-US" sz="1000" dirty="0">
                 <a:solidFill>
-                  <a:srgbClr val="8A929B"/>
+                  <a:srgbClr val="6B6256"/>
                 </a:solidFill>
                 <a:latin typeface="Noto Sans KR" pitchFamily="34" charset="0"/>
                 <a:ea typeface="Noto Sans KR" pitchFamily="34" charset="-122"/>
@@ -6302,7 +11489,7 @@
             <a:avLst/>
           </a:prstGeom>
           <a:solidFill>
-            <a:srgbClr val="FAF7F0"/>
+            <a:srgbClr val="FAF6EE"/>
           </a:solidFill>
           <a:ln w="6350">
             <a:solidFill>
@@ -6341,7 +11528,7 @@
             <a:r>
               <a:rPr lang="en-US" sz="3600" b="1" dirty="0">
                 <a:solidFill>
-                  <a:srgbClr val="2F5D50"/>
+                  <a:srgbClr val="1F5C4A"/>
                 </a:solidFill>
                 <a:latin typeface="Noto Serif KR" pitchFamily="34" charset="0"/>
                 <a:ea typeface="Noto Serif KR" pitchFamily="34" charset="-122"/>
@@ -6380,7 +11567,7 @@
             <a:r>
               <a:rPr lang="en-US" sz="1200" spc="400" kern="0" dirty="0">
                 <a:solidFill>
-                  <a:srgbClr val="8A929B"/>
+                  <a:srgbClr val="6B6256"/>
                 </a:solidFill>
                 <a:latin typeface="Noto Sans KR" pitchFamily="34" charset="0"/>
                 <a:ea typeface="Noto Sans KR" pitchFamily="34" charset="-122"/>
@@ -6407,7 +11594,7 @@
             <a:avLst/>
           </a:prstGeom>
           <a:solidFill>
-            <a:srgbClr val="FAF7F0"/>
+            <a:srgbClr val="FAF6EE"/>
           </a:solidFill>
           <a:ln w="6350">
             <a:solidFill>
@@ -6446,7 +11633,7 @@
             <a:r>
               <a:rPr lang="en-US" sz="3600" b="1" dirty="0">
                 <a:solidFill>
-                  <a:srgbClr val="2F5D50"/>
+                  <a:srgbClr val="1F5C4A"/>
                 </a:solidFill>
                 <a:latin typeface="Noto Serif KR" pitchFamily="34" charset="0"/>
                 <a:ea typeface="Noto Serif KR" pitchFamily="34" charset="-122"/>
@@ -6485,7 +11672,7 @@
             <a:r>
               <a:rPr lang="en-US" sz="1200" spc="400" kern="0" dirty="0">
                 <a:solidFill>
-                  <a:srgbClr val="8A929B"/>
+                  <a:srgbClr val="6B6256"/>
                 </a:solidFill>
                 <a:latin typeface="Noto Sans KR" pitchFamily="34" charset="0"/>
                 <a:ea typeface="Noto Sans KR" pitchFamily="34" charset="-122"/>
@@ -6512,7 +11699,7 @@
             <a:avLst/>
           </a:prstGeom>
           <a:solidFill>
-            <a:srgbClr val="FAF7F0"/>
+            <a:srgbClr val="FAF6EE"/>
           </a:solidFill>
           <a:ln w="6350">
             <a:solidFill>
@@ -6551,7 +11738,7 @@
             <a:r>
               <a:rPr lang="en-US" sz="3600" b="1" dirty="0">
                 <a:solidFill>
-                  <a:srgbClr val="2F5D50"/>
+                  <a:srgbClr val="1F5C4A"/>
                 </a:solidFill>
                 <a:latin typeface="Noto Serif KR" pitchFamily="34" charset="0"/>
                 <a:ea typeface="Noto Serif KR" pitchFamily="34" charset="-122"/>
@@ -6590,7 +11777,7 @@
             <a:r>
               <a:rPr lang="en-US" sz="1200" spc="400" kern="0" dirty="0">
                 <a:solidFill>
-                  <a:srgbClr val="8A929B"/>
+                  <a:srgbClr val="6B6256"/>
                 </a:solidFill>
                 <a:latin typeface="Noto Sans KR" pitchFamily="34" charset="0"/>
                 <a:ea typeface="Noto Sans KR" pitchFamily="34" charset="-122"/>
@@ -6632,7 +11819,7 @@
             <a:r>
               <a:rPr lang="en-US" sz="1100" b="1" spc="400" kern="0" dirty="0">
                 <a:solidFill>
-                  <a:srgbClr val="8A929B"/>
+                  <a:srgbClr val="6B6256"/>
                 </a:solidFill>
                 <a:latin typeface="Noto Sans KR" pitchFamily="34" charset="0"/>
                 <a:ea typeface="Noto Sans KR" pitchFamily="34" charset="-122"/>
@@ -6760,7 +11947,7 @@
             <a:r>
               <a:rPr lang="en-US" sz="1600" b="1" dirty="0">
                 <a:solidFill>
-                  <a:srgbClr val="2F5D50"/>
+                  <a:srgbClr val="1F5C4A"/>
                 </a:solidFill>
                 <a:latin typeface="Noto Sans KR" pitchFamily="34" charset="0"/>
                 <a:ea typeface="Noto Sans KR" pitchFamily="34" charset="-122"/>
@@ -6834,13 +12021,6 @@
 <file path=ppt/slides/slide3.xml><?xml version="1.0" encoding="utf-8"?>
 <p:sld xmlns:a="http://schemas.openxmlformats.org/drawingml/2006/main" xmlns:r="http://schemas.openxmlformats.org/officeDocument/2006/relationships" xmlns:p="http://schemas.openxmlformats.org/presentationml/2006/main">
   <p:cSld name="Slide 3">
-    <p:bg>
-      <p:bgPr>
-        <a:solidFill>
-          <a:srgbClr val="FAF7F0"/>
-        </a:solidFill>
-      </p:bgPr>
-    </p:bg>
     <p:spTree>
       <p:nvGrpSpPr>
         <p:cNvPr id="1" name=""/>
@@ -6882,7 +12062,7 @@
             <a:r>
               <a:rPr lang="en-US" sz="1100" b="1" spc="600" kern="0" dirty="0">
                 <a:solidFill>
-                  <a:srgbClr val="2F5D50"/>
+                  <a:srgbClr val="1F5C4A"/>
                 </a:solidFill>
                 <a:latin typeface="Noto Sans KR" pitchFamily="34" charset="0"/>
                 <a:ea typeface="Noto Sans KR" pitchFamily="34" charset="-122"/>
@@ -6985,7 +12165,7 @@
             <a:r>
               <a:rPr lang="en-US" sz="1000" i="1" dirty="0">
                 <a:solidFill>
-                  <a:srgbClr val="8A929B"/>
+                  <a:srgbClr val="6B6256"/>
                 </a:solidFill>
                 <a:latin typeface="Noto Serif KR" pitchFamily="34" charset="0"/>
                 <a:ea typeface="Noto Serif KR" pitchFamily="34" charset="-122"/>
@@ -7024,7 +12204,7 @@
             <a:r>
               <a:rPr lang="en-US" sz="1000" dirty="0">
                 <a:solidFill>
-                  <a:srgbClr val="8A929B"/>
+                  <a:srgbClr val="6B6256"/>
                 </a:solidFill>
                 <a:latin typeface="Noto Sans KR" pitchFamily="34" charset="0"/>
                 <a:ea typeface="Noto Sans KR" pitchFamily="34" charset="-122"/>
@@ -7051,7 +12231,7 @@
             <a:avLst/>
           </a:prstGeom>
           <a:solidFill>
-            <a:srgbClr val="FAF7F0"/>
+            <a:srgbClr val="FAF6EE"/>
           </a:solidFill>
           <a:ln w="6350">
             <a:solidFill>
@@ -7093,7 +12273,7 @@
             <a:r>
               <a:rPr lang="en-US" sz="1000" b="1" spc="400" kern="0" dirty="0">
                 <a:solidFill>
-                  <a:srgbClr val="8A929B"/>
+                  <a:srgbClr val="6B6256"/>
                 </a:solidFill>
                 <a:latin typeface="Noto Sans KR" pitchFamily="34" charset="0"/>
                 <a:ea typeface="Noto Sans KR" pitchFamily="34" charset="-122"/>
@@ -7130,7 +12310,7 @@
             <a:r>
               <a:rPr lang="en-US" sz="1000" b="1" spc="400" kern="0" dirty="0">
                 <a:solidFill>
-                  <a:srgbClr val="8A929B"/>
+                  <a:srgbClr val="6B6256"/>
                 </a:solidFill>
                 <a:latin typeface="Noto Sans KR" pitchFamily="34" charset="0"/>
                 <a:ea typeface="Noto Sans KR" pitchFamily="34" charset="-122"/>
@@ -7167,7 +12347,7 @@
             <a:r>
               <a:rPr lang="en-US" sz="1000" b="1" spc="400" kern="0" dirty="0">
                 <a:solidFill>
-                  <a:srgbClr val="8A929B"/>
+                  <a:srgbClr val="6B6256"/>
                 </a:solidFill>
                 <a:latin typeface="Noto Sans KR" pitchFamily="34" charset="0"/>
                 <a:ea typeface="Noto Sans KR" pitchFamily="34" charset="-122"/>
@@ -7223,7 +12403,7 @@
             <a:r>
               <a:rPr lang="en-US" sz="2200" b="1" dirty="0">
                 <a:solidFill>
-                  <a:srgbClr val="2F5D50"/>
+                  <a:srgbClr val="1F5C4A"/>
                 </a:solidFill>
                 <a:latin typeface="Noto Serif KR" pitchFamily="34" charset="0"/>
                 <a:ea typeface="Noto Serif KR" pitchFamily="34" charset="-122"/>
@@ -7324,7 +12504,7 @@
             <a:r>
               <a:rPr lang="en-US" sz="2200" b="1" dirty="0">
                 <a:solidFill>
-                  <a:srgbClr val="2F5D50"/>
+                  <a:srgbClr val="1F5C4A"/>
                 </a:solidFill>
                 <a:latin typeface="Noto Serif KR" pitchFamily="34" charset="0"/>
                 <a:ea typeface="Noto Serif KR" pitchFamily="34" charset="-122"/>
@@ -7425,7 +12605,7 @@
             <a:r>
               <a:rPr lang="en-US" sz="2200" b="1" dirty="0">
                 <a:solidFill>
-                  <a:srgbClr val="2F5D50"/>
+                  <a:srgbClr val="1F5C4A"/>
                 </a:solidFill>
                 <a:latin typeface="Noto Serif KR" pitchFamily="34" charset="0"/>
                 <a:ea typeface="Noto Serif KR" pitchFamily="34" charset="-122"/>
@@ -7526,7 +12706,7 @@
             <a:r>
               <a:rPr lang="en-US" sz="1300" b="1" i="1" dirty="0">
                 <a:solidFill>
-                  <a:srgbClr val="2F5D50"/>
+                  <a:srgbClr val="1F5C4A"/>
                 </a:solidFill>
                 <a:latin typeface="Noto Sans KR" pitchFamily="34" charset="0"/>
                 <a:ea typeface="Noto Sans KR" pitchFamily="34" charset="-122"/>
@@ -7549,13 +12729,6 @@
 <file path=ppt/slides/slide4.xml><?xml version="1.0" encoding="utf-8"?>
 <p:sld xmlns:a="http://schemas.openxmlformats.org/drawingml/2006/main" xmlns:r="http://schemas.openxmlformats.org/officeDocument/2006/relationships" xmlns:p="http://schemas.openxmlformats.org/presentationml/2006/main">
   <p:cSld name="Slide 4">
-    <p:bg>
-      <p:bgPr>
-        <a:solidFill>
-          <a:srgbClr val="FAF7F0"/>
-        </a:solidFill>
-      </p:bgPr>
-    </p:bg>
     <p:spTree>
       <p:nvGrpSpPr>
         <p:cNvPr id="1" name=""/>
@@ -7597,7 +12770,7 @@
             <a:r>
               <a:rPr lang="en-US" sz="1100" b="1" spc="600" kern="0" dirty="0">
                 <a:solidFill>
-                  <a:srgbClr val="2F5D50"/>
+                  <a:srgbClr val="1F5C4A"/>
                 </a:solidFill>
                 <a:latin typeface="Noto Sans KR" pitchFamily="34" charset="0"/>
                 <a:ea typeface="Noto Sans KR" pitchFamily="34" charset="-122"/>
@@ -7700,7 +12873,7 @@
             <a:r>
               <a:rPr lang="en-US" sz="1000" i="1" dirty="0">
                 <a:solidFill>
-                  <a:srgbClr val="8A929B"/>
+                  <a:srgbClr val="6B6256"/>
                 </a:solidFill>
                 <a:latin typeface="Noto Serif KR" pitchFamily="34" charset="0"/>
                 <a:ea typeface="Noto Serif KR" pitchFamily="34" charset="-122"/>
@@ -7739,7 +12912,7 @@
             <a:r>
               <a:rPr lang="en-US" sz="1000" dirty="0">
                 <a:solidFill>
-                  <a:srgbClr val="8A929B"/>
+                  <a:srgbClr val="6B6256"/>
                 </a:solidFill>
                 <a:latin typeface="Noto Sans KR" pitchFamily="34" charset="0"/>
                 <a:ea typeface="Noto Sans KR" pitchFamily="34" charset="-122"/>
@@ -7766,11 +12939,11 @@
             <a:avLst/>
           </a:prstGeom>
           <a:solidFill>
-            <a:srgbClr val="FAF7F0"/>
+            <a:srgbClr val="FAF6EE"/>
           </a:solidFill>
           <a:ln w="19050">
             <a:solidFill>
-              <a:srgbClr val="2F5D50"/>
+              <a:srgbClr val="1F5C4A"/>
             </a:solidFill>
             <a:prstDash val="solid"/>
           </a:ln>
@@ -7826,7 +12999,7 @@
             <a:r>
               <a:rPr lang="en-US" sz="2600" b="1" dirty="0">
                 <a:solidFill>
-                  <a:srgbClr val="2F5D50"/>
+                  <a:srgbClr val="1F5C4A"/>
                 </a:solidFill>
                 <a:latin typeface="Noto Serif KR" pitchFamily="34" charset="0"/>
                 <a:ea typeface="Noto Serif KR" pitchFamily="34" charset="-122"/>
@@ -7865,7 +13038,7 @@
             <a:r>
               <a:rPr lang="en-US" sz="1100" b="1" spc="600" kern="0" dirty="0">
                 <a:solidFill>
-                  <a:srgbClr val="8A929B"/>
+                  <a:srgbClr val="6B6256"/>
                 </a:solidFill>
                 <a:latin typeface="Noto Sans KR" pitchFamily="34" charset="0"/>
                 <a:ea typeface="Noto Sans KR" pitchFamily="34" charset="-122"/>
@@ -7892,7 +13065,7 @@
             <a:avLst/>
           </a:prstGeom>
           <a:solidFill>
-            <a:srgbClr val="FAF7F0"/>
+            <a:srgbClr val="FAF6EE"/>
           </a:solidFill>
           <a:ln w="6350">
             <a:solidFill>
@@ -7931,7 +13104,7 @@
             <a:r>
               <a:rPr lang="en-US" sz="2200" b="1" dirty="0">
                 <a:solidFill>
-                  <a:srgbClr val="2F5D50"/>
+                  <a:srgbClr val="1F5C4A"/>
                 </a:solidFill>
                 <a:latin typeface="Noto Serif KR" pitchFamily="34" charset="0"/>
                 <a:ea typeface="Noto Serif KR" pitchFamily="34" charset="-122"/>
@@ -8037,7 +13210,7 @@
             <a:avLst/>
           </a:prstGeom>
           <a:solidFill>
-            <a:srgbClr val="FAF7F0"/>
+            <a:srgbClr val="FAF6EE"/>
           </a:solidFill>
           <a:ln w="6350">
             <a:solidFill>
@@ -8076,7 +13249,7 @@
             <a:r>
               <a:rPr lang="en-US" sz="2200" b="1" dirty="0">
                 <a:solidFill>
-                  <a:srgbClr val="2F5D50"/>
+                  <a:srgbClr val="1F5C4A"/>
                 </a:solidFill>
                 <a:latin typeface="Noto Serif KR" pitchFamily="34" charset="0"/>
                 <a:ea typeface="Noto Serif KR" pitchFamily="34" charset="-122"/>
@@ -8182,7 +13355,7 @@
             <a:avLst/>
           </a:prstGeom>
           <a:solidFill>
-            <a:srgbClr val="FAF7F0"/>
+            <a:srgbClr val="FAF6EE"/>
           </a:solidFill>
           <a:ln w="6350">
             <a:solidFill>
@@ -8221,7 +13394,7 @@
             <a:r>
               <a:rPr lang="en-US" sz="2200" b="1" dirty="0">
                 <a:solidFill>
-                  <a:srgbClr val="2F5D50"/>
+                  <a:srgbClr val="1F5C4A"/>
                 </a:solidFill>
                 <a:latin typeface="Noto Serif KR" pitchFamily="34" charset="0"/>
                 <a:ea typeface="Noto Serif KR" pitchFamily="34" charset="-122"/>
@@ -8323,13 +13496,6 @@
 <file path=ppt/slides/slide5.xml><?xml version="1.0" encoding="utf-8"?>
 <p:sld xmlns:a="http://schemas.openxmlformats.org/drawingml/2006/main" xmlns:r="http://schemas.openxmlformats.org/officeDocument/2006/relationships" xmlns:p="http://schemas.openxmlformats.org/presentationml/2006/main">
   <p:cSld name="Slide 5">
-    <p:bg>
-      <p:bgPr>
-        <a:solidFill>
-          <a:srgbClr val="FAF7F0"/>
-        </a:solidFill>
-      </p:bgPr>
-    </p:bg>
     <p:spTree>
       <p:nvGrpSpPr>
         <p:cNvPr id="1" name=""/>
@@ -8371,7 +13537,7 @@
             <a:r>
               <a:rPr lang="en-US" sz="1100" b="1" spc="600" kern="0" dirty="0">
                 <a:solidFill>
-                  <a:srgbClr val="2F5D50"/>
+                  <a:srgbClr val="1F5C4A"/>
                 </a:solidFill>
                 <a:latin typeface="Noto Sans KR" pitchFamily="34" charset="0"/>
                 <a:ea typeface="Noto Sans KR" pitchFamily="34" charset="-122"/>
@@ -8474,7 +13640,7 @@
             <a:r>
               <a:rPr lang="en-US" sz="1000" i="1" dirty="0">
                 <a:solidFill>
-                  <a:srgbClr val="8A929B"/>
+                  <a:srgbClr val="6B6256"/>
                 </a:solidFill>
                 <a:latin typeface="Noto Serif KR" pitchFamily="34" charset="0"/>
                 <a:ea typeface="Noto Serif KR" pitchFamily="34" charset="-122"/>
@@ -8513,7 +13679,7 @@
             <a:r>
               <a:rPr lang="en-US" sz="1000" dirty="0">
                 <a:solidFill>
-                  <a:srgbClr val="8A929B"/>
+                  <a:srgbClr val="6B6256"/>
                 </a:solidFill>
                 <a:latin typeface="Noto Sans KR" pitchFamily="34" charset="0"/>
                 <a:ea typeface="Noto Sans KR" pitchFamily="34" charset="-122"/>
@@ -8552,7 +13718,7 @@
             <a:r>
               <a:rPr lang="en-US" sz="1100" b="1" spc="600" kern="0" dirty="0">
                 <a:solidFill>
-                  <a:srgbClr val="8A929B"/>
+                  <a:srgbClr val="6B6256"/>
                 </a:solidFill>
                 <a:latin typeface="Noto Sans KR" pitchFamily="34" charset="0"/>
                 <a:ea typeface="Noto Sans KR" pitchFamily="34" charset="-122"/>
@@ -8591,7 +13757,7 @@
             <a:r>
               <a:rPr lang="en-US" sz="1100" b="1" spc="600" kern="0" dirty="0">
                 <a:solidFill>
-                  <a:srgbClr val="8A929B"/>
+                  <a:srgbClr val="6B6256"/>
                 </a:solidFill>
                 <a:latin typeface="Noto Sans KR" pitchFamily="34" charset="0"/>
                 <a:ea typeface="Noto Sans KR" pitchFamily="34" charset="-122"/>
@@ -8630,7 +13796,7 @@
             <a:r>
               <a:rPr lang="en-US" sz="1100" b="1" spc="600" kern="0" dirty="0">
                 <a:solidFill>
-                  <a:srgbClr val="8A929B"/>
+                  <a:srgbClr val="6B6256"/>
                 </a:solidFill>
                 <a:latin typeface="Noto Sans KR" pitchFamily="34" charset="0"/>
                 <a:ea typeface="Noto Sans KR" pitchFamily="34" charset="-122"/>
@@ -8739,7 +13905,7 @@
             <a:r>
               <a:rPr lang="en-US" sz="1300" b="1" dirty="0">
                 <a:solidFill>
-                  <a:srgbClr val="2F5D50"/>
+                  <a:srgbClr val="1F5C4A"/>
                 </a:solidFill>
                 <a:latin typeface="Noto Sans KR" pitchFamily="34" charset="0"/>
                 <a:ea typeface="Noto Sans KR" pitchFamily="34" charset="-122"/>
@@ -8910,7 +14076,7 @@
             <a:r>
               <a:rPr lang="en-US" sz="1300" b="1" dirty="0">
                 <a:solidFill>
-                  <a:srgbClr val="2F5D50"/>
+                  <a:srgbClr val="1F5C4A"/>
                 </a:solidFill>
                 <a:latin typeface="Noto Sans KR" pitchFamily="34" charset="0"/>
                 <a:ea typeface="Noto Sans KR" pitchFamily="34" charset="-122"/>
@@ -9081,7 +14247,7 @@
             <a:r>
               <a:rPr lang="en-US" sz="1300" b="1" dirty="0">
                 <a:solidFill>
-                  <a:srgbClr val="2F5D50"/>
+                  <a:srgbClr val="1F5C4A"/>
                 </a:solidFill>
                 <a:latin typeface="Noto Sans KR" pitchFamily="34" charset="0"/>
                 <a:ea typeface="Noto Sans KR" pitchFamily="34" charset="-122"/>
@@ -9182,7 +14348,7 @@
             <a:r>
               <a:rPr lang="en-US" sz="1100" b="1" spc="600" kern="0" dirty="0">
                 <a:solidFill>
-                  <a:srgbClr val="8A929B"/>
+                  <a:srgbClr val="6B6256"/>
                 </a:solidFill>
                 <a:latin typeface="Noto Sans KR" pitchFamily="34" charset="0"/>
                 <a:ea typeface="Noto Sans KR" pitchFamily="34" charset="-122"/>
@@ -9244,13 +14410,6 @@
 <file path=ppt/slides/slide6.xml><?xml version="1.0" encoding="utf-8"?>
 <p:sld xmlns:a="http://schemas.openxmlformats.org/drawingml/2006/main" xmlns:r="http://schemas.openxmlformats.org/officeDocument/2006/relationships" xmlns:p="http://schemas.openxmlformats.org/presentationml/2006/main">
   <p:cSld name="Slide 6">
-    <p:bg>
-      <p:bgPr>
-        <a:solidFill>
-          <a:srgbClr val="FAF7F0"/>
-        </a:solidFill>
-      </p:bgPr>
-    </p:bg>
     <p:spTree>
       <p:nvGrpSpPr>
         <p:cNvPr id="1" name=""/>
@@ -9292,7 +14451,7 @@
             <a:r>
               <a:rPr lang="en-US" sz="1100" b="1" spc="600" kern="0" dirty="0">
                 <a:solidFill>
-                  <a:srgbClr val="2F5D50"/>
+                  <a:srgbClr val="1F5C4A"/>
                 </a:solidFill>
                 <a:latin typeface="Noto Sans KR" pitchFamily="34" charset="0"/>
                 <a:ea typeface="Noto Sans KR" pitchFamily="34" charset="-122"/>
@@ -9395,7 +14554,7 @@
             <a:r>
               <a:rPr lang="en-US" sz="1000" i="1" dirty="0">
                 <a:solidFill>
-                  <a:srgbClr val="8A929B"/>
+                  <a:srgbClr val="6B6256"/>
                 </a:solidFill>
                 <a:latin typeface="Noto Serif KR" pitchFamily="34" charset="0"/>
                 <a:ea typeface="Noto Serif KR" pitchFamily="34" charset="-122"/>
@@ -9434,7 +14593,7 @@
             <a:r>
               <a:rPr lang="en-US" sz="1000" dirty="0">
                 <a:solidFill>
-                  <a:srgbClr val="8A929B"/>
+                  <a:srgbClr val="6B6256"/>
                 </a:solidFill>
                 <a:latin typeface="Noto Sans KR" pitchFamily="34" charset="0"/>
                 <a:ea typeface="Noto Sans KR" pitchFamily="34" charset="-122"/>
@@ -9473,7 +14632,7 @@
             <a:r>
               <a:rPr lang="en-US" sz="1200" b="1" spc="600" kern="0" dirty="0">
                 <a:solidFill>
-                  <a:srgbClr val="2F5D50"/>
+                  <a:srgbClr val="1F5C4A"/>
                 </a:solidFill>
                 <a:latin typeface="Noto Sans KR" pitchFamily="34" charset="0"/>
                 <a:ea typeface="Noto Sans KR" pitchFamily="34" charset="-122"/>
@@ -9502,7 +14661,7 @@
           <a:noFill/>
           <a:ln w="12700">
             <a:solidFill>
-              <a:srgbClr val="2F5D50"/>
+              <a:srgbClr val="1F5C4A"/>
             </a:solidFill>
             <a:prstDash val="solid"/>
           </a:ln>
@@ -9637,7 +14796,7 @@
             <a:r>
               <a:rPr lang="en-US" sz="1200" b="1" spc="600" kern="0" dirty="0">
                 <a:solidFill>
-                  <a:srgbClr val="2F5D50"/>
+                  <a:srgbClr val="1F5C4A"/>
                 </a:solidFill>
                 <a:latin typeface="Noto Sans KR" pitchFamily="34" charset="0"/>
                 <a:ea typeface="Noto Sans KR" pitchFamily="34" charset="-122"/>
@@ -9666,7 +14825,7 @@
           <a:noFill/>
           <a:ln w="12700">
             <a:solidFill>
-              <a:srgbClr val="2F5D50"/>
+              <a:srgbClr val="1F5C4A"/>
             </a:solidFill>
             <a:prstDash val="solid"/>
           </a:ln>
@@ -9821,7 +14980,7 @@
             <a:r>
               <a:rPr lang="en-US" sz="1200" b="1" spc="600" kern="0" dirty="0">
                 <a:solidFill>
-                  <a:srgbClr val="2F5D50"/>
+                  <a:srgbClr val="1F5C4A"/>
                 </a:solidFill>
                 <a:latin typeface="Noto Sans KR" pitchFamily="34" charset="0"/>
                 <a:ea typeface="Noto Sans KR" pitchFamily="34" charset="-122"/>
@@ -9850,7 +15009,7 @@
           <a:noFill/>
           <a:ln w="12700">
             <a:solidFill>
-              <a:srgbClr val="2F5D50"/>
+              <a:srgbClr val="1F5C4A"/>
             </a:solidFill>
             <a:prstDash val="solid"/>
           </a:ln>
@@ -9993,13 +15152,13 @@
             <a:avLst/>
           </a:prstGeom>
           <a:solidFill>
-            <a:srgbClr val="2F5D50">
+            <a:srgbClr val="1F5C4A">
               <a:alpha val="8000"/>
             </a:srgbClr>
           </a:solidFill>
           <a:ln w="6350">
             <a:solidFill>
-              <a:srgbClr val="2F5D50">
+              <a:srgbClr val="1F5C4A">
                 <a:alpha val="40000"/>
               </a:srgbClr>
             </a:solidFill>
@@ -10034,7 +15193,7 @@
             <a:r>
               <a:rPr lang="en-US" sz="1600" b="1" dirty="0">
                 <a:solidFill>
-                  <a:srgbClr val="2F5D50"/>
+                  <a:srgbClr val="1F5C4A"/>
                 </a:solidFill>
                 <a:latin typeface="Noto Sans KR" pitchFamily="34" charset="0"/>
                 <a:ea typeface="Noto Sans KR" pitchFamily="34" charset="-122"/>
@@ -10071,13 +15230,6 @@
 <file path=ppt/slides/slide7.xml><?xml version="1.0" encoding="utf-8"?>
 <p:sld xmlns:a="http://schemas.openxmlformats.org/drawingml/2006/main" xmlns:r="http://schemas.openxmlformats.org/officeDocument/2006/relationships" xmlns:p="http://schemas.openxmlformats.org/presentationml/2006/main">
   <p:cSld name="Slide 7">
-    <p:bg>
-      <p:bgPr>
-        <a:solidFill>
-          <a:srgbClr val="FAF7F0"/>
-        </a:solidFill>
-      </p:bgPr>
-    </p:bg>
     <p:spTree>
       <p:nvGrpSpPr>
         <p:cNvPr id="1" name=""/>
@@ -10119,7 +15271,7 @@
             <a:r>
               <a:rPr lang="en-US" sz="1100" b="1" spc="600" kern="0" dirty="0">
                 <a:solidFill>
-                  <a:srgbClr val="2F5D50"/>
+                  <a:srgbClr val="1F5C4A"/>
                 </a:solidFill>
                 <a:latin typeface="Noto Sans KR" pitchFamily="34" charset="0"/>
                 <a:ea typeface="Noto Sans KR" pitchFamily="34" charset="-122"/>
@@ -10222,7 +15374,7 @@
             <a:r>
               <a:rPr lang="en-US" sz="1000" i="1" dirty="0">
                 <a:solidFill>
-                  <a:srgbClr val="8A929B"/>
+                  <a:srgbClr val="6B6256"/>
                 </a:solidFill>
                 <a:latin typeface="Noto Serif KR" pitchFamily="34" charset="0"/>
                 <a:ea typeface="Noto Serif KR" pitchFamily="34" charset="-122"/>
@@ -10261,7 +15413,7 @@
             <a:r>
               <a:rPr lang="en-US" sz="1000" dirty="0">
                 <a:solidFill>
-                  <a:srgbClr val="8A929B"/>
+                  <a:srgbClr val="6B6256"/>
                 </a:solidFill>
                 <a:latin typeface="Noto Sans KR" pitchFamily="34" charset="0"/>
                 <a:ea typeface="Noto Sans KR" pitchFamily="34" charset="-122"/>
@@ -10288,11 +15440,11 @@
             <a:avLst/>
           </a:prstGeom>
           <a:solidFill>
-            <a:srgbClr val="FAF7F0"/>
+            <a:srgbClr val="FAF6EE"/>
           </a:solidFill>
           <a:ln w="12700">
             <a:solidFill>
-              <a:srgbClr val="2F5D50"/>
+              <a:srgbClr val="1F5C4A"/>
             </a:solidFill>
             <a:prstDash val="solid"/>
           </a:ln>
@@ -10325,7 +15477,7 @@
             <a:r>
               <a:rPr lang="en-US" sz="2800" dirty="0">
                 <a:solidFill>
-                  <a:srgbClr val="2F5D50"/>
+                  <a:srgbClr val="1F5C4A"/>
                 </a:solidFill>
                 <a:latin typeface="Noto Serif KR" pitchFamily="34" charset="0"/>
                 <a:ea typeface="Noto Serif KR" pitchFamily="34" charset="-122"/>
@@ -10353,7 +15505,7 @@
             <a:r>
               <a:rPr lang="en-US" sz="2800" dirty="0">
                 <a:solidFill>
-                  <a:srgbClr val="2F5D50"/>
+                  <a:srgbClr val="1F5C4A"/>
                 </a:solidFill>
                 <a:latin typeface="Noto Serif KR" pitchFamily="34" charset="0"/>
                 <a:ea typeface="Noto Serif KR" pitchFamily="34" charset="-122"/>
@@ -10392,7 +15544,7 @@
             <a:r>
               <a:rPr lang="en-US" sz="1100" b="1" spc="600" kern="0" dirty="0">
                 <a:solidFill>
-                  <a:srgbClr val="2F5D50"/>
+                  <a:srgbClr val="1F5C4A"/>
                 </a:solidFill>
                 <a:latin typeface="Noto Sans KR" pitchFamily="34" charset="0"/>
                 <a:ea typeface="Noto Sans KR" pitchFamily="34" charset="-122"/>
@@ -10434,7 +15586,7 @@
             <a:r>
               <a:rPr lang="en-US" sz="1200" dirty="0">
                 <a:solidFill>
-                  <a:srgbClr val="8A929B"/>
+                  <a:srgbClr val="6B6256"/>
                 </a:solidFill>
                 <a:latin typeface="Noto Sans KR" pitchFamily="34" charset="0"/>
                 <a:ea typeface="Noto Sans KR" pitchFamily="34" charset="-122"/>
@@ -10471,7 +15623,7 @@
             <a:r>
               <a:rPr lang="en-US" sz="1200" dirty="0">
                 <a:solidFill>
-                  <a:srgbClr val="8A929B"/>
+                  <a:srgbClr val="6B6256"/>
                 </a:solidFill>
                 <a:latin typeface="Noto Sans KR" pitchFamily="34" charset="0"/>
                 <a:ea typeface="Noto Sans KR" pitchFamily="34" charset="-122"/>
@@ -10508,7 +15660,7 @@
             <a:r>
               <a:rPr lang="en-US" sz="1200" dirty="0">
                 <a:solidFill>
-                  <a:srgbClr val="8A929B"/>
+                  <a:srgbClr val="6B6256"/>
                 </a:solidFill>
                 <a:latin typeface="Noto Sans KR" pitchFamily="34" charset="0"/>
                 <a:ea typeface="Noto Sans KR" pitchFamily="34" charset="-122"/>
@@ -10525,7 +15677,7 @@
             <a:r>
               <a:rPr lang="en-US" sz="1200" b="1" dirty="0">
                 <a:solidFill>
-                  <a:srgbClr val="2F5D50"/>
+                  <a:srgbClr val="1F5C4A"/>
                 </a:solidFill>
                 <a:latin typeface="Noto Sans KR" pitchFamily="34" charset="0"/>
                 <a:ea typeface="Noto Sans KR" pitchFamily="34" charset="-122"/>
@@ -10545,7 +15697,7 @@
             <a:r>
               <a:rPr lang="en-US" sz="1200" dirty="0">
                 <a:solidFill>
-                  <a:srgbClr val="8A929B"/>
+                  <a:srgbClr val="6B6256"/>
                 </a:solidFill>
                 <a:latin typeface="Noto Sans KR" pitchFamily="34" charset="0"/>
                 <a:ea typeface="Noto Sans KR" pitchFamily="34" charset="-122"/>
@@ -10582,7 +15734,7 @@
             <a:r>
               <a:rPr lang="en-US" sz="1200" dirty="0">
                 <a:solidFill>
-                  <a:srgbClr val="8A929B"/>
+                  <a:srgbClr val="6B6256"/>
                 </a:solidFill>
                 <a:latin typeface="Noto Sans KR" pitchFamily="34" charset="0"/>
                 <a:ea typeface="Noto Sans KR" pitchFamily="34" charset="-122"/>
@@ -10638,7 +15790,7 @@
             <a:r>
               <a:rPr lang="en-US" sz="1100" b="1" spc="600" kern="0" dirty="0">
                 <a:solidFill>
-                  <a:srgbClr val="2F5D50"/>
+                  <a:srgbClr val="1F5C4A"/>
                 </a:solidFill>
                 <a:latin typeface="Noto Sans KR" pitchFamily="34" charset="0"/>
                 <a:ea typeface="Noto Sans KR" pitchFamily="34" charset="-122"/>
@@ -10680,7 +15832,7 @@
             <a:r>
               <a:rPr lang="en-US" sz="1200" b="1" dirty="0">
                 <a:solidFill>
-                  <a:srgbClr val="8A929B"/>
+                  <a:srgbClr val="6B6256"/>
                 </a:solidFill>
                 <a:latin typeface="Noto Sans KR" pitchFamily="34" charset="0"/>
                 <a:ea typeface="Noto Sans KR" pitchFamily="34" charset="-122"/>
@@ -10717,7 +15869,7 @@
             <a:r>
               <a:rPr lang="en-US" sz="1200" b="1" dirty="0">
                 <a:solidFill>
-                  <a:srgbClr val="8A929B"/>
+                  <a:srgbClr val="6B6256"/>
                 </a:solidFill>
                 <a:latin typeface="Noto Sans KR" pitchFamily="34" charset="0"/>
                 <a:ea typeface="Noto Sans KR" pitchFamily="34" charset="-122"/>
@@ -10771,7 +15923,7 @@
             <a:r>
               <a:rPr lang="en-US" sz="1200" b="1" dirty="0">
                 <a:solidFill>
-                  <a:srgbClr val="2F5D50"/>
+                  <a:srgbClr val="1F5C4A"/>
                 </a:solidFill>
                 <a:latin typeface="Noto Sans KR" pitchFamily="34" charset="0"/>
                 <a:ea typeface="Noto Sans KR" pitchFamily="34" charset="-122"/>
@@ -10808,7 +15960,7 @@
             <a:r>
               <a:rPr lang="en-US" sz="1200" b="1" dirty="0">
                 <a:solidFill>
-                  <a:srgbClr val="2F5D50"/>
+                  <a:srgbClr val="1F5C4A"/>
                 </a:solidFill>
                 <a:latin typeface="Noto Sans KR" pitchFamily="34" charset="0"/>
                 <a:ea typeface="Noto Sans KR" pitchFamily="34" charset="-122"/>
@@ -10852,13 +16004,13 @@
             <a:avLst/>
           </a:prstGeom>
           <a:solidFill>
-            <a:srgbClr val="2F5D50">
+            <a:srgbClr val="1F5C4A">
               <a:alpha val="8000"/>
             </a:srgbClr>
           </a:solidFill>
           <a:ln w="6350">
             <a:solidFill>
-              <a:srgbClr val="2F5D50">
+              <a:srgbClr val="1F5C4A">
                 <a:alpha val="40000"/>
               </a:srgbClr>
             </a:solidFill>
@@ -10893,7 +16045,7 @@
             <a:r>
               <a:rPr lang="en-US" sz="1600" b="1" dirty="0">
                 <a:solidFill>
-                  <a:srgbClr val="2F5D50"/>
+                  <a:srgbClr val="1F5C4A"/>
                 </a:solidFill>
                 <a:latin typeface="Noto Sans KR" pitchFamily="34" charset="0"/>
                 <a:ea typeface="Noto Sans KR" pitchFamily="34" charset="-122"/>
@@ -10930,13 +16082,6 @@
 <file path=ppt/slides/slide8.xml><?xml version="1.0" encoding="utf-8"?>
 <p:sld xmlns:a="http://schemas.openxmlformats.org/drawingml/2006/main" xmlns:r="http://schemas.openxmlformats.org/officeDocument/2006/relationships" xmlns:p="http://schemas.openxmlformats.org/presentationml/2006/main">
   <p:cSld name="Slide 8">
-    <p:bg>
-      <p:bgPr>
-        <a:solidFill>
-          <a:srgbClr val="FAF7F0"/>
-        </a:solidFill>
-      </p:bgPr>
-    </p:bg>
     <p:spTree>
       <p:nvGrpSpPr>
         <p:cNvPr id="1" name=""/>
@@ -10978,7 +16123,7 @@
             <a:r>
               <a:rPr lang="en-US" sz="1100" b="1" spc="600" kern="0" dirty="0">
                 <a:solidFill>
-                  <a:srgbClr val="2F5D50"/>
+                  <a:srgbClr val="1F5C4A"/>
                 </a:solidFill>
                 <a:latin typeface="Noto Sans KR" pitchFamily="34" charset="0"/>
                 <a:ea typeface="Noto Sans KR" pitchFamily="34" charset="-122"/>
@@ -11081,7 +16226,7 @@
             <a:r>
               <a:rPr lang="en-US" sz="1000" i="1" dirty="0">
                 <a:solidFill>
-                  <a:srgbClr val="8A929B"/>
+                  <a:srgbClr val="6B6256"/>
                 </a:solidFill>
                 <a:latin typeface="Noto Serif KR" pitchFamily="34" charset="0"/>
                 <a:ea typeface="Noto Serif KR" pitchFamily="34" charset="-122"/>
@@ -11120,7 +16265,7 @@
             <a:r>
               <a:rPr lang="en-US" sz="1000" dirty="0">
                 <a:solidFill>
-                  <a:srgbClr val="8A929B"/>
+                  <a:srgbClr val="6B6256"/>
                 </a:solidFill>
                 <a:latin typeface="Noto Sans KR" pitchFamily="34" charset="0"/>
                 <a:ea typeface="Noto Sans KR" pitchFamily="34" charset="-122"/>
@@ -11159,7 +16304,7 @@
             <a:r>
               <a:rPr lang="en-US" sz="1200" b="1" spc="400" kern="0" dirty="0">
                 <a:solidFill>
-                  <a:srgbClr val="8A929B"/>
+                  <a:srgbClr val="6B6256"/>
                 </a:solidFill>
                 <a:latin typeface="Noto Sans KR" pitchFamily="34" charset="0"/>
                 <a:ea typeface="Noto Sans KR" pitchFamily="34" charset="-122"/>
@@ -11198,7 +16343,7 @@
             <a:r>
               <a:rPr lang="en-US" sz="1200" b="1" spc="400" kern="0" dirty="0">
                 <a:solidFill>
-                  <a:srgbClr val="8A929B"/>
+                  <a:srgbClr val="6B6256"/>
                 </a:solidFill>
                 <a:latin typeface="Noto Sans KR" pitchFamily="34" charset="0"/>
                 <a:ea typeface="Noto Sans KR" pitchFamily="34" charset="-122"/>
@@ -11237,7 +16382,7 @@
             <a:r>
               <a:rPr lang="en-US" sz="1200" b="1" spc="400" kern="0" dirty="0">
                 <a:solidFill>
-                  <a:srgbClr val="2F5D50"/>
+                  <a:srgbClr val="1F5C4A"/>
                 </a:solidFill>
                 <a:latin typeface="Noto Sans KR" pitchFamily="34" charset="0"/>
                 <a:ea typeface="Noto Sans KR" pitchFamily="34" charset="-122"/>
@@ -11388,7 +16533,7 @@
             <a:r>
               <a:rPr lang="en-US" sz="1100" b="1" dirty="0">
                 <a:solidFill>
-                  <a:srgbClr val="2F5D50"/>
+                  <a:srgbClr val="1F5C4A"/>
                 </a:solidFill>
                 <a:latin typeface="Noto Sans KR" pitchFamily="34" charset="0"/>
                 <a:ea typeface="Noto Sans KR" pitchFamily="34" charset="-122"/>
@@ -11539,7 +16684,7 @@
             <a:r>
               <a:rPr lang="en-US" sz="1100" b="1" dirty="0">
                 <a:solidFill>
-                  <a:srgbClr val="2F5D50"/>
+                  <a:srgbClr val="1F5C4A"/>
                 </a:solidFill>
                 <a:latin typeface="Noto Sans KR" pitchFamily="34" charset="0"/>
                 <a:ea typeface="Noto Sans KR" pitchFamily="34" charset="-122"/>
@@ -11690,7 +16835,7 @@
             <a:r>
               <a:rPr lang="en-US" sz="1100" b="1" dirty="0">
                 <a:solidFill>
-                  <a:srgbClr val="2F5D50"/>
+                  <a:srgbClr val="1F5C4A"/>
                 </a:solidFill>
                 <a:latin typeface="Noto Sans KR" pitchFamily="34" charset="0"/>
                 <a:ea typeface="Noto Sans KR" pitchFamily="34" charset="-122"/>
@@ -11861,7 +17006,7 @@
             <a:r>
               <a:rPr lang="en-US" sz="1100" b="1" dirty="0">
                 <a:solidFill>
-                  <a:srgbClr val="2F5D50"/>
+                  <a:srgbClr val="1F5C4A"/>
                 </a:solidFill>
                 <a:latin typeface="Noto Sans KR" pitchFamily="34" charset="0"/>
                 <a:ea typeface="Noto Sans KR" pitchFamily="34" charset="-122"/>
@@ -11881,7 +17026,7 @@
             <a:r>
               <a:rPr lang="en-US" sz="1100" b="1" dirty="0">
                 <a:solidFill>
-                  <a:srgbClr val="2F5D50"/>
+                  <a:srgbClr val="1F5C4A"/>
                 </a:solidFill>
                 <a:latin typeface="Noto Sans KR" pitchFamily="34" charset="0"/>
                 <a:ea typeface="Noto Sans KR" pitchFamily="34" charset="-122"/>
@@ -12032,7 +17177,7 @@
             <a:r>
               <a:rPr lang="en-US" sz="1100" b="1" dirty="0">
                 <a:solidFill>
-                  <a:srgbClr val="2F5D50"/>
+                  <a:srgbClr val="1F5C4A"/>
                 </a:solidFill>
                 <a:latin typeface="Noto Sans KR" pitchFamily="34" charset="0"/>
                 <a:ea typeface="Noto Sans KR" pitchFamily="34" charset="-122"/>
@@ -12055,13 +17200,6 @@
 <file path=ppt/slides/slide9.xml><?xml version="1.0" encoding="utf-8"?>
 <p:sld xmlns:a="http://schemas.openxmlformats.org/drawingml/2006/main" xmlns:r="http://schemas.openxmlformats.org/officeDocument/2006/relationships" xmlns:p="http://schemas.openxmlformats.org/presentationml/2006/main">
   <p:cSld name="Slide 9">
-    <p:bg>
-      <p:bgPr>
-        <a:solidFill>
-          <a:srgbClr val="FAF7F0"/>
-        </a:solidFill>
-      </p:bgPr>
-    </p:bg>
     <p:spTree>
       <p:nvGrpSpPr>
         <p:cNvPr id="1" name=""/>
@@ -12103,7 +17241,7 @@
             <a:r>
               <a:rPr lang="en-US" sz="1100" b="1" spc="600" kern="0" dirty="0">
                 <a:solidFill>
-                  <a:srgbClr val="2F5D50"/>
+                  <a:srgbClr val="1F5C4A"/>
                 </a:solidFill>
                 <a:latin typeface="Noto Sans KR" pitchFamily="34" charset="0"/>
                 <a:ea typeface="Noto Sans KR" pitchFamily="34" charset="-122"/>
@@ -12206,7 +17344,7 @@
             <a:r>
               <a:rPr lang="en-US" sz="1000" i="1" dirty="0">
                 <a:solidFill>
-                  <a:srgbClr val="8A929B"/>
+                  <a:srgbClr val="6B6256"/>
                 </a:solidFill>
                 <a:latin typeface="Noto Serif KR" pitchFamily="34" charset="0"/>
                 <a:ea typeface="Noto Serif KR" pitchFamily="34" charset="-122"/>
@@ -12245,7 +17383,7 @@
             <a:r>
               <a:rPr lang="en-US" sz="1000" dirty="0">
                 <a:solidFill>
-                  <a:srgbClr val="8A929B"/>
+                  <a:srgbClr val="6B6256"/>
                 </a:solidFill>
                 <a:latin typeface="Noto Sans KR" pitchFamily="34" charset="0"/>
                 <a:ea typeface="Noto Sans KR" pitchFamily="34" charset="-122"/>
@@ -12284,7 +17422,7 @@
             <a:r>
               <a:rPr lang="en-US" sz="1200" b="1" spc="600" kern="0" dirty="0">
                 <a:solidFill>
-                  <a:srgbClr val="2F5D50"/>
+                  <a:srgbClr val="1F5C4A"/>
                 </a:solidFill>
                 <a:latin typeface="Noto Sans KR" pitchFamily="34" charset="0"/>
                 <a:ea typeface="Noto Sans KR" pitchFamily="34" charset="-122"/>
@@ -12313,7 +17451,7 @@
           <a:noFill/>
           <a:ln w="12700">
             <a:solidFill>
-              <a:srgbClr val="2F5D50"/>
+              <a:srgbClr val="1F5C4A"/>
             </a:solidFill>
             <a:prstDash val="solid"/>
           </a:ln>
@@ -12349,7 +17487,7 @@
             <a:r>
               <a:rPr lang="en-US" sz="1400" b="1" dirty="0">
                 <a:solidFill>
-                  <a:srgbClr val="8A929B"/>
+                  <a:srgbClr val="6B6256"/>
                 </a:solidFill>
                 <a:latin typeface="Noto Sans KR" pitchFamily="34" charset="0"/>
                 <a:ea typeface="Noto Sans KR" pitchFamily="34" charset="-122"/>
@@ -12386,7 +17524,7 @@
             <a:r>
               <a:rPr lang="en-US" sz="1400" b="1" dirty="0">
                 <a:solidFill>
-                  <a:srgbClr val="8A929B"/>
+                  <a:srgbClr val="6B6256"/>
                 </a:solidFill>
                 <a:latin typeface="Noto Sans KR" pitchFamily="34" charset="0"/>
                 <a:ea typeface="Noto Sans KR" pitchFamily="34" charset="-122"/>
@@ -12423,7 +17561,7 @@
             <a:r>
               <a:rPr lang="en-US" sz="1400" b="1" dirty="0">
                 <a:solidFill>
-                  <a:srgbClr val="8A929B"/>
+                  <a:srgbClr val="6B6256"/>
                 </a:solidFill>
                 <a:latin typeface="Noto Sans KR" pitchFamily="34" charset="0"/>
                 <a:ea typeface="Noto Sans KR" pitchFamily="34" charset="-122"/>
@@ -12460,7 +17598,7 @@
             <a:r>
               <a:rPr lang="en-US" sz="1400" b="1" dirty="0">
                 <a:solidFill>
-                  <a:srgbClr val="8A929B"/>
+                  <a:srgbClr val="6B6256"/>
                 </a:solidFill>
                 <a:latin typeface="Noto Sans KR" pitchFamily="34" charset="0"/>
                 <a:ea typeface="Noto Sans KR" pitchFamily="34" charset="-122"/>
@@ -12514,7 +17652,7 @@
             <a:r>
               <a:rPr lang="en-US" sz="1400" b="1" dirty="0">
                 <a:solidFill>
-                  <a:srgbClr val="2F5D50"/>
+                  <a:srgbClr val="1F5C4A"/>
                 </a:solidFill>
                 <a:latin typeface="Noto Sans KR" pitchFamily="34" charset="0"/>
                 <a:ea typeface="Noto Sans KR" pitchFamily="34" charset="-122"/>
@@ -12551,7 +17689,7 @@
             <a:r>
               <a:rPr lang="en-US" sz="1400" b="1" dirty="0">
                 <a:solidFill>
-                  <a:srgbClr val="2F5D50"/>
+                  <a:srgbClr val="1F5C4A"/>
                 </a:solidFill>
                 <a:latin typeface="Noto Sans KR" pitchFamily="34" charset="0"/>
                 <a:ea typeface="Noto Sans KR" pitchFamily="34" charset="-122"/>
@@ -12588,7 +17726,7 @@
             <a:r>
               <a:rPr lang="en-US" sz="1400" b="1" dirty="0">
                 <a:solidFill>
-                  <a:srgbClr val="2F5D50"/>
+                  <a:srgbClr val="1F5C4A"/>
                 </a:solidFill>
                 <a:latin typeface="Noto Sans KR" pitchFamily="34" charset="0"/>
                 <a:ea typeface="Noto Sans KR" pitchFamily="34" charset="-122"/>
@@ -12644,7 +17782,7 @@
             <a:r>
               <a:rPr lang="en-US" sz="1200" b="1" spc="600" kern="0" dirty="0">
                 <a:solidFill>
-                  <a:srgbClr val="2F5D50"/>
+                  <a:srgbClr val="1F5C4A"/>
                 </a:solidFill>
                 <a:latin typeface="Noto Sans KR" pitchFamily="34" charset="0"/>
                 <a:ea typeface="Noto Sans KR" pitchFamily="34" charset="-122"/>
@@ -12673,7 +17811,7 @@
           <a:noFill/>
           <a:ln w="12700">
             <a:solidFill>
-              <a:srgbClr val="2F5D50"/>
+              <a:srgbClr val="1F5C4A"/>
             </a:solidFill>
             <a:prstDash val="solid"/>
           </a:ln>
@@ -12709,7 +17847,7 @@
             <a:r>
               <a:rPr lang="en-US" sz="1100" b="1" spc="400" kern="0" dirty="0">
                 <a:solidFill>
-                  <a:srgbClr val="8A929B"/>
+                  <a:srgbClr val="6B6256"/>
                 </a:solidFill>
                 <a:latin typeface="Noto Sans KR" pitchFamily="34" charset="0"/>
                 <a:ea typeface="Noto Sans KR" pitchFamily="34" charset="-122"/>
@@ -12803,7 +17941,7 @@
             <a:r>
               <a:rPr lang="en-US" sz="1100" b="1" spc="400" kern="0" dirty="0">
                 <a:solidFill>
-                  <a:srgbClr val="2F5D50"/>
+                  <a:srgbClr val="1F5C4A"/>
                 </a:solidFill>
                 <a:latin typeface="Noto Sans KR" pitchFamily="34" charset="0"/>
                 <a:ea typeface="Noto Sans KR" pitchFamily="34" charset="-122"/>
@@ -12899,7 +18037,7 @@
             <a:r>
               <a:rPr lang="en-US" sz="1400" b="1" i="1" dirty="0">
                 <a:solidFill>
-                  <a:srgbClr val="2F5D50"/>
+                  <a:srgbClr val="1F5C4A"/>
                 </a:solidFill>
                 <a:latin typeface="Noto Serif KR" pitchFamily="34" charset="0"/>
                 <a:ea typeface="Noto Serif KR" pitchFamily="34" charset="-122"/>

--- a/fitly/발표.pptx
+++ b/fitly/발표.pptx
@@ -515,7 +515,7 @@
           <a:p>
             <a:r>
               <a:rPr lang="en-US" dirty="0"/>
-              <a:t>안녕하세요, [팀명] 입니다. 저희가 만든 Fitly 를 소개해 드리겠습니다.</a:t>
+              <a:t>안녕하세요, 편돌이들 팀입니다. 저희가 만든 Fitly 를 소개해 드리겠습니다.</a:t>
             </a:r>
             <a:endParaRPr lang="en-US" dirty="0"/>
           </a:p>
@@ -7049,7 +7049,7 @@
         <p:spPr>
           <a:xfrm>
             <a:off x="457200" y="3200400"/>
-            <a:ext cx="8229600" cy="1371600"/>
+            <a:ext cx="8229600" cy="1463040"/>
           </a:xfrm>
           <a:prstGeom prst="rect">
             <a:avLst/>
@@ -7096,7 +7096,7 @@
               <a:buNone/>
             </a:pPr>
             <a:r>
-              <a:rPr lang="en-US" sz="1200" dirty="0">
+              <a:rPr lang="en-US" sz="1300" dirty="0">
                 <a:solidFill>
                   <a:srgbClr val="6B6256"/>
                 </a:solidFill>
@@ -7104,7 +7104,136 @@
                 <a:ea typeface="Noto Sans KR" pitchFamily="34" charset="-122"/>
                 <a:cs typeface="Noto Sans KR" pitchFamily="34" charset="-120"/>
               </a:rPr>
-              <a:t>팀명: [팀명]   ·   2026.05</a:t>
+              <a:t>팀명 </a:t>
+            </a:r>
+            <a:pPr algn="ctr" indent="0" marL="0">
+              <a:buNone/>
+            </a:pPr>
+            <a:r>
+              <a:rPr lang="en-US" sz="1300" b="1" dirty="0">
+                <a:solidFill>
+                  <a:srgbClr val="1A2027"/>
+                </a:solidFill>
+                <a:latin typeface="Noto Sans KR" pitchFamily="34" charset="0"/>
+                <a:ea typeface="Noto Sans KR" pitchFamily="34" charset="-122"/>
+                <a:cs typeface="Noto Sans KR" pitchFamily="34" charset="-120"/>
+              </a:rPr>
+              <a:t>편돌이들</a:t>
+            </a:r>
+            <a:pPr algn="ctr" indent="0" marL="0">
+              <a:buNone/>
+            </a:pPr>
+            <a:r>
+              <a:rPr lang="en-US" sz="1300" dirty="0">
+                <a:solidFill>
+                  <a:srgbClr val="6B6256"/>
+                </a:solidFill>
+                <a:latin typeface="Noto Sans KR" pitchFamily="34" charset="0"/>
+                <a:ea typeface="Noto Sans KR" pitchFamily="34" charset="-122"/>
+                <a:cs typeface="Noto Sans KR" pitchFamily="34" charset="-120"/>
+              </a:rPr>
+              <a:t>   ·   2026.05</a:t>
+            </a:r>
+            <a:endParaRPr lang="en-US" sz="1400" dirty="0"/>
+          </a:p>
+          <a:p>
+            <a:pPr algn="ctr" indent="0" marL="0">
+              <a:buNone/>
+            </a:pPr>
+            <a:r>
+              <a:rPr lang="en-US" sz="400" dirty="0">
+                <a:solidFill>
+                  <a:srgbClr val="000000"/>
+                </a:solidFill>
+              </a:rPr>
+              <a:t> </a:t>
+            </a:r>
+            <a:endParaRPr lang="en-US" sz="1400" dirty="0"/>
+          </a:p>
+          <a:p>
+            <a:pPr algn="ctr" indent="0" marL="0">
+              <a:buNone/>
+            </a:pPr>
+            <a:r>
+              <a:rPr lang="en-US" sz="1100" dirty="0">
+                <a:solidFill>
+                  <a:srgbClr val="6B6256"/>
+                </a:solidFill>
+                <a:latin typeface="Noto Sans KR" pitchFamily="34" charset="0"/>
+                <a:ea typeface="Noto Sans KR" pitchFamily="34" charset="-122"/>
+                <a:cs typeface="Noto Sans KR" pitchFamily="34" charset="-120"/>
+              </a:rPr>
+              <a:t>팀장 </a:t>
+            </a:r>
+            <a:pPr algn="ctr" indent="0" marL="0">
+              <a:buNone/>
+            </a:pPr>
+            <a:r>
+              <a:rPr lang="en-US" sz="1100" dirty="0">
+                <a:solidFill>
+                  <a:srgbClr val="1A2027"/>
+                </a:solidFill>
+                <a:latin typeface="Noto Sans KR" pitchFamily="34" charset="0"/>
+                <a:ea typeface="Noto Sans KR" pitchFamily="34" charset="-122"/>
+                <a:cs typeface="Noto Sans KR" pitchFamily="34" charset="-120"/>
+              </a:rPr>
+              <a:t>이정주</a:t>
+            </a:r>
+            <a:pPr algn="ctr" indent="0" marL="0">
+              <a:buNone/>
+            </a:pPr>
+            <a:r>
+              <a:rPr lang="en-US" sz="1100" dirty="0">
+                <a:solidFill>
+                  <a:srgbClr val="6B6256"/>
+                </a:solidFill>
+                <a:latin typeface="Noto Sans KR" pitchFamily="34" charset="0"/>
+                <a:ea typeface="Noto Sans KR" pitchFamily="34" charset="-122"/>
+                <a:cs typeface="Noto Sans KR" pitchFamily="34" charset="-120"/>
+              </a:rPr>
+              <a:t>   ·   부팀장 </a:t>
+            </a:r>
+            <a:pPr algn="ctr" indent="0" marL="0">
+              <a:buNone/>
+            </a:pPr>
+            <a:r>
+              <a:rPr lang="en-US" sz="1100" dirty="0">
+                <a:solidFill>
+                  <a:srgbClr val="1A2027"/>
+                </a:solidFill>
+                <a:latin typeface="Noto Sans KR" pitchFamily="34" charset="0"/>
+                <a:ea typeface="Noto Sans KR" pitchFamily="34" charset="-122"/>
+                <a:cs typeface="Noto Sans KR" pitchFamily="34" charset="-120"/>
+              </a:rPr>
+              <a:t>백승환</a:t>
+            </a:r>
+            <a:pPr algn="ctr" indent="0" marL="0">
+              <a:buNone/>
+            </a:pPr>
+            <a:r>
+              <a:rPr lang="en-US" sz="1100" dirty="0">
+                <a:solidFill>
+                  <a:srgbClr val="6B6256"/>
+                </a:solidFill>
+                <a:latin typeface="Noto Sans KR" pitchFamily="34" charset="0"/>
+                <a:ea typeface="Noto Sans KR" pitchFamily="34" charset="-122"/>
+                <a:cs typeface="Noto Sans KR" pitchFamily="34" charset="-120"/>
+              </a:rPr>
+              <a:t>   ·   팀원 </a:t>
+            </a:r>
+            <a:pPr algn="ctr" indent="0" marL="0">
+              <a:buNone/>
+            </a:pPr>
+            <a:r>
+              <a:rPr lang="en-US" sz="1100" dirty="0">
+                <a:solidFill>
+                  <a:srgbClr val="1A2027"/>
+                </a:solidFill>
+                <a:latin typeface="Noto Sans KR" pitchFamily="34" charset="0"/>
+                <a:ea typeface="Noto Sans KR" pitchFamily="34" charset="-122"/>
+                <a:cs typeface="Noto Sans KR" pitchFamily="34" charset="-120"/>
+              </a:rPr>
+              <a:t>오세울, 문규승</a:t>
             </a:r>
             <a:endParaRPr lang="en-US" sz="1400" dirty="0"/>
           </a:p>
